--- a/MazingiraKenya-Activation-Plan.pptx
+++ b/MazingiraKenya-Activation-Plan.pptx
@@ -15,9 +15,10 @@
     <p:sldId id="263" r:id="rId9"/>
     <p:sldId id="264" r:id="rId10"/>
     <p:sldId id="265" r:id="rId11"/>
+    <p:sldId id="266" r:id="rId12"/>
   </p:sldIdLst>
   <p:notesMasterIdLst>
-    <p:notesMasterId r:id="rId12"/>
+    <p:notesMasterId r:id="rId13"/>
   </p:notesMasterIdLst>
   <p:sldSz cx="12192000" cy="6858000"/>
   <p:notesSz cx="6858000" cy="12192000"/>
@@ -623,6 +624,94 @@
             <a:fld id="{F7021451-1387-4CA6-816F-3879F97B5CBC}" type="slidenum">
               <a:rPr lang="en-US"/>
               <a:t>10</a:t>
+            </a:fld>
+            <a:endParaRPr lang="en-US"/>
+          </a:p>
+        </p:txBody>
+      </p:sp>
+    </p:spTree>
+    <p:extLst>
+      <p:ext uri="{BB962C8B-B14F-4D97-AF65-F5344CB8AC3E}">
+        <p14:creationId xmlns:p14="http://schemas.microsoft.com/office/powerpoint/2010/main" val="1024086991"/>
+      </p:ext>
+    </p:extLst>
+  </p:cSld>
+  <p:clrMapOvr>
+    <a:masterClrMapping/>
+  </p:clrMapOvr>
+</p:notes>
+</file>
+
+<file path=ppt/notesSlides/notesSlide11.xml><?xml version="1.0" encoding="utf-8"?>
+<p:notes xmlns:a="http://schemas.openxmlformats.org/drawingml/2006/main" xmlns:r="http://schemas.openxmlformats.org/officeDocument/2006/relationships" xmlns:p="http://schemas.openxmlformats.org/presentationml/2006/main">
+  <p:cSld>
+    <p:spTree>
+      <p:nvGrpSpPr>
+        <p:cNvPr id="1" name=""/>
+        <p:cNvGrpSpPr/>
+        <p:nvPr/>
+      </p:nvGrpSpPr>
+      <p:grpSpPr>
+        <a:xfrm>
+          <a:off x="0" y="0"/>
+          <a:ext cx="0" cy="0"/>
+          <a:chOff x="0" y="0"/>
+          <a:chExt cx="0" cy="0"/>
+        </a:xfrm>
+      </p:grpSpPr>
+      <p:sp>
+        <p:nvSpPr>
+          <p:cNvPr id="2" name="Slide Image Placeholder 1"/>
+          <p:cNvSpPr>
+            <a:spLocks noGrp="1" noRot="1" noChangeAspect="1"/>
+          </p:cNvSpPr>
+          <p:nvPr>
+            <p:ph type="sldImg"/>
+          </p:nvPr>
+        </p:nvSpPr>
+        <p:spPr/>
+      </p:sp>
+      <p:sp>
+        <p:nvSpPr>
+          <p:cNvPr id="3" name="Notes Placeholder 2"/>
+          <p:cNvSpPr>
+            <a:spLocks noGrp="1"/>
+          </p:cNvSpPr>
+          <p:nvPr>
+            <p:ph type="body" idx="1"/>
+          </p:nvPr>
+        </p:nvSpPr>
+        <p:spPr/>
+        <p:txBody>
+          <a:bodyPr/>
+          <a:lstStyle/>
+          <a:p>
+            <a:r>
+              <a:rPr lang="en-US" dirty="0"/>
+              <a:t/>
+            </a:r>
+            <a:endParaRPr lang="en-US" dirty="0"/>
+          </a:p>
+        </p:txBody>
+      </p:sp>
+      <p:sp>
+        <p:nvSpPr>
+          <p:cNvPr id="4" name="Slide Number Placeholder 3"/>
+          <p:cNvSpPr>
+            <a:spLocks noGrp="1"/>
+          </p:cNvSpPr>
+          <p:nvPr>
+            <p:ph type="sldNum" sz="quarter" idx="10"/>
+          </p:nvPr>
+        </p:nvSpPr>
+        <p:spPr/>
+        <p:txBody>
+          <a:bodyPr/>
+          <a:lstStyle/>
+          <a:p>
+            <a:fld id="{F7021451-1387-4CA6-816F-3879F97B5CBC}" type="slidenum">
+              <a:rPr lang="en-US"/>
+              <a:t>11</a:t>
             </a:fld>
             <a:endParaRPr lang="en-US"/>
           </a:p>
@@ -1889,6 +1978,827 @@
     <p:bg>
       <p:bgPr>
         <a:solidFill>
+          <a:srgbClr val="FFFFFF"/>
+        </a:solidFill>
+      </p:bgPr>
+    </p:bg>
+    <p:spTree>
+      <p:nvGrpSpPr>
+        <p:cNvPr id="1" name=""/>
+        <p:cNvGrpSpPr/>
+        <p:nvPr/>
+      </p:nvGrpSpPr>
+      <p:grpSpPr>
+        <a:xfrm>
+          <a:off x="0" y="0"/>
+          <a:ext cx="0" cy="0"/>
+          <a:chOff x="0" y="0"/>
+          <a:chExt cx="0" cy="0"/>
+        </a:xfrm>
+      </p:grpSpPr>
+      <p:sp>
+        <p:nvSpPr>
+          <p:cNvPr id="2" name="Text 0"/>
+          <p:cNvSpPr/>
+          <p:nvPr/>
+        </p:nvSpPr>
+        <p:spPr>
+          <a:xfrm>
+            <a:off x="548640" y="384048"/>
+            <a:ext cx="10972800" cy="274320"/>
+          </a:xfrm>
+          <a:prstGeom prst="rect">
+            <a:avLst/>
+          </a:prstGeom>
+          <a:noFill/>
+          <a:ln/>
+        </p:spPr>
+        <p:txBody>
+          <a:bodyPr wrap="square" lIns="0" tIns="0" rIns="0" bIns="0" rtlCol="0" anchor="ctr"/>
+          <a:lstStyle/>
+          <a:p>
+            <a:pPr indent="0" marL="0">
+              <a:buNone/>
+            </a:pPr>
+            <a:r>
+              <a:rPr lang="en-US" sz="1200" b="1" spc="200" kern="0" dirty="0">
+                <a:solidFill>
+                  <a:srgbClr val="EE9455"/>
+                </a:solidFill>
+                <a:latin typeface="Calibri" pitchFamily="34" charset="0"/>
+                <a:ea typeface="Calibri" pitchFamily="34" charset="-122"/>
+                <a:cs typeface="Calibri" pitchFamily="34" charset="-120"/>
+              </a:rPr>
+              <a:t>MEASURING SUCCESS</a:t>
+            </a:r>
+            <a:endParaRPr lang="en-US" sz="1200" dirty="0"/>
+          </a:p>
+        </p:txBody>
+      </p:sp>
+      <p:sp>
+        <p:nvSpPr>
+          <p:cNvPr id="3" name="Text 1"/>
+          <p:cNvSpPr/>
+          <p:nvPr/>
+        </p:nvSpPr>
+        <p:spPr>
+          <a:xfrm>
+            <a:off x="548640" y="658368"/>
+            <a:ext cx="11064240" cy="640080"/>
+          </a:xfrm>
+          <a:prstGeom prst="rect">
+            <a:avLst/>
+          </a:prstGeom>
+          <a:noFill/>
+          <a:ln/>
+        </p:spPr>
+        <p:txBody>
+          <a:bodyPr wrap="square" lIns="0" tIns="0" rIns="0" bIns="0" rtlCol="0" anchor="ctr"/>
+          <a:lstStyle/>
+          <a:p>
+            <a:pPr indent="0" marL="0">
+              <a:buNone/>
+            </a:pPr>
+            <a:r>
+              <a:rPr lang="en-US" sz="3000" b="1" dirty="0">
+                <a:solidFill>
+                  <a:srgbClr val="1B6B4A"/>
+                </a:solidFill>
+                <a:latin typeface="Cambria" pitchFamily="34" charset="0"/>
+                <a:ea typeface="Cambria" pitchFamily="34" charset="-122"/>
+                <a:cs typeface="Cambria" pitchFamily="34" charset="-120"/>
+              </a:rPr>
+              <a:t>What we watch after launch</a:t>
+            </a:r>
+            <a:endParaRPr lang="en-US" sz="3000" dirty="0"/>
+          </a:p>
+        </p:txBody>
+      </p:sp>
+      <p:sp>
+        <p:nvSpPr>
+          <p:cNvPr id="4" name="Shape 2"/>
+          <p:cNvSpPr/>
+          <p:nvPr/>
+        </p:nvSpPr>
+        <p:spPr>
+          <a:xfrm>
+            <a:off x="548640" y="1691640"/>
+            <a:ext cx="3566160" cy="1783080"/>
+          </a:xfrm>
+          <a:prstGeom prst="roundRect">
+            <a:avLst>
+              <a:gd name="adj" fmla="val 4103"/>
+            </a:avLst>
+          </a:prstGeom>
+          <a:solidFill>
+            <a:srgbClr val="FFFFFF"/>
+          </a:solidFill>
+          <a:ln w="9525">
+            <a:solidFill>
+              <a:srgbClr val="D9E2DC"/>
+            </a:solidFill>
+            <a:prstDash val="solid"/>
+          </a:ln>
+          <a:effectLst>
+            <a:outerShdw sx="100000" sy="100000" kx="0" ky="0" algn="bl" rotWithShape="0" blurRad="76200" dist="25400" dir="5400000">
+              <a:srgbClr val="9AA8A0">
+                <a:alpha val="35000"/>
+              </a:srgbClr>
+            </a:outerShdw>
+          </a:effectLst>
+        </p:spPr>
+      </p:sp>
+      <p:sp>
+        <p:nvSpPr>
+          <p:cNvPr id="5" name="Text 3"/>
+          <p:cNvSpPr/>
+          <p:nvPr/>
+        </p:nvSpPr>
+        <p:spPr>
+          <a:xfrm>
+            <a:off x="640080" y="1856232"/>
+            <a:ext cx="3383280" cy="822960"/>
+          </a:xfrm>
+          <a:prstGeom prst="rect">
+            <a:avLst/>
+          </a:prstGeom>
+          <a:noFill/>
+          <a:ln/>
+        </p:spPr>
+        <p:txBody>
+          <a:bodyPr wrap="square" lIns="0" tIns="0" rIns="0" bIns="0" rtlCol="0" anchor="ctr"/>
+          <a:lstStyle/>
+          <a:p>
+            <a:pPr algn="ctr" indent="0" marL="0">
+              <a:buNone/>
+            </a:pPr>
+            <a:r>
+              <a:rPr lang="en-US" sz="3400" b="1" dirty="0">
+                <a:solidFill>
+                  <a:srgbClr val="1B6B4A"/>
+                </a:solidFill>
+                <a:latin typeface="Cambria" pitchFamily="34" charset="0"/>
+                <a:ea typeface="Cambria" pitchFamily="34" charset="-122"/>
+                <a:cs typeface="Cambria" pitchFamily="34" charset="-120"/>
+              </a:rPr>
+              <a:t>30</a:t>
+            </a:r>
+            <a:endParaRPr lang="en-US" sz="3400" dirty="0"/>
+          </a:p>
+        </p:txBody>
+      </p:sp>
+      <p:sp>
+        <p:nvSpPr>
+          <p:cNvPr id="6" name="Text 4"/>
+          <p:cNvSpPr/>
+          <p:nvPr/>
+        </p:nvSpPr>
+        <p:spPr>
+          <a:xfrm>
+            <a:off x="658368" y="2651760"/>
+            <a:ext cx="3346704" cy="777240"/>
+          </a:xfrm>
+          <a:prstGeom prst="rect">
+            <a:avLst/>
+          </a:prstGeom>
+          <a:noFill/>
+          <a:ln/>
+        </p:spPr>
+        <p:txBody>
+          <a:bodyPr wrap="square" lIns="0" tIns="0" rIns="0" bIns="0" rtlCol="0" anchor="t"/>
+          <a:lstStyle/>
+          <a:p>
+            <a:pPr algn="ctr" indent="0" marL="0">
+              <a:buNone/>
+            </a:pPr>
+            <a:r>
+              <a:rPr lang="en-US" sz="1100" dirty="0">
+                <a:solidFill>
+                  <a:srgbClr val="5D6B63"/>
+                </a:solidFill>
+                <a:latin typeface="Calibri" pitchFamily="34" charset="0"/>
+                <a:ea typeface="Calibri" pitchFamily="34" charset="-122"/>
+                <a:cs typeface="Calibri" pitchFamily="34" charset="-120"/>
+              </a:rPr>
+              <a:t>guests, ≥70% partners onboarded on the day</a:t>
+            </a:r>
+            <a:endParaRPr lang="en-US" sz="1100" dirty="0"/>
+          </a:p>
+        </p:txBody>
+      </p:sp>
+      <p:sp>
+        <p:nvSpPr>
+          <p:cNvPr id="7" name="Shape 5"/>
+          <p:cNvSpPr/>
+          <p:nvPr/>
+        </p:nvSpPr>
+        <p:spPr>
+          <a:xfrm>
+            <a:off x="4261104" y="1691640"/>
+            <a:ext cx="3566160" cy="1783080"/>
+          </a:xfrm>
+          <a:prstGeom prst="roundRect">
+            <a:avLst>
+              <a:gd name="adj" fmla="val 4103"/>
+            </a:avLst>
+          </a:prstGeom>
+          <a:solidFill>
+            <a:srgbClr val="FFFFFF"/>
+          </a:solidFill>
+          <a:ln w="9525">
+            <a:solidFill>
+              <a:srgbClr val="D9E2DC"/>
+            </a:solidFill>
+            <a:prstDash val="solid"/>
+          </a:ln>
+          <a:effectLst>
+            <a:outerShdw sx="100000" sy="100000" kx="0" ky="0" algn="bl" rotWithShape="0" blurRad="76200" dist="25400" dir="5400000">
+              <a:srgbClr val="9AA8A0">
+                <a:alpha val="35000"/>
+              </a:srgbClr>
+            </a:outerShdw>
+          </a:effectLst>
+        </p:spPr>
+      </p:sp>
+      <p:sp>
+        <p:nvSpPr>
+          <p:cNvPr id="8" name="Text 6"/>
+          <p:cNvSpPr/>
+          <p:nvPr/>
+        </p:nvSpPr>
+        <p:spPr>
+          <a:xfrm>
+            <a:off x="4352544" y="1856232"/>
+            <a:ext cx="3383280" cy="822960"/>
+          </a:xfrm>
+          <a:prstGeom prst="rect">
+            <a:avLst/>
+          </a:prstGeom>
+          <a:noFill/>
+          <a:ln/>
+        </p:spPr>
+        <p:txBody>
+          <a:bodyPr wrap="square" lIns="0" tIns="0" rIns="0" bIns="0" rtlCol="0" anchor="ctr"/>
+          <a:lstStyle/>
+          <a:p>
+            <a:pPr algn="ctr" indent="0" marL="0">
+              <a:buNone/>
+            </a:pPr>
+            <a:r>
+              <a:rPr lang="en-US" sz="3400" b="1" dirty="0">
+                <a:solidFill>
+                  <a:srgbClr val="EE9455"/>
+                </a:solidFill>
+                <a:latin typeface="Cambria" pitchFamily="34" charset="0"/>
+                <a:ea typeface="Cambria" pitchFamily="34" charset="-122"/>
+                <a:cs typeface="Cambria" pitchFamily="34" charset="-120"/>
+              </a:rPr>
+              <a:t>25+</a:t>
+            </a:r>
+            <a:endParaRPr lang="en-US" sz="3400" dirty="0"/>
+          </a:p>
+        </p:txBody>
+      </p:sp>
+      <p:sp>
+        <p:nvSpPr>
+          <p:cNvPr id="9" name="Text 7"/>
+          <p:cNvSpPr/>
+          <p:nvPr/>
+        </p:nvSpPr>
+        <p:spPr>
+          <a:xfrm>
+            <a:off x="4370832" y="2651760"/>
+            <a:ext cx="3346704" cy="777240"/>
+          </a:xfrm>
+          <a:prstGeom prst="rect">
+            <a:avLst/>
+          </a:prstGeom>
+          <a:noFill/>
+          <a:ln/>
+        </p:spPr>
+        <p:txBody>
+          <a:bodyPr wrap="square" lIns="0" tIns="0" rIns="0" bIns="0" rtlCol="0" anchor="t"/>
+          <a:lstStyle/>
+          <a:p>
+            <a:pPr algn="ctr" indent="0" marL="0">
+              <a:buNone/>
+            </a:pPr>
+            <a:r>
+              <a:rPr lang="en-US" sz="1100" dirty="0">
+                <a:solidFill>
+                  <a:srgbClr val="5D6B63"/>
+                </a:solidFill>
+                <a:latin typeface="Calibri" pitchFamily="34" charset="0"/>
+                <a:ea typeface="Calibri" pitchFamily="34" charset="-122"/>
+                <a:cs typeface="Calibri" pitchFamily="34" charset="-120"/>
+              </a:rPr>
+              <a:t>active member orgs within 6 weeks</a:t>
+            </a:r>
+            <a:endParaRPr lang="en-US" sz="1100" dirty="0"/>
+          </a:p>
+        </p:txBody>
+      </p:sp>
+      <p:sp>
+        <p:nvSpPr>
+          <p:cNvPr id="10" name="Shape 8"/>
+          <p:cNvSpPr/>
+          <p:nvPr/>
+        </p:nvSpPr>
+        <p:spPr>
+          <a:xfrm>
+            <a:off x="7973568" y="1691640"/>
+            <a:ext cx="3566160" cy="1783080"/>
+          </a:xfrm>
+          <a:prstGeom prst="roundRect">
+            <a:avLst>
+              <a:gd name="adj" fmla="val 4103"/>
+            </a:avLst>
+          </a:prstGeom>
+          <a:solidFill>
+            <a:srgbClr val="FFFFFF"/>
+          </a:solidFill>
+          <a:ln w="9525">
+            <a:solidFill>
+              <a:srgbClr val="D9E2DC"/>
+            </a:solidFill>
+            <a:prstDash val="solid"/>
+          </a:ln>
+          <a:effectLst>
+            <a:outerShdw sx="100000" sy="100000" kx="0" ky="0" algn="bl" rotWithShape="0" blurRad="76200" dist="25400" dir="5400000">
+              <a:srgbClr val="9AA8A0">
+                <a:alpha val="35000"/>
+              </a:srgbClr>
+            </a:outerShdw>
+          </a:effectLst>
+        </p:spPr>
+      </p:sp>
+      <p:sp>
+        <p:nvSpPr>
+          <p:cNvPr id="11" name="Text 9"/>
+          <p:cNvSpPr/>
+          <p:nvPr/>
+        </p:nvSpPr>
+        <p:spPr>
+          <a:xfrm>
+            <a:off x="8065008" y="1856232"/>
+            <a:ext cx="3383280" cy="822960"/>
+          </a:xfrm>
+          <a:prstGeom prst="rect">
+            <a:avLst/>
+          </a:prstGeom>
+          <a:noFill/>
+          <a:ln/>
+        </p:spPr>
+        <p:txBody>
+          <a:bodyPr wrap="square" lIns="0" tIns="0" rIns="0" bIns="0" rtlCol="0" anchor="ctr"/>
+          <a:lstStyle/>
+          <a:p>
+            <a:pPr algn="ctr" indent="0" marL="0">
+              <a:buNone/>
+            </a:pPr>
+            <a:r>
+              <a:rPr lang="en-US" sz="3400" b="1" dirty="0">
+                <a:solidFill>
+                  <a:srgbClr val="2C7A55"/>
+                </a:solidFill>
+                <a:latin typeface="Cambria" pitchFamily="34" charset="0"/>
+                <a:ea typeface="Cambria" pitchFamily="34" charset="-122"/>
+                <a:cs typeface="Cambria" pitchFamily="34" charset="-120"/>
+              </a:rPr>
+              <a:t>40+</a:t>
+            </a:r>
+            <a:endParaRPr lang="en-US" sz="3400" dirty="0"/>
+          </a:p>
+        </p:txBody>
+      </p:sp>
+      <p:sp>
+        <p:nvSpPr>
+          <p:cNvPr id="12" name="Text 10"/>
+          <p:cNvSpPr/>
+          <p:nvPr/>
+        </p:nvSpPr>
+        <p:spPr>
+          <a:xfrm>
+            <a:off x="8083296" y="2651760"/>
+            <a:ext cx="3346704" cy="777240"/>
+          </a:xfrm>
+          <a:prstGeom prst="rect">
+            <a:avLst/>
+          </a:prstGeom>
+          <a:noFill/>
+          <a:ln/>
+        </p:spPr>
+        <p:txBody>
+          <a:bodyPr wrap="square" lIns="0" tIns="0" rIns="0" bIns="0" rtlCol="0" anchor="t"/>
+          <a:lstStyle/>
+          <a:p>
+            <a:pPr algn="ctr" indent="0" marL="0">
+              <a:buNone/>
+            </a:pPr>
+            <a:r>
+              <a:rPr lang="en-US" sz="1100" dirty="0">
+                <a:solidFill>
+                  <a:srgbClr val="5D6B63"/>
+                </a:solidFill>
+                <a:latin typeface="Calibri" pitchFamily="34" charset="0"/>
+                <a:ea typeface="Calibri" pitchFamily="34" charset="-122"/>
+                <a:cs typeface="Calibri" pitchFamily="34" charset="-120"/>
+              </a:rPr>
+              <a:t>resources uploaded in the first month</a:t>
+            </a:r>
+            <a:endParaRPr lang="en-US" sz="1100" dirty="0"/>
+          </a:p>
+        </p:txBody>
+      </p:sp>
+      <p:sp>
+        <p:nvSpPr>
+          <p:cNvPr id="13" name="Shape 11"/>
+          <p:cNvSpPr/>
+          <p:nvPr/>
+        </p:nvSpPr>
+        <p:spPr>
+          <a:xfrm>
+            <a:off x="548640" y="3657600"/>
+            <a:ext cx="3566160" cy="1783080"/>
+          </a:xfrm>
+          <a:prstGeom prst="roundRect">
+            <a:avLst>
+              <a:gd name="adj" fmla="val 4103"/>
+            </a:avLst>
+          </a:prstGeom>
+          <a:solidFill>
+            <a:srgbClr val="FFFFFF"/>
+          </a:solidFill>
+          <a:ln w="9525">
+            <a:solidFill>
+              <a:srgbClr val="D9E2DC"/>
+            </a:solidFill>
+            <a:prstDash val="solid"/>
+          </a:ln>
+          <a:effectLst>
+            <a:outerShdw sx="100000" sy="100000" kx="0" ky="0" algn="bl" rotWithShape="0" blurRad="76200" dist="25400" dir="5400000">
+              <a:srgbClr val="9AA8A0">
+                <a:alpha val="35000"/>
+              </a:srgbClr>
+            </a:outerShdw>
+          </a:effectLst>
+        </p:spPr>
+      </p:sp>
+      <p:sp>
+        <p:nvSpPr>
+          <p:cNvPr id="14" name="Text 12"/>
+          <p:cNvSpPr/>
+          <p:nvPr/>
+        </p:nvSpPr>
+        <p:spPr>
+          <a:xfrm>
+            <a:off x="640080" y="3822192"/>
+            <a:ext cx="3383280" cy="822960"/>
+          </a:xfrm>
+          <a:prstGeom prst="rect">
+            <a:avLst/>
+          </a:prstGeom>
+          <a:noFill/>
+          <a:ln/>
+        </p:spPr>
+        <p:txBody>
+          <a:bodyPr wrap="square" lIns="0" tIns="0" rIns="0" bIns="0" rtlCol="0" anchor="ctr"/>
+          <a:lstStyle/>
+          <a:p>
+            <a:pPr algn="ctr" indent="0" marL="0">
+              <a:buNone/>
+            </a:pPr>
+            <a:r>
+              <a:rPr lang="en-US" sz="3400" b="1" dirty="0">
+                <a:solidFill>
+                  <a:srgbClr val="1B6B4A"/>
+                </a:solidFill>
+                <a:latin typeface="Cambria" pitchFamily="34" charset="0"/>
+                <a:ea typeface="Cambria" pitchFamily="34" charset="-122"/>
+                <a:cs typeface="Cambria" pitchFamily="34" charset="-120"/>
+              </a:rPr>
+              <a:t>3</a:t>
+            </a:r>
+            <a:endParaRPr lang="en-US" sz="3400" dirty="0"/>
+          </a:p>
+        </p:txBody>
+      </p:sp>
+      <p:sp>
+        <p:nvSpPr>
+          <p:cNvPr id="15" name="Text 13"/>
+          <p:cNvSpPr/>
+          <p:nvPr/>
+        </p:nvSpPr>
+        <p:spPr>
+          <a:xfrm>
+            <a:off x="658368" y="4617720"/>
+            <a:ext cx="3346704" cy="777240"/>
+          </a:xfrm>
+          <a:prstGeom prst="rect">
+            <a:avLst/>
+          </a:prstGeom>
+          <a:noFill/>
+          <a:ln/>
+        </p:spPr>
+        <p:txBody>
+          <a:bodyPr wrap="square" lIns="0" tIns="0" rIns="0" bIns="0" rtlCol="0" anchor="t"/>
+          <a:lstStyle/>
+          <a:p>
+            <a:pPr algn="ctr" indent="0" marL="0">
+              <a:buNone/>
+            </a:pPr>
+            <a:r>
+              <a:rPr lang="en-US" sz="1100" dirty="0">
+                <a:solidFill>
+                  <a:srgbClr val="5D6B63"/>
+                </a:solidFill>
+                <a:latin typeface="Calibri" pitchFamily="34" charset="0"/>
+                <a:ea typeface="Calibri" pitchFamily="34" charset="-122"/>
+                <a:cs typeface="Calibri" pitchFamily="34" charset="-120"/>
+              </a:rPr>
+              <a:t>petitions live in quarter one</a:t>
+            </a:r>
+            <a:endParaRPr lang="en-US" sz="1100" dirty="0"/>
+          </a:p>
+        </p:txBody>
+      </p:sp>
+      <p:sp>
+        <p:nvSpPr>
+          <p:cNvPr id="16" name="Shape 14"/>
+          <p:cNvSpPr/>
+          <p:nvPr/>
+        </p:nvSpPr>
+        <p:spPr>
+          <a:xfrm>
+            <a:off x="4261104" y="3657600"/>
+            <a:ext cx="3566160" cy="1783080"/>
+          </a:xfrm>
+          <a:prstGeom prst="roundRect">
+            <a:avLst>
+              <a:gd name="adj" fmla="val 4103"/>
+            </a:avLst>
+          </a:prstGeom>
+          <a:solidFill>
+            <a:srgbClr val="FFFFFF"/>
+          </a:solidFill>
+          <a:ln w="9525">
+            <a:solidFill>
+              <a:srgbClr val="D9E2DC"/>
+            </a:solidFill>
+            <a:prstDash val="solid"/>
+          </a:ln>
+          <a:effectLst>
+            <a:outerShdw sx="100000" sy="100000" kx="0" ky="0" algn="bl" rotWithShape="0" blurRad="76200" dist="25400" dir="5400000">
+              <a:srgbClr val="9AA8A0">
+                <a:alpha val="35000"/>
+              </a:srgbClr>
+            </a:outerShdw>
+          </a:effectLst>
+        </p:spPr>
+      </p:sp>
+      <p:sp>
+        <p:nvSpPr>
+          <p:cNvPr id="17" name="Text 15"/>
+          <p:cNvSpPr/>
+          <p:nvPr/>
+        </p:nvSpPr>
+        <p:spPr>
+          <a:xfrm>
+            <a:off x="4352544" y="3822192"/>
+            <a:ext cx="3383280" cy="822960"/>
+          </a:xfrm>
+          <a:prstGeom prst="rect">
+            <a:avLst/>
+          </a:prstGeom>
+          <a:noFill/>
+          <a:ln/>
+        </p:spPr>
+        <p:txBody>
+          <a:bodyPr wrap="square" lIns="0" tIns="0" rIns="0" bIns="0" rtlCol="0" anchor="ctr"/>
+          <a:lstStyle/>
+          <a:p>
+            <a:pPr algn="ctr" indent="0" marL="0">
+              <a:buNone/>
+            </a:pPr>
+            <a:r>
+              <a:rPr lang="en-US" sz="3400" b="1" dirty="0">
+                <a:solidFill>
+                  <a:srgbClr val="EE9455"/>
+                </a:solidFill>
+                <a:latin typeface="Cambria" pitchFamily="34" charset="0"/>
+                <a:ea typeface="Cambria" pitchFamily="34" charset="-122"/>
+                <a:cs typeface="Cambria" pitchFamily="34" charset="-120"/>
+              </a:rPr>
+              <a:t>8+</a:t>
+            </a:r>
+            <a:endParaRPr lang="en-US" sz="3400" dirty="0"/>
+          </a:p>
+        </p:txBody>
+      </p:sp>
+      <p:sp>
+        <p:nvSpPr>
+          <p:cNvPr id="18" name="Text 16"/>
+          <p:cNvSpPr/>
+          <p:nvPr/>
+        </p:nvSpPr>
+        <p:spPr>
+          <a:xfrm>
+            <a:off x="4370832" y="4617720"/>
+            <a:ext cx="3346704" cy="777240"/>
+          </a:xfrm>
+          <a:prstGeom prst="rect">
+            <a:avLst/>
+          </a:prstGeom>
+          <a:noFill/>
+          <a:ln/>
+        </p:spPr>
+        <p:txBody>
+          <a:bodyPr wrap="square" lIns="0" tIns="0" rIns="0" bIns="0" rtlCol="0" anchor="t"/>
+          <a:lstStyle/>
+          <a:p>
+            <a:pPr algn="ctr" indent="0" marL="0">
+              <a:buNone/>
+            </a:pPr>
+            <a:r>
+              <a:rPr lang="en-US" sz="1100" dirty="0">
+                <a:solidFill>
+                  <a:srgbClr val="5D6B63"/>
+                </a:solidFill>
+                <a:latin typeface="Calibri" pitchFamily="34" charset="0"/>
+                <a:ea typeface="Calibri" pitchFamily="34" charset="-122"/>
+                <a:cs typeface="Calibri" pitchFamily="34" charset="-120"/>
+              </a:rPr>
+              <a:t>media pickups from the launch</a:t>
+            </a:r>
+            <a:endParaRPr lang="en-US" sz="1100" dirty="0"/>
+          </a:p>
+        </p:txBody>
+      </p:sp>
+      <p:sp>
+        <p:nvSpPr>
+          <p:cNvPr id="19" name="Shape 17"/>
+          <p:cNvSpPr/>
+          <p:nvPr/>
+        </p:nvSpPr>
+        <p:spPr>
+          <a:xfrm>
+            <a:off x="7973568" y="3657600"/>
+            <a:ext cx="3566160" cy="1783080"/>
+          </a:xfrm>
+          <a:prstGeom prst="roundRect">
+            <a:avLst>
+              <a:gd name="adj" fmla="val 4103"/>
+            </a:avLst>
+          </a:prstGeom>
+          <a:solidFill>
+            <a:srgbClr val="FFFFFF"/>
+          </a:solidFill>
+          <a:ln w="9525">
+            <a:solidFill>
+              <a:srgbClr val="D9E2DC"/>
+            </a:solidFill>
+            <a:prstDash val="solid"/>
+          </a:ln>
+          <a:effectLst>
+            <a:outerShdw sx="100000" sy="100000" kx="0" ky="0" algn="bl" rotWithShape="0" blurRad="76200" dist="25400" dir="5400000">
+              <a:srgbClr val="9AA8A0">
+                <a:alpha val="35000"/>
+              </a:srgbClr>
+            </a:outerShdw>
+          </a:effectLst>
+        </p:spPr>
+      </p:sp>
+      <p:sp>
+        <p:nvSpPr>
+          <p:cNvPr id="20" name="Text 18"/>
+          <p:cNvSpPr/>
+          <p:nvPr/>
+        </p:nvSpPr>
+        <p:spPr>
+          <a:xfrm>
+            <a:off x="8065008" y="3822192"/>
+            <a:ext cx="3383280" cy="822960"/>
+          </a:xfrm>
+          <a:prstGeom prst="rect">
+            <a:avLst/>
+          </a:prstGeom>
+          <a:noFill/>
+          <a:ln/>
+        </p:spPr>
+        <p:txBody>
+          <a:bodyPr wrap="square" lIns="0" tIns="0" rIns="0" bIns="0" rtlCol="0" anchor="ctr"/>
+          <a:lstStyle/>
+          <a:p>
+            <a:pPr algn="ctr" indent="0" marL="0">
+              <a:buNone/>
+            </a:pPr>
+            <a:r>
+              <a:rPr lang="en-US" sz="3400" b="1" dirty="0">
+                <a:solidFill>
+                  <a:srgbClr val="2C7A55"/>
+                </a:solidFill>
+                <a:latin typeface="Cambria" pitchFamily="34" charset="0"/>
+                <a:ea typeface="Cambria" pitchFamily="34" charset="-122"/>
+                <a:cs typeface="Cambria" pitchFamily="34" charset="-120"/>
+              </a:rPr>
+              <a:t>Weekly</a:t>
+            </a:r>
+            <a:endParaRPr lang="en-US" sz="3400" dirty="0"/>
+          </a:p>
+        </p:txBody>
+      </p:sp>
+      <p:sp>
+        <p:nvSpPr>
+          <p:cNvPr id="21" name="Text 19"/>
+          <p:cNvSpPr/>
+          <p:nvPr/>
+        </p:nvSpPr>
+        <p:spPr>
+          <a:xfrm>
+            <a:off x="8083296" y="4617720"/>
+            <a:ext cx="3346704" cy="777240"/>
+          </a:xfrm>
+          <a:prstGeom prst="rect">
+            <a:avLst/>
+          </a:prstGeom>
+          <a:noFill/>
+          <a:ln/>
+        </p:spPr>
+        <p:txBody>
+          <a:bodyPr wrap="square" lIns="0" tIns="0" rIns="0" bIns="0" rtlCol="0" anchor="t"/>
+          <a:lstStyle/>
+          <a:p>
+            <a:pPr algn="ctr" indent="0" marL="0">
+              <a:buNone/>
+            </a:pPr>
+            <a:r>
+              <a:rPr lang="en-US" sz="1100" dirty="0">
+                <a:solidFill>
+                  <a:srgbClr val="5D6B63"/>
+                </a:solidFill>
+                <a:latin typeface="Calibri" pitchFamily="34" charset="0"/>
+                <a:ea typeface="Calibri" pitchFamily="34" charset="-122"/>
+                <a:cs typeface="Calibri" pitchFamily="34" charset="-120"/>
+              </a:rPr>
+              <a:t>sign-ins tracked per org</a:t>
+            </a:r>
+            <a:endParaRPr lang="en-US" sz="1100" dirty="0"/>
+          </a:p>
+        </p:txBody>
+      </p:sp>
+      <p:sp>
+        <p:nvSpPr>
+          <p:cNvPr id="22" name="Text 20"/>
+          <p:cNvSpPr/>
+          <p:nvPr/>
+        </p:nvSpPr>
+        <p:spPr>
+          <a:xfrm>
+            <a:off x="548640" y="6446520"/>
+            <a:ext cx="11064240" cy="274320"/>
+          </a:xfrm>
+          <a:prstGeom prst="rect">
+            <a:avLst/>
+          </a:prstGeom>
+          <a:noFill/>
+          <a:ln/>
+        </p:spPr>
+        <p:txBody>
+          <a:bodyPr wrap="square" lIns="0" tIns="0" rIns="0" bIns="0" rtlCol="0" anchor="ctr"/>
+          <a:lstStyle/>
+          <a:p>
+            <a:pPr indent="0" marL="0">
+              <a:buNone/>
+            </a:pPr>
+            <a:r>
+              <a:rPr lang="en-US" sz="900" i="1" dirty="0">
+                <a:solidFill>
+                  <a:srgbClr val="5D6B63"/>
+                </a:solidFill>
+                <a:latin typeface="Calibri" pitchFamily="34" charset="0"/>
+                <a:ea typeface="Calibri" pitchFamily="34" charset="-122"/>
+                <a:cs typeface="Calibri" pitchFamily="34" charset="-120"/>
+              </a:rPr>
+              <a:t>MazingiraKenya · Activation &amp; launch plan</a:t>
+            </a:r>
+            <a:endParaRPr lang="en-US" sz="900" dirty="0"/>
+          </a:p>
+        </p:txBody>
+      </p:sp>
+    </p:spTree>
+  </p:cSld>
+  <p:clrMapOvr>
+    <a:masterClrMapping/>
+  </p:clrMapOvr>
+</p:sld>
+</file>
+
+<file path=ppt/slides/slide11.xml><?xml version="1.0" encoding="utf-8"?>
+<p:sld xmlns:a="http://schemas.openxmlformats.org/drawingml/2006/main" xmlns:r="http://schemas.openxmlformats.org/officeDocument/2006/relationships" xmlns:p="http://schemas.openxmlformats.org/presentationml/2006/main">
+  <p:cSld name="Slide 11">
+    <p:bg>
+      <p:bgPr>
+        <a:solidFill>
           <a:srgbClr val="0F2A20"/>
         </a:solidFill>
       </p:bgPr>
@@ -3198,7 +4108,7 @@
                 <a:ea typeface="Calibri" pitchFamily="34" charset="-122"/>
                 <a:cs typeface="Calibri" pitchFamily="34" charset="-120"/>
               </a:rPr>
-              <a:t>DIGITAL ENGAGEMENT</a:t>
+              <a:t>CONVENE · DECIDE · ACT</a:t>
             </a:r>
             <a:endParaRPr lang="en-US" sz="1200" dirty="0"/>
           </a:p>
@@ -3237,7 +4147,7 @@
                 <a:ea typeface="Cambria" pitchFamily="34" charset="-122"/>
                 <a:cs typeface="Cambria" pitchFamily="34" charset="-120"/>
               </a:rPr>
-              <a:t>The engine of adoption</a:t>
+              <a:t>The Coalition Room — where meetings produce action</a:t>
             </a:r>
             <a:endParaRPr lang="en-US" sz="3000" dirty="0"/>
           </a:p>
@@ -3251,12 +4161,12 @@
         </p:nvSpPr>
         <p:spPr>
           <a:xfrm>
-            <a:off x="548640" y="1600200"/>
-            <a:ext cx="3566160" cy="1600200"/>
+            <a:off x="548640" y="1554480"/>
+            <a:ext cx="5440680" cy="3063240"/>
           </a:xfrm>
           <a:prstGeom prst="roundRect">
             <a:avLst>
-              <a:gd name="adj" fmla="val 4571"/>
+              <a:gd name="adj" fmla="val 2388"/>
             </a:avLst>
           </a:prstGeom>
           <a:solidFill>
@@ -3279,23 +4189,42 @@
       </p:sp>
       <p:sp>
         <p:nvSpPr>
-          <p:cNvPr id="5" name="Shape 3"/>
-          <p:cNvSpPr/>
-          <p:nvPr/>
-        </p:nvSpPr>
-        <p:spPr>
-          <a:xfrm>
-            <a:off x="749808" y="1819656"/>
-            <a:ext cx="457200" cy="457200"/>
-          </a:xfrm>
-          <a:prstGeom prst="ellipse">
-            <a:avLst/>
-          </a:prstGeom>
-          <a:solidFill>
-            <a:srgbClr val="1B6B4A"/>
-          </a:solidFill>
-          <a:ln/>
-        </p:spPr>
+          <p:cNvPr id="5" name="Text 3"/>
+          <p:cNvSpPr/>
+          <p:nvPr/>
+        </p:nvSpPr>
+        <p:spPr>
+          <a:xfrm>
+            <a:off x="822960" y="1783080"/>
+            <a:ext cx="4846320" cy="411480"/>
+          </a:xfrm>
+          <a:prstGeom prst="rect">
+            <a:avLst/>
+          </a:prstGeom>
+          <a:noFill/>
+          <a:ln/>
+        </p:spPr>
+        <p:txBody>
+          <a:bodyPr wrap="square" lIns="0" tIns="0" rIns="0" bIns="0" rtlCol="0" anchor="ctr"/>
+          <a:lstStyle/>
+          <a:p>
+            <a:pPr indent="0" marL="0">
+              <a:buNone/>
+            </a:pPr>
+            <a:r>
+              <a:rPr lang="en-US" sz="1700" b="1" dirty="0">
+                <a:solidFill>
+                  <a:srgbClr val="1B6B4A"/>
+                </a:solidFill>
+                <a:latin typeface="Calibri" pitchFamily="34" charset="0"/>
+                <a:ea typeface="Calibri" pitchFamily="34" charset="-122"/>
+                <a:cs typeface="Calibri" pitchFamily="34" charset="-120"/>
+              </a:rPr>
+              <a:t>One tap to meet</a:t>
+            </a:r>
+            <a:endParaRPr lang="en-US" sz="1700" dirty="0"/>
+          </a:p>
+        </p:txBody>
       </p:sp>
       <p:sp>
         <p:nvSpPr>
@@ -3305,8 +4234,8 @@
         </p:nvSpPr>
         <p:spPr>
           <a:xfrm>
-            <a:off x="749808" y="1819656"/>
-            <a:ext cx="457200" cy="457200"/>
+            <a:off x="914400" y="2240280"/>
+            <a:ext cx="4846320" cy="2286000"/>
           </a:xfrm>
           <a:prstGeom prst="rect">
             <a:avLst/>
@@ -3318,50 +4247,15 @@
           <a:bodyPr wrap="square" lIns="0" tIns="0" rIns="0" bIns="0" rtlCol="0" anchor="ctr"/>
           <a:lstStyle/>
           <a:p>
-            <a:pPr algn="ctr" indent="0" marL="0">
-              <a:buNone/>
-            </a:pPr>
-            <a:r>
-              <a:rPr lang="en-US" sz="1500" b="1" dirty="0">
-                <a:solidFill>
-                  <a:srgbClr val="FFFFFF"/>
-                </a:solidFill>
-                <a:latin typeface="Calibri" pitchFamily="34" charset="0"/>
-                <a:ea typeface="Calibri" pitchFamily="34" charset="-122"/>
-                <a:cs typeface="Calibri" pitchFamily="34" charset="-120"/>
-              </a:rPr>
-              <a:t>1</a:t>
-            </a:r>
-            <a:endParaRPr lang="en-US" sz="1500" dirty="0"/>
-          </a:p>
-        </p:txBody>
-      </p:sp>
-      <p:sp>
-        <p:nvSpPr>
-          <p:cNvPr id="7" name="Text 5"/>
-          <p:cNvSpPr/>
-          <p:nvPr/>
-        </p:nvSpPr>
-        <p:spPr>
-          <a:xfrm>
-            <a:off x="1371600" y="1746504"/>
-            <a:ext cx="2606040" cy="310896"/>
-          </a:xfrm>
-          <a:prstGeom prst="rect">
-            <a:avLst/>
-          </a:prstGeom>
-          <a:noFill/>
-          <a:ln/>
-        </p:spPr>
-        <p:txBody>
-          <a:bodyPr wrap="square" lIns="0" tIns="0" rIns="0" bIns="0" rtlCol="0" anchor="ctr"/>
-          <a:lstStyle/>
-          <a:p>
-            <a:pPr indent="0" marL="0">
-              <a:buNone/>
-            </a:pPr>
-            <a:r>
-              <a:rPr lang="en-US" sz="1400" b="1" dirty="0">
+            <a:pPr marL="203200" indent="-203200">
+              <a:spcAft>
+                <a:spcPts val="1100"/>
+              </a:spcAft>
+              <a:buSzPct val="100000"/>
+              <a:buChar char="•"/>
+            </a:pPr>
+            <a:r>
+              <a:rPr lang="en-US" sz="1350" dirty="0">
                 <a:solidFill>
                   <a:srgbClr val="1D2621"/>
                 </a:solidFill>
@@ -3369,69 +4263,72 @@
                 <a:ea typeface="Calibri" pitchFamily="34" charset="-122"/>
                 <a:cs typeface="Calibri" pitchFamily="34" charset="-120"/>
               </a:rPr>
-              <a:t>Onboarding</a:t>
-            </a:r>
-            <a:endParaRPr lang="en-US" sz="1400" dirty="0"/>
-          </a:p>
-        </p:txBody>
-      </p:sp>
-      <p:sp>
-        <p:nvSpPr>
-          <p:cNvPr id="8" name="Text 6"/>
-          <p:cNvSpPr/>
-          <p:nvPr/>
-        </p:nvSpPr>
-        <p:spPr>
-          <a:xfrm>
-            <a:off x="1371600" y="2057400"/>
-            <a:ext cx="2606040" cy="1051560"/>
-          </a:xfrm>
-          <a:prstGeom prst="rect">
-            <a:avLst/>
-          </a:prstGeom>
-          <a:noFill/>
-          <a:ln/>
-        </p:spPr>
-        <p:txBody>
-          <a:bodyPr wrap="square" lIns="0" tIns="0" rIns="0" bIns="0" rtlCol="0" anchor="t"/>
-          <a:lstStyle/>
-          <a:p>
-            <a:pPr indent="0" marL="0">
-              <a:buNone/>
-            </a:pPr>
-            <a:r>
-              <a:rPr lang="en-US" sz="1150" dirty="0">
-                <a:solidFill>
-                  <a:srgbClr val="5D6B63"/>
-                </a:solidFill>
-                <a:latin typeface="Calibri" pitchFamily="34" charset="0"/>
-                <a:ea typeface="Calibri" pitchFamily="34" charset="-122"/>
-                <a:cs typeface="Calibri" pitchFamily="34" charset="-120"/>
-              </a:rPr>
-              <a:t>Personal invites + a 3-minute guided walkthrough per org</a:t>
-            </a:r>
-            <a:endParaRPr lang="en-US" sz="1150" dirty="0"/>
-          </a:p>
-        </p:txBody>
-      </p:sp>
-      <p:sp>
-        <p:nvSpPr>
-          <p:cNvPr id="9" name="Shape 7"/>
-          <p:cNvSpPr/>
-          <p:nvPr/>
-        </p:nvSpPr>
-        <p:spPr>
-          <a:xfrm>
-            <a:off x="4261104" y="1600200"/>
-            <a:ext cx="3566160" cy="1600200"/>
+              <a:t>Embedded video room — no account, no install, no app store</a:t>
+            </a:r>
+            <a:endParaRPr lang="en-US" sz="1350" dirty="0"/>
+          </a:p>
+          <a:p>
+            <a:pPr marL="203200" indent="-203200">
+              <a:spcAft>
+                <a:spcPts val="1100"/>
+              </a:spcAft>
+              <a:buSzPct val="100000"/>
+              <a:buChar char="•"/>
+            </a:pPr>
+            <a:r>
+              <a:rPr lang="en-US" sz="1350" dirty="0">
+                <a:solidFill>
+                  <a:srgbClr val="1D2621"/>
+                </a:solidFill>
+                <a:latin typeface="Calibri" pitchFamily="34" charset="0"/>
+                <a:ea typeface="Calibri" pitchFamily="34" charset="-122"/>
+                <a:cs typeface="Calibri" pitchFamily="34" charset="-120"/>
+              </a:rPr>
+              <a:t>Schedule a call and members get an auto calendar invite</a:t>
+            </a:r>
+            <a:endParaRPr lang="en-US" sz="1350" dirty="0"/>
+          </a:p>
+          <a:p>
+            <a:pPr marL="203200" indent="-203200">
+              <a:spcAft>
+                <a:spcPts val="1100"/>
+              </a:spcAft>
+              <a:buSzPct val="100000"/>
+              <a:buChar char="•"/>
+            </a:pPr>
+            <a:r>
+              <a:rPr lang="en-US" sz="1350" dirty="0">
+                <a:solidFill>
+                  <a:srgbClr val="1D2621"/>
+                </a:solidFill>
+                <a:latin typeface="Calibri" pitchFamily="34" charset="0"/>
+                <a:ea typeface="Calibri" pitchFamily="34" charset="-122"/>
+                <a:cs typeface="Calibri" pitchFamily="34" charset="-120"/>
+              </a:rPr>
+              <a:t>Join from any phone; runs on Jitsi in the browser</a:t>
+            </a:r>
+            <a:endParaRPr lang="en-US" sz="1350" dirty="0"/>
+          </a:p>
+        </p:txBody>
+      </p:sp>
+      <p:sp>
+        <p:nvSpPr>
+          <p:cNvPr id="7" name="Shape 5"/>
+          <p:cNvSpPr/>
+          <p:nvPr/>
+        </p:nvSpPr>
+        <p:spPr>
+          <a:xfrm>
+            <a:off x="6172200" y="1554480"/>
+            <a:ext cx="5440680" cy="3063240"/>
           </a:xfrm>
           <a:prstGeom prst="roundRect">
             <a:avLst>
-              <a:gd name="adj" fmla="val 4571"/>
+              <a:gd name="adj" fmla="val 2388"/>
             </a:avLst>
           </a:prstGeom>
           <a:solidFill>
-            <a:srgbClr val="F1F5F3"/>
+            <a:srgbClr val="0F2A20"/>
           </a:solidFill>
           <a:ln w="9525">
             <a:solidFill>
@@ -3450,159 +4347,146 @@
       </p:sp>
       <p:sp>
         <p:nvSpPr>
+          <p:cNvPr id="8" name="Text 6"/>
+          <p:cNvSpPr/>
+          <p:nvPr/>
+        </p:nvSpPr>
+        <p:spPr>
+          <a:xfrm>
+            <a:off x="6446520" y="1783080"/>
+            <a:ext cx="4937760" cy="411480"/>
+          </a:xfrm>
+          <a:prstGeom prst="rect">
+            <a:avLst/>
+          </a:prstGeom>
+          <a:noFill/>
+          <a:ln/>
+        </p:spPr>
+        <p:txBody>
+          <a:bodyPr wrap="square" lIns="0" tIns="0" rIns="0" bIns="0" rtlCol="0" anchor="ctr"/>
+          <a:lstStyle/>
+          <a:p>
+            <a:pPr indent="0" marL="0">
+              <a:buNone/>
+            </a:pPr>
+            <a:r>
+              <a:rPr lang="en-US" sz="1700" b="1" dirty="0">
+                <a:solidFill>
+                  <a:srgbClr val="62C79B"/>
+                </a:solidFill>
+                <a:latin typeface="Calibri" pitchFamily="34" charset="0"/>
+                <a:ea typeface="Calibri" pitchFamily="34" charset="-122"/>
+                <a:cs typeface="Calibri" pitchFamily="34" charset="-120"/>
+              </a:rPr>
+              <a:t>Minutes in minutes, not weeks</a:t>
+            </a:r>
+            <a:endParaRPr lang="en-US" sz="1700" dirty="0"/>
+          </a:p>
+        </p:txBody>
+      </p:sp>
+      <p:sp>
+        <p:nvSpPr>
+          <p:cNvPr id="9" name="Text 7"/>
+          <p:cNvSpPr/>
+          <p:nvPr/>
+        </p:nvSpPr>
+        <p:spPr>
+          <a:xfrm>
+            <a:off x="6537960" y="2240280"/>
+            <a:ext cx="4937760" cy="2286000"/>
+          </a:xfrm>
+          <a:prstGeom prst="rect">
+            <a:avLst/>
+          </a:prstGeom>
+          <a:noFill/>
+          <a:ln/>
+        </p:spPr>
+        <p:txBody>
+          <a:bodyPr wrap="square" lIns="0" tIns="0" rIns="0" bIns="0" rtlCol="0" anchor="ctr"/>
+          <a:lstStyle/>
+          <a:p>
+            <a:pPr marL="203200" indent="-203200">
+              <a:spcAft>
+                <a:spcPts val="1100"/>
+              </a:spcAft>
+              <a:buSzPct val="100000"/>
+              <a:buChar char="•"/>
+            </a:pPr>
+            <a:r>
+              <a:rPr lang="en-US" sz="1350" dirty="0">
+                <a:solidFill>
+                  <a:srgbClr val="E7F0EA"/>
+                </a:solidFill>
+                <a:latin typeface="Calibri" pitchFamily="34" charset="0"/>
+                <a:ea typeface="Calibri" pitchFamily="34" charset="-122"/>
+                <a:cs typeface="Calibri" pitchFamily="34" charset="-120"/>
+              </a:rPr>
+              <a:t>Capture decisions &amp; action items live — even by voice dictation</a:t>
+            </a:r>
+            <a:endParaRPr lang="en-US" sz="1350" dirty="0"/>
+          </a:p>
+          <a:p>
+            <a:pPr marL="203200" indent="-203200">
+              <a:spcAft>
+                <a:spcPts val="1100"/>
+              </a:spcAft>
+              <a:buSzPct val="100000"/>
+              <a:buChar char="•"/>
+            </a:pPr>
+            <a:r>
+              <a:rPr lang="en-US" sz="1350" dirty="0">
+                <a:solidFill>
+                  <a:srgbClr val="E7F0EA"/>
+                </a:solidFill>
+                <a:latin typeface="Calibri" pitchFamily="34" charset="0"/>
+                <a:ea typeface="Calibri" pitchFamily="34" charset="-122"/>
+                <a:cs typeface="Calibri" pitchFamily="34" charset="-120"/>
+              </a:rPr>
+              <a:t>Generate a formatted PDF and share it before anyone leaves the call</a:t>
+            </a:r>
+            <a:endParaRPr lang="en-US" sz="1350" dirty="0"/>
+          </a:p>
+          <a:p>
+            <a:pPr marL="203200" indent="-203200">
+              <a:spcAft>
+                <a:spcPts val="1100"/>
+              </a:spcAft>
+              <a:buSzPct val="100000"/>
+              <a:buChar char="•"/>
+            </a:pPr>
+            <a:r>
+              <a:rPr lang="en-US" sz="1350" dirty="0">
+                <a:solidFill>
+                  <a:srgbClr val="E7F0EA"/>
+                </a:solidFill>
+                <a:latin typeface="Calibri" pitchFamily="34" charset="0"/>
+                <a:ea typeface="Calibri" pitchFamily="34" charset="-122"/>
+                <a:cs typeface="Calibri" pitchFamily="34" charset="-120"/>
+              </a:rPr>
+              <a:t>Optionally record the session where your server allows</a:t>
+            </a:r>
+            <a:endParaRPr lang="en-US" sz="1350" dirty="0"/>
+          </a:p>
+        </p:txBody>
+      </p:sp>
+      <p:sp>
+        <p:nvSpPr>
           <p:cNvPr id="10" name="Shape 8"/>
           <p:cNvSpPr/>
           <p:nvPr/>
         </p:nvSpPr>
         <p:spPr>
           <a:xfrm>
-            <a:off x="4462272" y="1819656"/>
-            <a:ext cx="457200" cy="457200"/>
-          </a:xfrm>
-          <a:prstGeom prst="ellipse">
-            <a:avLst/>
-          </a:prstGeom>
-          <a:solidFill>
-            <a:srgbClr val="1B6B4A"/>
-          </a:solidFill>
-          <a:ln/>
-        </p:spPr>
-      </p:sp>
-      <p:sp>
-        <p:nvSpPr>
-          <p:cNvPr id="11" name="Text 9"/>
-          <p:cNvSpPr/>
-          <p:nvPr/>
-        </p:nvSpPr>
-        <p:spPr>
-          <a:xfrm>
-            <a:off x="4462272" y="1819656"/>
-            <a:ext cx="457200" cy="457200"/>
-          </a:xfrm>
-          <a:prstGeom prst="rect">
-            <a:avLst/>
-          </a:prstGeom>
-          <a:noFill/>
-          <a:ln/>
-        </p:spPr>
-        <p:txBody>
-          <a:bodyPr wrap="square" lIns="0" tIns="0" rIns="0" bIns="0" rtlCol="0" anchor="ctr"/>
-          <a:lstStyle/>
-          <a:p>
-            <a:pPr algn="ctr" indent="0" marL="0">
-              <a:buNone/>
-            </a:pPr>
-            <a:r>
-              <a:rPr lang="en-US" sz="1500" b="1" dirty="0">
-                <a:solidFill>
-                  <a:srgbClr val="FFFFFF"/>
-                </a:solidFill>
-                <a:latin typeface="Calibri" pitchFamily="34" charset="0"/>
-                <a:ea typeface="Calibri" pitchFamily="34" charset="-122"/>
-                <a:cs typeface="Calibri" pitchFamily="34" charset="-120"/>
-              </a:rPr>
-              <a:t>2</a:t>
-            </a:r>
-            <a:endParaRPr lang="en-US" sz="1500" dirty="0"/>
-          </a:p>
-        </p:txBody>
-      </p:sp>
-      <p:sp>
-        <p:nvSpPr>
-          <p:cNvPr id="12" name="Text 10"/>
-          <p:cNvSpPr/>
-          <p:nvPr/>
-        </p:nvSpPr>
-        <p:spPr>
-          <a:xfrm>
-            <a:off x="5084064" y="1746504"/>
-            <a:ext cx="2606040" cy="310896"/>
-          </a:xfrm>
-          <a:prstGeom prst="rect">
-            <a:avLst/>
-          </a:prstGeom>
-          <a:noFill/>
-          <a:ln/>
-        </p:spPr>
-        <p:txBody>
-          <a:bodyPr wrap="square" lIns="0" tIns="0" rIns="0" bIns="0" rtlCol="0" anchor="ctr"/>
-          <a:lstStyle/>
-          <a:p>
-            <a:pPr indent="0" marL="0">
-              <a:buNone/>
-            </a:pPr>
-            <a:r>
-              <a:rPr lang="en-US" sz="1400" b="1" dirty="0">
-                <a:solidFill>
-                  <a:srgbClr val="1D2621"/>
-                </a:solidFill>
-                <a:latin typeface="Calibri" pitchFamily="34" charset="0"/>
-                <a:ea typeface="Calibri" pitchFamily="34" charset="-122"/>
-                <a:cs typeface="Calibri" pitchFamily="34" charset="-120"/>
-              </a:rPr>
-              <a:t>Content cadence</a:t>
-            </a:r>
-            <a:endParaRPr lang="en-US" sz="1400" dirty="0"/>
-          </a:p>
-        </p:txBody>
-      </p:sp>
-      <p:sp>
-        <p:nvSpPr>
-          <p:cNvPr id="13" name="Text 11"/>
-          <p:cNvSpPr/>
-          <p:nvPr/>
-        </p:nvSpPr>
-        <p:spPr>
-          <a:xfrm>
-            <a:off x="5084064" y="2057400"/>
-            <a:ext cx="2606040" cy="1051560"/>
-          </a:xfrm>
-          <a:prstGeom prst="rect">
-            <a:avLst/>
-          </a:prstGeom>
-          <a:noFill/>
-          <a:ln/>
-        </p:spPr>
-        <p:txBody>
-          <a:bodyPr wrap="square" lIns="0" tIns="0" rIns="0" bIns="0" rtlCol="0" anchor="t"/>
-          <a:lstStyle/>
-          <a:p>
-            <a:pPr indent="0" marL="0">
-              <a:buNone/>
-            </a:pPr>
-            <a:r>
-              <a:rPr lang="en-US" sz="1150" dirty="0">
-                <a:solidFill>
-                  <a:srgbClr val="5D6B63"/>
-                </a:solidFill>
-                <a:latin typeface="Calibri" pitchFamily="34" charset="0"/>
-                <a:ea typeface="Calibri" pitchFamily="34" charset="-122"/>
-                <a:cs typeface="Calibri" pitchFamily="34" charset="-120"/>
-              </a:rPr>
-              <a:t>Weekly pulse, scanned items and pledge-index updates worth returning for</a:t>
-            </a:r>
-            <a:endParaRPr lang="en-US" sz="1150" dirty="0"/>
-          </a:p>
-        </p:txBody>
-      </p:sp>
-      <p:sp>
-        <p:nvSpPr>
-          <p:cNvPr id="14" name="Shape 12"/>
-          <p:cNvSpPr/>
-          <p:nvPr/>
-        </p:nvSpPr>
-        <p:spPr>
-          <a:xfrm>
-            <a:off x="7973568" y="1600200"/>
-            <a:ext cx="3566160" cy="1600200"/>
+            <a:off x="548640" y="4892040"/>
+            <a:ext cx="3200400" cy="1371600"/>
           </a:xfrm>
           <a:prstGeom prst="roundRect">
             <a:avLst>
-              <a:gd name="adj" fmla="val 4571"/>
+              <a:gd name="adj" fmla="val 5333"/>
             </a:avLst>
           </a:prstGeom>
           <a:solidFill>
-            <a:srgbClr val="F1F5F3"/>
+            <a:srgbClr val="FFFFFF"/>
           </a:solidFill>
           <a:ln w="9525">
             <a:solidFill>
@@ -3621,34 +4505,14 @@
       </p:sp>
       <p:sp>
         <p:nvSpPr>
-          <p:cNvPr id="15" name="Shape 13"/>
-          <p:cNvSpPr/>
-          <p:nvPr/>
-        </p:nvSpPr>
-        <p:spPr>
-          <a:xfrm>
-            <a:off x="8174736" y="1819656"/>
-            <a:ext cx="457200" cy="457200"/>
-          </a:xfrm>
-          <a:prstGeom prst="ellipse">
-            <a:avLst/>
-          </a:prstGeom>
-          <a:solidFill>
-            <a:srgbClr val="1B6B4A"/>
-          </a:solidFill>
-          <a:ln/>
-        </p:spPr>
-      </p:sp>
-      <p:sp>
-        <p:nvSpPr>
-          <p:cNvPr id="16" name="Text 14"/>
-          <p:cNvSpPr/>
-          <p:nvPr/>
-        </p:nvSpPr>
-        <p:spPr>
-          <a:xfrm>
-            <a:off x="8174736" y="1819656"/>
-            <a:ext cx="457200" cy="457200"/>
+          <p:cNvPr id="11" name="Text 9"/>
+          <p:cNvSpPr/>
+          <p:nvPr/>
+        </p:nvSpPr>
+        <p:spPr>
+          <a:xfrm>
+            <a:off x="548640" y="5029200"/>
+            <a:ext cx="3200400" cy="548640"/>
           </a:xfrm>
           <a:prstGeom prst="rect">
             <a:avLst/>
@@ -3664,30 +4528,30 @@
               <a:buNone/>
             </a:pPr>
             <a:r>
-              <a:rPr lang="en-US" sz="1500" b="1" dirty="0">
-                <a:solidFill>
-                  <a:srgbClr val="FFFFFF"/>
-                </a:solidFill>
-                <a:latin typeface="Calibri" pitchFamily="34" charset="0"/>
-                <a:ea typeface="Calibri" pitchFamily="34" charset="-122"/>
-                <a:cs typeface="Calibri" pitchFamily="34" charset="-120"/>
-              </a:rPr>
-              <a:t>3</a:t>
-            </a:r>
-            <a:endParaRPr lang="en-US" sz="1500" dirty="0"/>
-          </a:p>
-        </p:txBody>
-      </p:sp>
-      <p:sp>
-        <p:nvSpPr>
-          <p:cNvPr id="17" name="Text 15"/>
-          <p:cNvSpPr/>
-          <p:nvPr/>
-        </p:nvSpPr>
-        <p:spPr>
-          <a:xfrm>
-            <a:off x="8796528" y="1746504"/>
-            <a:ext cx="2606040" cy="310896"/>
+              <a:rPr lang="en-US" sz="2300" b="1" dirty="0">
+                <a:solidFill>
+                  <a:srgbClr val="EE9455"/>
+                </a:solidFill>
+                <a:latin typeface="Cambria" pitchFamily="34" charset="0"/>
+                <a:ea typeface="Cambria" pitchFamily="34" charset="-122"/>
+                <a:cs typeface="Cambria" pitchFamily="34" charset="-120"/>
+              </a:rPr>
+              <a:t>3 weeks → 3 min</a:t>
+            </a:r>
+            <a:endParaRPr lang="en-US" sz="2300" dirty="0"/>
+          </a:p>
+        </p:txBody>
+      </p:sp>
+      <p:sp>
+        <p:nvSpPr>
+          <p:cNvPr id="12" name="Text 10"/>
+          <p:cNvSpPr/>
+          <p:nvPr/>
+        </p:nvSpPr>
+        <p:spPr>
+          <a:xfrm>
+            <a:off x="548640" y="5596128"/>
+            <a:ext cx="3200400" cy="457200"/>
           </a:xfrm>
           <a:prstGeom prst="rect">
             <a:avLst/>
@@ -3699,11 +4563,50 @@
           <a:bodyPr wrap="square" lIns="0" tIns="0" rIns="0" bIns="0" rtlCol="0" anchor="ctr"/>
           <a:lstStyle/>
           <a:p>
+            <a:pPr algn="ctr" indent="0" marL="0">
+              <a:buNone/>
+            </a:pPr>
+            <a:r>
+              <a:rPr lang="en-US" sz="1100" dirty="0">
+                <a:solidFill>
+                  <a:srgbClr val="5D6B63"/>
+                </a:solidFill>
+                <a:latin typeface="Calibri" pitchFamily="34" charset="0"/>
+                <a:ea typeface="Calibri" pitchFamily="34" charset="-122"/>
+                <a:cs typeface="Calibri" pitchFamily="34" charset="-120"/>
+              </a:rPr>
+              <a:t>from meeting to shared minutes</a:t>
+            </a:r>
+            <a:endParaRPr lang="en-US" sz="1100" dirty="0"/>
+          </a:p>
+        </p:txBody>
+      </p:sp>
+      <p:sp>
+        <p:nvSpPr>
+          <p:cNvPr id="13" name="Text 11"/>
+          <p:cNvSpPr/>
+          <p:nvPr/>
+        </p:nvSpPr>
+        <p:spPr>
+          <a:xfrm>
+            <a:off x="3977640" y="4892040"/>
+            <a:ext cx="7635240" cy="1371600"/>
+          </a:xfrm>
+          <a:prstGeom prst="rect">
+            <a:avLst/>
+          </a:prstGeom>
+          <a:noFill/>
+          <a:ln/>
+        </p:spPr>
+        <p:txBody>
+          <a:bodyPr wrap="square" lIns="0" tIns="0" rIns="0" bIns="0" rtlCol="0" anchor="ctr"/>
+          <a:lstStyle/>
+          <a:p>
             <a:pPr indent="0" marL="0">
               <a:buNone/>
             </a:pPr>
             <a:r>
-              <a:rPr lang="en-US" sz="1400" b="1" dirty="0">
+              <a:rPr lang="en-US" sz="1350" dirty="0">
                 <a:solidFill>
                   <a:srgbClr val="1D2621"/>
                 </a:solidFill>
@@ -3711,567 +4614,15 @@
                 <a:ea typeface="Calibri" pitchFamily="34" charset="-122"/>
                 <a:cs typeface="Calibri" pitchFamily="34" charset="-120"/>
               </a:rPr>
-              <a:t>Social amplification</a:t>
-            </a:r>
-            <a:endParaRPr lang="en-US" sz="1400" dirty="0"/>
-          </a:p>
-        </p:txBody>
-      </p:sp>
-      <p:sp>
-        <p:nvSpPr>
-          <p:cNvPr id="18" name="Text 16"/>
-          <p:cNvSpPr/>
-          <p:nvPr/>
-        </p:nvSpPr>
-        <p:spPr>
-          <a:xfrm>
-            <a:off x="8796528" y="2057400"/>
-            <a:ext cx="2606040" cy="1051560"/>
-          </a:xfrm>
-          <a:prstGeom prst="rect">
-            <a:avLst/>
-          </a:prstGeom>
-          <a:noFill/>
-          <a:ln/>
-        </p:spPr>
-        <p:txBody>
-          <a:bodyPr wrap="square" lIns="0" tIns="0" rIns="0" bIns="0" rtlCol="0" anchor="t"/>
-          <a:lstStyle/>
-          <a:p>
-            <a:pPr indent="0" marL="0">
-              <a:buNone/>
-            </a:pPr>
-            <a:r>
-              <a:rPr lang="en-US" sz="1150" dirty="0">
-                <a:solidFill>
-                  <a:srgbClr val="5D6B63"/>
-                </a:solidFill>
-                <a:latin typeface="Calibri" pitchFamily="34" charset="0"/>
-                <a:ea typeface="Calibri" pitchFamily="34" charset="-122"/>
-                <a:cs typeface="Calibri" pitchFamily="34" charset="-120"/>
-              </a:rPr>
-              <a:t>Clippable cards for X, TikTok, Facebook &amp; Instagram</a:t>
-            </a:r>
-            <a:endParaRPr lang="en-US" sz="1150" dirty="0"/>
-          </a:p>
-        </p:txBody>
-      </p:sp>
-      <p:sp>
-        <p:nvSpPr>
-          <p:cNvPr id="19" name="Shape 17"/>
-          <p:cNvSpPr/>
-          <p:nvPr/>
-        </p:nvSpPr>
-        <p:spPr>
-          <a:xfrm>
-            <a:off x="548640" y="3383280"/>
-            <a:ext cx="3566160" cy="1600200"/>
-          </a:xfrm>
-          <a:prstGeom prst="roundRect">
-            <a:avLst>
-              <a:gd name="adj" fmla="val 4571"/>
-            </a:avLst>
-          </a:prstGeom>
-          <a:solidFill>
-            <a:srgbClr val="F1F5F3"/>
-          </a:solidFill>
-          <a:ln w="9525">
-            <a:solidFill>
-              <a:srgbClr val="D9E2DC"/>
-            </a:solidFill>
-            <a:prstDash val="solid"/>
-          </a:ln>
-          <a:effectLst>
-            <a:outerShdw sx="100000" sy="100000" kx="0" ky="0" algn="bl" rotWithShape="0" blurRad="76200" dist="25400" dir="5400000">
-              <a:srgbClr val="9AA8A0">
-                <a:alpha val="35000"/>
-              </a:srgbClr>
-            </a:outerShdw>
-          </a:effectLst>
-        </p:spPr>
-      </p:sp>
-      <p:sp>
-        <p:nvSpPr>
-          <p:cNvPr id="20" name="Shape 18"/>
-          <p:cNvSpPr/>
-          <p:nvPr/>
-        </p:nvSpPr>
-        <p:spPr>
-          <a:xfrm>
-            <a:off x="749808" y="3602736"/>
-            <a:ext cx="457200" cy="457200"/>
-          </a:xfrm>
-          <a:prstGeom prst="ellipse">
-            <a:avLst/>
-          </a:prstGeom>
-          <a:solidFill>
-            <a:srgbClr val="1B6B4A"/>
-          </a:solidFill>
-          <a:ln/>
-        </p:spPr>
-      </p:sp>
-      <p:sp>
-        <p:nvSpPr>
-          <p:cNvPr id="21" name="Text 19"/>
-          <p:cNvSpPr/>
-          <p:nvPr/>
-        </p:nvSpPr>
-        <p:spPr>
-          <a:xfrm>
-            <a:off x="749808" y="3602736"/>
-            <a:ext cx="457200" cy="457200"/>
-          </a:xfrm>
-          <a:prstGeom prst="rect">
-            <a:avLst/>
-          </a:prstGeom>
-          <a:noFill/>
-          <a:ln/>
-        </p:spPr>
-        <p:txBody>
-          <a:bodyPr wrap="square" lIns="0" tIns="0" rIns="0" bIns="0" rtlCol="0" anchor="ctr"/>
-          <a:lstStyle/>
-          <a:p>
-            <a:pPr algn="ctr" indent="0" marL="0">
-              <a:buNone/>
-            </a:pPr>
-            <a:r>
-              <a:rPr lang="en-US" sz="1500" b="1" dirty="0">
-                <a:solidFill>
-                  <a:srgbClr val="FFFFFF"/>
-                </a:solidFill>
-                <a:latin typeface="Calibri" pitchFamily="34" charset="0"/>
-                <a:ea typeface="Calibri" pitchFamily="34" charset="-122"/>
-                <a:cs typeface="Calibri" pitchFamily="34" charset="-120"/>
-              </a:rPr>
-              <a:t>4</a:t>
-            </a:r>
-            <a:endParaRPr lang="en-US" sz="1500" dirty="0"/>
-          </a:p>
-        </p:txBody>
-      </p:sp>
-      <p:sp>
-        <p:nvSpPr>
-          <p:cNvPr id="22" name="Text 20"/>
-          <p:cNvSpPr/>
-          <p:nvPr/>
-        </p:nvSpPr>
-        <p:spPr>
-          <a:xfrm>
-            <a:off x="1371600" y="3529584"/>
-            <a:ext cx="2606040" cy="310896"/>
-          </a:xfrm>
-          <a:prstGeom prst="rect">
-            <a:avLst/>
-          </a:prstGeom>
-          <a:noFill/>
-          <a:ln/>
-        </p:spPr>
-        <p:txBody>
-          <a:bodyPr wrap="square" lIns="0" tIns="0" rIns="0" bIns="0" rtlCol="0" anchor="ctr"/>
-          <a:lstStyle/>
-          <a:p>
-            <a:pPr indent="0" marL="0">
-              <a:buNone/>
-            </a:pPr>
-            <a:r>
-              <a:rPr lang="en-US" sz="1400" b="1" dirty="0">
-                <a:solidFill>
-                  <a:srgbClr val="1D2621"/>
-                </a:solidFill>
-                <a:latin typeface="Calibri" pitchFamily="34" charset="0"/>
-                <a:ea typeface="Calibri" pitchFamily="34" charset="-122"/>
-                <a:cs typeface="Calibri" pitchFamily="34" charset="-120"/>
-              </a:rPr>
-              <a:t>Partner spotlights</a:t>
-            </a:r>
-            <a:endParaRPr lang="en-US" sz="1400" dirty="0"/>
-          </a:p>
-        </p:txBody>
-      </p:sp>
-      <p:sp>
-        <p:nvSpPr>
-          <p:cNvPr id="23" name="Text 21"/>
-          <p:cNvSpPr/>
-          <p:nvPr/>
-        </p:nvSpPr>
-        <p:spPr>
-          <a:xfrm>
-            <a:off x="1371600" y="3840480"/>
-            <a:ext cx="2606040" cy="1051560"/>
-          </a:xfrm>
-          <a:prstGeom prst="rect">
-            <a:avLst/>
-          </a:prstGeom>
-          <a:noFill/>
-          <a:ln/>
-        </p:spPr>
-        <p:txBody>
-          <a:bodyPr wrap="square" lIns="0" tIns="0" rIns="0" bIns="0" rtlCol="0" anchor="t"/>
-          <a:lstStyle/>
-          <a:p>
-            <a:pPr indent="0" marL="0">
-              <a:buNone/>
-            </a:pPr>
-            <a:r>
-              <a:rPr lang="en-US" sz="1150" dirty="0">
-                <a:solidFill>
-                  <a:srgbClr val="5D6B63"/>
-                </a:solidFill>
-                <a:latin typeface="Calibri" pitchFamily="34" charset="0"/>
-                <a:ea typeface="Calibri" pitchFamily="34" charset="-122"/>
-                <a:cs typeface="Calibri" pitchFamily="34" charset="-120"/>
-              </a:rPr>
-              <a:t>Feature a member org's work each week to model good use</a:t>
-            </a:r>
-            <a:endParaRPr lang="en-US" sz="1150" dirty="0"/>
-          </a:p>
-        </p:txBody>
-      </p:sp>
-      <p:sp>
-        <p:nvSpPr>
-          <p:cNvPr id="24" name="Shape 22"/>
-          <p:cNvSpPr/>
-          <p:nvPr/>
-        </p:nvSpPr>
-        <p:spPr>
-          <a:xfrm>
-            <a:off x="4261104" y="3383280"/>
-            <a:ext cx="3566160" cy="1600200"/>
-          </a:xfrm>
-          <a:prstGeom prst="roundRect">
-            <a:avLst>
-              <a:gd name="adj" fmla="val 4571"/>
-            </a:avLst>
-          </a:prstGeom>
-          <a:solidFill>
-            <a:srgbClr val="F1F5F3"/>
-          </a:solidFill>
-          <a:ln w="9525">
-            <a:solidFill>
-              <a:srgbClr val="D9E2DC"/>
-            </a:solidFill>
-            <a:prstDash val="solid"/>
-          </a:ln>
-          <a:effectLst>
-            <a:outerShdw sx="100000" sy="100000" kx="0" ky="0" algn="bl" rotWithShape="0" blurRad="76200" dist="25400" dir="5400000">
-              <a:srgbClr val="9AA8A0">
-                <a:alpha val="35000"/>
-              </a:srgbClr>
-            </a:outerShdw>
-          </a:effectLst>
-        </p:spPr>
-      </p:sp>
-      <p:sp>
-        <p:nvSpPr>
-          <p:cNvPr id="25" name="Shape 23"/>
-          <p:cNvSpPr/>
-          <p:nvPr/>
-        </p:nvSpPr>
-        <p:spPr>
-          <a:xfrm>
-            <a:off x="4462272" y="3602736"/>
-            <a:ext cx="457200" cy="457200"/>
-          </a:xfrm>
-          <a:prstGeom prst="ellipse">
-            <a:avLst/>
-          </a:prstGeom>
-          <a:solidFill>
-            <a:srgbClr val="1B6B4A"/>
-          </a:solidFill>
-          <a:ln/>
-        </p:spPr>
-      </p:sp>
-      <p:sp>
-        <p:nvSpPr>
-          <p:cNvPr id="26" name="Text 24"/>
-          <p:cNvSpPr/>
-          <p:nvPr/>
-        </p:nvSpPr>
-        <p:spPr>
-          <a:xfrm>
-            <a:off x="4462272" y="3602736"/>
-            <a:ext cx="457200" cy="457200"/>
-          </a:xfrm>
-          <a:prstGeom prst="rect">
-            <a:avLst/>
-          </a:prstGeom>
-          <a:noFill/>
-          <a:ln/>
-        </p:spPr>
-        <p:txBody>
-          <a:bodyPr wrap="square" lIns="0" tIns="0" rIns="0" bIns="0" rtlCol="0" anchor="ctr"/>
-          <a:lstStyle/>
-          <a:p>
-            <a:pPr algn="ctr" indent="0" marL="0">
-              <a:buNone/>
-            </a:pPr>
-            <a:r>
-              <a:rPr lang="en-US" sz="1500" b="1" dirty="0">
-                <a:solidFill>
-                  <a:srgbClr val="FFFFFF"/>
-                </a:solidFill>
-                <a:latin typeface="Calibri" pitchFamily="34" charset="0"/>
-                <a:ea typeface="Calibri" pitchFamily="34" charset="-122"/>
-                <a:cs typeface="Calibri" pitchFamily="34" charset="-120"/>
-              </a:rPr>
-              <a:t>5</a:t>
-            </a:r>
-            <a:endParaRPr lang="en-US" sz="1500" dirty="0"/>
-          </a:p>
-        </p:txBody>
-      </p:sp>
-      <p:sp>
-        <p:nvSpPr>
-          <p:cNvPr id="27" name="Text 25"/>
-          <p:cNvSpPr/>
-          <p:nvPr/>
-        </p:nvSpPr>
-        <p:spPr>
-          <a:xfrm>
-            <a:off x="5084064" y="3529584"/>
-            <a:ext cx="2606040" cy="310896"/>
-          </a:xfrm>
-          <a:prstGeom prst="rect">
-            <a:avLst/>
-          </a:prstGeom>
-          <a:noFill/>
-          <a:ln/>
-        </p:spPr>
-        <p:txBody>
-          <a:bodyPr wrap="square" lIns="0" tIns="0" rIns="0" bIns="0" rtlCol="0" anchor="ctr"/>
-          <a:lstStyle/>
-          <a:p>
-            <a:pPr indent="0" marL="0">
-              <a:buNone/>
-            </a:pPr>
-            <a:r>
-              <a:rPr lang="en-US" sz="1400" b="1" dirty="0">
-                <a:solidFill>
-                  <a:srgbClr val="1D2621"/>
-                </a:solidFill>
-                <a:latin typeface="Calibri" pitchFamily="34" charset="0"/>
-                <a:ea typeface="Calibri" pitchFamily="34" charset="-122"/>
-                <a:cs typeface="Calibri" pitchFamily="34" charset="-120"/>
-              </a:rPr>
-              <a:t>Petition drives</a:t>
-            </a:r>
-            <a:endParaRPr lang="en-US" sz="1400" dirty="0"/>
-          </a:p>
-        </p:txBody>
-      </p:sp>
-      <p:sp>
-        <p:nvSpPr>
-          <p:cNvPr id="28" name="Text 26"/>
-          <p:cNvSpPr/>
-          <p:nvPr/>
-        </p:nvSpPr>
-        <p:spPr>
-          <a:xfrm>
-            <a:off x="5084064" y="3840480"/>
-            <a:ext cx="2606040" cy="1051560"/>
-          </a:xfrm>
-          <a:prstGeom prst="rect">
-            <a:avLst/>
-          </a:prstGeom>
-          <a:noFill/>
-          <a:ln/>
-        </p:spPr>
-        <p:txBody>
-          <a:bodyPr wrap="square" lIns="0" tIns="0" rIns="0" bIns="0" rtlCol="0" anchor="t"/>
-          <a:lstStyle/>
-          <a:p>
-            <a:pPr indent="0" marL="0">
-              <a:buNone/>
-            </a:pPr>
-            <a:r>
-              <a:rPr lang="en-US" sz="1150" dirty="0">
-                <a:solidFill>
-                  <a:srgbClr val="5D6B63"/>
-                </a:solidFill>
-                <a:latin typeface="Calibri" pitchFamily="34" charset="0"/>
-                <a:ea typeface="Calibri" pitchFamily="34" charset="-122"/>
-                <a:cs typeface="Calibri" pitchFamily="34" charset="-120"/>
-              </a:rPr>
-              <a:t>Launch demands that give partners a reason to log in and act</a:t>
-            </a:r>
-            <a:endParaRPr lang="en-US" sz="1150" dirty="0"/>
-          </a:p>
-        </p:txBody>
-      </p:sp>
-      <p:sp>
-        <p:nvSpPr>
-          <p:cNvPr id="29" name="Shape 27"/>
-          <p:cNvSpPr/>
-          <p:nvPr/>
-        </p:nvSpPr>
-        <p:spPr>
-          <a:xfrm>
-            <a:off x="7973568" y="3383280"/>
-            <a:ext cx="3566160" cy="1600200"/>
-          </a:xfrm>
-          <a:prstGeom prst="roundRect">
-            <a:avLst>
-              <a:gd name="adj" fmla="val 4571"/>
-            </a:avLst>
-          </a:prstGeom>
-          <a:solidFill>
-            <a:srgbClr val="F1F5F3"/>
-          </a:solidFill>
-          <a:ln w="9525">
-            <a:solidFill>
-              <a:srgbClr val="D9E2DC"/>
-            </a:solidFill>
-            <a:prstDash val="solid"/>
-          </a:ln>
-          <a:effectLst>
-            <a:outerShdw sx="100000" sy="100000" kx="0" ky="0" algn="bl" rotWithShape="0" blurRad="76200" dist="25400" dir="5400000">
-              <a:srgbClr val="9AA8A0">
-                <a:alpha val="35000"/>
-              </a:srgbClr>
-            </a:outerShdw>
-          </a:effectLst>
-        </p:spPr>
-      </p:sp>
-      <p:sp>
-        <p:nvSpPr>
-          <p:cNvPr id="30" name="Shape 28"/>
-          <p:cNvSpPr/>
-          <p:nvPr/>
-        </p:nvSpPr>
-        <p:spPr>
-          <a:xfrm>
-            <a:off x="8174736" y="3602736"/>
-            <a:ext cx="457200" cy="457200"/>
-          </a:xfrm>
-          <a:prstGeom prst="ellipse">
-            <a:avLst/>
-          </a:prstGeom>
-          <a:solidFill>
-            <a:srgbClr val="1B6B4A"/>
-          </a:solidFill>
-          <a:ln/>
-        </p:spPr>
-      </p:sp>
-      <p:sp>
-        <p:nvSpPr>
-          <p:cNvPr id="31" name="Text 29"/>
-          <p:cNvSpPr/>
-          <p:nvPr/>
-        </p:nvSpPr>
-        <p:spPr>
-          <a:xfrm>
-            <a:off x="8174736" y="3602736"/>
-            <a:ext cx="457200" cy="457200"/>
-          </a:xfrm>
-          <a:prstGeom prst="rect">
-            <a:avLst/>
-          </a:prstGeom>
-          <a:noFill/>
-          <a:ln/>
-        </p:spPr>
-        <p:txBody>
-          <a:bodyPr wrap="square" lIns="0" tIns="0" rIns="0" bIns="0" rtlCol="0" anchor="ctr"/>
-          <a:lstStyle/>
-          <a:p>
-            <a:pPr algn="ctr" indent="0" marL="0">
-              <a:buNone/>
-            </a:pPr>
-            <a:r>
-              <a:rPr lang="en-US" sz="1500" b="1" dirty="0">
-                <a:solidFill>
-                  <a:srgbClr val="FFFFFF"/>
-                </a:solidFill>
-                <a:latin typeface="Calibri" pitchFamily="34" charset="0"/>
-                <a:ea typeface="Calibri" pitchFamily="34" charset="-122"/>
-                <a:cs typeface="Calibri" pitchFamily="34" charset="-120"/>
-              </a:rPr>
-              <a:t>6</a:t>
-            </a:r>
-            <a:endParaRPr lang="en-US" sz="1500" dirty="0"/>
-          </a:p>
-        </p:txBody>
-      </p:sp>
-      <p:sp>
-        <p:nvSpPr>
-          <p:cNvPr id="32" name="Text 30"/>
-          <p:cNvSpPr/>
-          <p:nvPr/>
-        </p:nvSpPr>
-        <p:spPr>
-          <a:xfrm>
-            <a:off x="8796528" y="3529584"/>
-            <a:ext cx="2606040" cy="310896"/>
-          </a:xfrm>
-          <a:prstGeom prst="rect">
-            <a:avLst/>
-          </a:prstGeom>
-          <a:noFill/>
-          <a:ln/>
-        </p:spPr>
-        <p:txBody>
-          <a:bodyPr wrap="square" lIns="0" tIns="0" rIns="0" bIns="0" rtlCol="0" anchor="ctr"/>
-          <a:lstStyle/>
-          <a:p>
-            <a:pPr indent="0" marL="0">
-              <a:buNone/>
-            </a:pPr>
-            <a:r>
-              <a:rPr lang="en-US" sz="1400" b="1" dirty="0">
-                <a:solidFill>
-                  <a:srgbClr val="1D2621"/>
-                </a:solidFill>
-                <a:latin typeface="Calibri" pitchFamily="34" charset="0"/>
-                <a:ea typeface="Calibri" pitchFamily="34" charset="-122"/>
-                <a:cs typeface="Calibri" pitchFamily="34" charset="-120"/>
-              </a:rPr>
-              <a:t>Nudges</a:t>
-            </a:r>
-            <a:endParaRPr lang="en-US" sz="1400" dirty="0"/>
-          </a:p>
-        </p:txBody>
-      </p:sp>
-      <p:sp>
-        <p:nvSpPr>
-          <p:cNvPr id="33" name="Text 31"/>
-          <p:cNvSpPr/>
-          <p:nvPr/>
-        </p:nvSpPr>
-        <p:spPr>
-          <a:xfrm>
-            <a:off x="8796528" y="3840480"/>
-            <a:ext cx="2606040" cy="1051560"/>
-          </a:xfrm>
-          <a:prstGeom prst="rect">
-            <a:avLst/>
-          </a:prstGeom>
-          <a:noFill/>
-          <a:ln/>
-        </p:spPr>
-        <p:txBody>
-          <a:bodyPr wrap="square" lIns="0" tIns="0" rIns="0" bIns="0" rtlCol="0" anchor="t"/>
-          <a:lstStyle/>
-          <a:p>
-            <a:pPr indent="0" marL="0">
-              <a:buNone/>
-            </a:pPr>
-            <a:r>
-              <a:rPr lang="en-US" sz="1150" dirty="0">
-                <a:solidFill>
-                  <a:srgbClr val="5D6B63"/>
-                </a:solidFill>
-                <a:latin typeface="Calibri" pitchFamily="34" charset="0"/>
-                <a:ea typeface="Calibri" pitchFamily="34" charset="-122"/>
-                <a:cs typeface="Calibri" pitchFamily="34" charset="-120"/>
-              </a:rPr>
-              <a:t>WhatsApp broadcast + email digest to re-activate quiet members</a:t>
-            </a:r>
-            <a:endParaRPr lang="en-US" sz="1150" dirty="0"/>
-          </a:p>
-        </p:txBody>
-      </p:sp>
-      <p:sp>
-        <p:nvSpPr>
-          <p:cNvPr id="34" name="Text 32"/>
+              <a:t>The sector's quiet failure is minutes that arrive weeks late, with no clear action. The Coalition Room turns every call into a decision record and a next step — instantly — which is exactly why partners will convene here.</a:t>
+            </a:r>
+            <a:endParaRPr lang="en-US" sz="1350" dirty="0"/>
+          </a:p>
+        </p:txBody>
+      </p:sp>
+      <p:sp>
+        <p:nvSpPr>
+          <p:cNvPr id="14" name="Text 12"/>
           <p:cNvSpPr/>
           <p:nvPr/>
         </p:nvSpPr>
@@ -4302,7 +4653,7 @@
                 <a:ea typeface="Calibri" pitchFamily="34" charset="-122"/>
                 <a:cs typeface="Calibri" pitchFamily="34" charset="-120"/>
               </a:rPr>
-              <a:t>MazingiraKenya · Activation &amp; launch plan</a:t>
+              <a:t>MazingiraKenya</a:t>
             </a:r>
             <a:endParaRPr lang="en-US" sz="900" dirty="0"/>
           </a:p>
@@ -4373,7 +4724,7 @@
                 <a:ea typeface="Calibri" pitchFamily="34" charset="-122"/>
                 <a:cs typeface="Calibri" pitchFamily="34" charset="-120"/>
               </a:rPr>
-              <a:t>MAKE IT STICKY</a:t>
+              <a:t>DIGITAL ENGAGEMENT</a:t>
             </a:r>
             <a:endParaRPr lang="en-US" sz="1200" dirty="0"/>
           </a:p>
@@ -4412,7 +4763,7 @@
                 <a:ea typeface="Cambria" pitchFamily="34" charset="-122"/>
                 <a:cs typeface="Cambria" pitchFamily="34" charset="-120"/>
               </a:rPr>
-              <a:t>Design for repeat use</a:t>
+              <a:t>The engine of adoption</a:t>
             </a:r>
             <a:endParaRPr lang="en-US" sz="3000" dirty="0"/>
           </a:p>
@@ -4426,12 +4777,12 @@
         </p:nvSpPr>
         <p:spPr>
           <a:xfrm>
-            <a:off x="548640" y="1554480"/>
-            <a:ext cx="11064240" cy="1051560"/>
+            <a:off x="548640" y="1600200"/>
+            <a:ext cx="3566160" cy="1600200"/>
           </a:xfrm>
           <a:prstGeom prst="roundRect">
             <a:avLst>
-              <a:gd name="adj" fmla="val 6957"/>
+              <a:gd name="adj" fmla="val 4571"/>
             </a:avLst>
           </a:prstGeom>
           <a:solidFill>
@@ -4460,14 +4811,14 @@
         </p:nvSpPr>
         <p:spPr>
           <a:xfrm>
-            <a:off x="749808" y="1773936"/>
+            <a:off x="749808" y="1819656"/>
             <a:ext cx="457200" cy="457200"/>
           </a:xfrm>
           <a:prstGeom prst="ellipse">
             <a:avLst/>
           </a:prstGeom>
           <a:solidFill>
-            <a:srgbClr val="EE9455"/>
+            <a:srgbClr val="1B6B4A"/>
           </a:solidFill>
           <a:ln/>
         </p:spPr>
@@ -4480,7 +4831,7 @@
         </p:nvSpPr>
         <p:spPr>
           <a:xfrm>
-            <a:off x="749808" y="1773936"/>
+            <a:off x="749808" y="1819656"/>
             <a:ext cx="457200" cy="457200"/>
           </a:xfrm>
           <a:prstGeom prst="rect">
@@ -4505,7 +4856,7 @@
                 <a:ea typeface="Calibri" pitchFamily="34" charset="-122"/>
                 <a:cs typeface="Calibri" pitchFamily="34" charset="-120"/>
               </a:rPr>
-              <a:t>✓</a:t>
+              <a:t>1</a:t>
             </a:r>
             <a:endParaRPr lang="en-US" sz="1500" dirty="0"/>
           </a:p>
@@ -4519,8 +4870,8 @@
         </p:nvSpPr>
         <p:spPr>
           <a:xfrm>
-            <a:off x="1371600" y="1700784"/>
-            <a:ext cx="10104120" cy="310896"/>
+            <a:off x="1371600" y="1746504"/>
+            <a:ext cx="2606040" cy="310896"/>
           </a:xfrm>
           <a:prstGeom prst="rect">
             <a:avLst/>
@@ -4544,7 +4895,7 @@
                 <a:ea typeface="Calibri" pitchFamily="34" charset="-122"/>
                 <a:cs typeface="Calibri" pitchFamily="34" charset="-120"/>
               </a:rPr>
-              <a:t>Org champions</a:t>
+              <a:t>Onboarding</a:t>
             </a:r>
             <a:endParaRPr lang="en-US" sz="1400" dirty="0"/>
           </a:p>
@@ -4558,8 +4909,8 @@
         </p:nvSpPr>
         <p:spPr>
           <a:xfrm>
-            <a:off x="1371600" y="2011680"/>
-            <a:ext cx="10104120" cy="502920"/>
+            <a:off x="1371600" y="2057400"/>
+            <a:ext cx="2606040" cy="1051560"/>
           </a:xfrm>
           <a:prstGeom prst="rect">
             <a:avLst/>
@@ -4583,7 +4934,7 @@
                 <a:ea typeface="Calibri" pitchFamily="34" charset="-122"/>
                 <a:cs typeface="Calibri" pitchFamily="34" charset="-120"/>
               </a:rPr>
-              <a:t>Name one person per partner org responsible for the hub</a:t>
+              <a:t>Personal invites + a 3-minute guided walkthrough per org</a:t>
             </a:r>
             <a:endParaRPr lang="en-US" sz="1150" dirty="0"/>
           </a:p>
@@ -4597,12 +4948,12 @@
         </p:nvSpPr>
         <p:spPr>
           <a:xfrm>
-            <a:off x="548640" y="2724912"/>
-            <a:ext cx="11064240" cy="1051560"/>
+            <a:off x="4261104" y="1600200"/>
+            <a:ext cx="3566160" cy="1600200"/>
           </a:xfrm>
           <a:prstGeom prst="roundRect">
             <a:avLst>
-              <a:gd name="adj" fmla="val 6957"/>
+              <a:gd name="adj" fmla="val 4571"/>
             </a:avLst>
           </a:prstGeom>
           <a:solidFill>
@@ -4631,14 +4982,14 @@
         </p:nvSpPr>
         <p:spPr>
           <a:xfrm>
-            <a:off x="749808" y="2944368"/>
+            <a:off x="4462272" y="1819656"/>
             <a:ext cx="457200" cy="457200"/>
           </a:xfrm>
           <a:prstGeom prst="ellipse">
             <a:avLst/>
           </a:prstGeom>
           <a:solidFill>
-            <a:srgbClr val="EE9455"/>
+            <a:srgbClr val="1B6B4A"/>
           </a:solidFill>
           <a:ln/>
         </p:spPr>
@@ -4651,7 +5002,7 @@
         </p:nvSpPr>
         <p:spPr>
           <a:xfrm>
-            <a:off x="749808" y="2944368"/>
+            <a:off x="4462272" y="1819656"/>
             <a:ext cx="457200" cy="457200"/>
           </a:xfrm>
           <a:prstGeom prst="rect">
@@ -4676,7 +5027,7 @@
                 <a:ea typeface="Calibri" pitchFamily="34" charset="-122"/>
                 <a:cs typeface="Calibri" pitchFamily="34" charset="-120"/>
               </a:rPr>
-              <a:t>✓</a:t>
+              <a:t>2</a:t>
             </a:r>
             <a:endParaRPr lang="en-US" sz="1500" dirty="0"/>
           </a:p>
@@ -4690,8 +5041,8 @@
         </p:nvSpPr>
         <p:spPr>
           <a:xfrm>
-            <a:off x="1371600" y="2871216"/>
-            <a:ext cx="10104120" cy="310896"/>
+            <a:off x="5084064" y="1746504"/>
+            <a:ext cx="2606040" cy="310896"/>
           </a:xfrm>
           <a:prstGeom prst="rect">
             <a:avLst/>
@@ -4715,7 +5066,7 @@
                 <a:ea typeface="Calibri" pitchFamily="34" charset="-122"/>
                 <a:cs typeface="Calibri" pitchFamily="34" charset="-120"/>
               </a:rPr>
-              <a:t>Directory profiles</a:t>
+              <a:t>Content cadence</a:t>
             </a:r>
             <a:endParaRPr lang="en-US" sz="1400" dirty="0"/>
           </a:p>
@@ -4729,8 +5080,8 @@
         </p:nvSpPr>
         <p:spPr>
           <a:xfrm>
-            <a:off x="1371600" y="3182112"/>
-            <a:ext cx="10104120" cy="502920"/>
+            <a:off x="5084064" y="2057400"/>
+            <a:ext cx="2606040" cy="1051560"/>
           </a:xfrm>
           <a:prstGeom prst="rect">
             <a:avLst/>
@@ -4754,7 +5105,7 @@
                 <a:ea typeface="Calibri" pitchFamily="34" charset="-122"/>
                 <a:cs typeface="Calibri" pitchFamily="34" charset="-120"/>
               </a:rPr>
-              <a:t>Every org completes and owns its listing</a:t>
+              <a:t>Weekly pulse, scanned items and pledge-index updates worth returning for</a:t>
             </a:r>
             <a:endParaRPr lang="en-US" sz="1150" dirty="0"/>
           </a:p>
@@ -4768,12 +5119,12 @@
         </p:nvSpPr>
         <p:spPr>
           <a:xfrm>
-            <a:off x="548640" y="3895344"/>
-            <a:ext cx="11064240" cy="1051560"/>
+            <a:off x="7973568" y="1600200"/>
+            <a:ext cx="3566160" cy="1600200"/>
           </a:xfrm>
           <a:prstGeom prst="roundRect">
             <a:avLst>
-              <a:gd name="adj" fmla="val 6957"/>
+              <a:gd name="adj" fmla="val 4571"/>
             </a:avLst>
           </a:prstGeom>
           <a:solidFill>
@@ -4802,14 +5153,14 @@
         </p:nvSpPr>
         <p:spPr>
           <a:xfrm>
-            <a:off x="749808" y="4114800"/>
+            <a:off x="8174736" y="1819656"/>
             <a:ext cx="457200" cy="457200"/>
           </a:xfrm>
           <a:prstGeom prst="ellipse">
             <a:avLst/>
           </a:prstGeom>
           <a:solidFill>
-            <a:srgbClr val="EE9455"/>
+            <a:srgbClr val="1B6B4A"/>
           </a:solidFill>
           <a:ln/>
         </p:spPr>
@@ -4822,7 +5173,7 @@
         </p:nvSpPr>
         <p:spPr>
           <a:xfrm>
-            <a:off x="749808" y="4114800"/>
+            <a:off x="8174736" y="1819656"/>
             <a:ext cx="457200" cy="457200"/>
           </a:xfrm>
           <a:prstGeom prst="rect">
@@ -4847,7 +5198,7 @@
                 <a:ea typeface="Calibri" pitchFamily="34" charset="-122"/>
                 <a:cs typeface="Calibri" pitchFamily="34" charset="-120"/>
               </a:rPr>
-              <a:t>✓</a:t>
+              <a:t>3</a:t>
             </a:r>
             <a:endParaRPr lang="en-US" sz="1500" dirty="0"/>
           </a:p>
@@ -4861,8 +5212,8 @@
         </p:nvSpPr>
         <p:spPr>
           <a:xfrm>
-            <a:off x="1371600" y="4041648"/>
-            <a:ext cx="10104120" cy="310896"/>
+            <a:off x="8796528" y="1746504"/>
+            <a:ext cx="2606040" cy="310896"/>
           </a:xfrm>
           <a:prstGeom prst="rect">
             <a:avLst/>
@@ -4886,7 +5237,7 @@
                 <a:ea typeface="Calibri" pitchFamily="34" charset="-122"/>
                 <a:cs typeface="Calibri" pitchFamily="34" charset="-120"/>
               </a:rPr>
-              <a:t>Resource uploads</a:t>
+              <a:t>Social amplification</a:t>
             </a:r>
             <a:endParaRPr lang="en-US" sz="1400" dirty="0"/>
           </a:p>
@@ -4900,8 +5251,8 @@
         </p:nvSpPr>
         <p:spPr>
           <a:xfrm>
-            <a:off x="1371600" y="4352544"/>
-            <a:ext cx="10104120" cy="502920"/>
+            <a:off x="8796528" y="2057400"/>
+            <a:ext cx="2606040" cy="1051560"/>
           </a:xfrm>
           <a:prstGeom prst="rect">
             <a:avLst/>
@@ -4925,7 +5276,7 @@
                 <a:ea typeface="Calibri" pitchFamily="34" charset="-122"/>
                 <a:cs typeface="Calibri" pitchFamily="34" charset="-120"/>
               </a:rPr>
-              <a:t>Ask each partner for one real resource in the first fortnight</a:t>
+              <a:t>Clippable cards for X, TikTok, Facebook &amp; Instagram</a:t>
             </a:r>
             <a:endParaRPr lang="en-US" sz="1150" dirty="0"/>
           </a:p>
@@ -4939,12 +5290,12 @@
         </p:nvSpPr>
         <p:spPr>
           <a:xfrm>
-            <a:off x="548640" y="5065776"/>
-            <a:ext cx="11064240" cy="1051560"/>
+            <a:off x="548640" y="3383280"/>
+            <a:ext cx="3566160" cy="1600200"/>
           </a:xfrm>
           <a:prstGeom prst="roundRect">
             <a:avLst>
-              <a:gd name="adj" fmla="val 6957"/>
+              <a:gd name="adj" fmla="val 4571"/>
             </a:avLst>
           </a:prstGeom>
           <a:solidFill>
@@ -4973,14 +5324,14 @@
         </p:nvSpPr>
         <p:spPr>
           <a:xfrm>
-            <a:off x="749808" y="5285232"/>
+            <a:off x="749808" y="3602736"/>
             <a:ext cx="457200" cy="457200"/>
           </a:xfrm>
           <a:prstGeom prst="ellipse">
             <a:avLst/>
           </a:prstGeom>
           <a:solidFill>
-            <a:srgbClr val="EE9455"/>
+            <a:srgbClr val="1B6B4A"/>
           </a:solidFill>
           <a:ln/>
         </p:spPr>
@@ -4993,7 +5344,7 @@
         </p:nvSpPr>
         <p:spPr>
           <a:xfrm>
-            <a:off x="749808" y="5285232"/>
+            <a:off x="749808" y="3602736"/>
             <a:ext cx="457200" cy="457200"/>
           </a:xfrm>
           <a:prstGeom prst="rect">
@@ -5018,7 +5369,7 @@
                 <a:ea typeface="Calibri" pitchFamily="34" charset="-122"/>
                 <a:cs typeface="Calibri" pitchFamily="34" charset="-120"/>
               </a:rPr>
-              <a:t>✓</a:t>
+              <a:t>4</a:t>
             </a:r>
             <a:endParaRPr lang="en-US" sz="1500" dirty="0"/>
           </a:p>
@@ -5032,8 +5383,8 @@
         </p:nvSpPr>
         <p:spPr>
           <a:xfrm>
-            <a:off x="1371600" y="5212080"/>
-            <a:ext cx="10104120" cy="310896"/>
+            <a:off x="1371600" y="3529584"/>
+            <a:ext cx="2606040" cy="310896"/>
           </a:xfrm>
           <a:prstGeom prst="rect">
             <a:avLst/>
@@ -5057,7 +5408,7 @@
                 <a:ea typeface="Calibri" pitchFamily="34" charset="-122"/>
                 <a:cs typeface="Calibri" pitchFamily="34" charset="-120"/>
               </a:rPr>
-              <a:t>County documentation</a:t>
+              <a:t>Partner spotlights</a:t>
             </a:r>
             <a:endParaRPr lang="en-US" sz="1400" dirty="0"/>
           </a:p>
@@ -5071,8 +5422,8 @@
         </p:nvSpPr>
         <p:spPr>
           <a:xfrm>
-            <a:off x="1371600" y="5522976"/>
-            <a:ext cx="10104120" cy="502920"/>
+            <a:off x="1371600" y="3840480"/>
+            <a:ext cx="2606040" cy="1051560"/>
           </a:xfrm>
           <a:prstGeom prst="rect">
             <a:avLst/>
@@ -5096,7 +5447,7 @@
                 <a:ea typeface="Calibri" pitchFamily="34" charset="-122"/>
                 <a:cs typeface="Calibri" pitchFamily="34" charset="-120"/>
               </a:rPr>
-              <a:t>Turn field activity into map entries and voices</a:t>
+              <a:t>Feature a member org's work each week to model good use</a:t>
             </a:r>
             <a:endParaRPr lang="en-US" sz="1150" dirty="0"/>
           </a:p>
@@ -5104,7 +5455,349 @@
       </p:sp>
       <p:sp>
         <p:nvSpPr>
-          <p:cNvPr id="24" name="Text 22"/>
+          <p:cNvPr id="24" name="Shape 22"/>
+          <p:cNvSpPr/>
+          <p:nvPr/>
+        </p:nvSpPr>
+        <p:spPr>
+          <a:xfrm>
+            <a:off x="4261104" y="3383280"/>
+            <a:ext cx="3566160" cy="1600200"/>
+          </a:xfrm>
+          <a:prstGeom prst="roundRect">
+            <a:avLst>
+              <a:gd name="adj" fmla="val 4571"/>
+            </a:avLst>
+          </a:prstGeom>
+          <a:solidFill>
+            <a:srgbClr val="F1F5F3"/>
+          </a:solidFill>
+          <a:ln w="9525">
+            <a:solidFill>
+              <a:srgbClr val="D9E2DC"/>
+            </a:solidFill>
+            <a:prstDash val="solid"/>
+          </a:ln>
+          <a:effectLst>
+            <a:outerShdw sx="100000" sy="100000" kx="0" ky="0" algn="bl" rotWithShape="0" blurRad="76200" dist="25400" dir="5400000">
+              <a:srgbClr val="9AA8A0">
+                <a:alpha val="35000"/>
+              </a:srgbClr>
+            </a:outerShdw>
+          </a:effectLst>
+        </p:spPr>
+      </p:sp>
+      <p:sp>
+        <p:nvSpPr>
+          <p:cNvPr id="25" name="Shape 23"/>
+          <p:cNvSpPr/>
+          <p:nvPr/>
+        </p:nvSpPr>
+        <p:spPr>
+          <a:xfrm>
+            <a:off x="4462272" y="3602736"/>
+            <a:ext cx="457200" cy="457200"/>
+          </a:xfrm>
+          <a:prstGeom prst="ellipse">
+            <a:avLst/>
+          </a:prstGeom>
+          <a:solidFill>
+            <a:srgbClr val="1B6B4A"/>
+          </a:solidFill>
+          <a:ln/>
+        </p:spPr>
+      </p:sp>
+      <p:sp>
+        <p:nvSpPr>
+          <p:cNvPr id="26" name="Text 24"/>
+          <p:cNvSpPr/>
+          <p:nvPr/>
+        </p:nvSpPr>
+        <p:spPr>
+          <a:xfrm>
+            <a:off x="4462272" y="3602736"/>
+            <a:ext cx="457200" cy="457200"/>
+          </a:xfrm>
+          <a:prstGeom prst="rect">
+            <a:avLst/>
+          </a:prstGeom>
+          <a:noFill/>
+          <a:ln/>
+        </p:spPr>
+        <p:txBody>
+          <a:bodyPr wrap="square" lIns="0" tIns="0" rIns="0" bIns="0" rtlCol="0" anchor="ctr"/>
+          <a:lstStyle/>
+          <a:p>
+            <a:pPr algn="ctr" indent="0" marL="0">
+              <a:buNone/>
+            </a:pPr>
+            <a:r>
+              <a:rPr lang="en-US" sz="1500" b="1" dirty="0">
+                <a:solidFill>
+                  <a:srgbClr val="FFFFFF"/>
+                </a:solidFill>
+                <a:latin typeface="Calibri" pitchFamily="34" charset="0"/>
+                <a:ea typeface="Calibri" pitchFamily="34" charset="-122"/>
+                <a:cs typeface="Calibri" pitchFamily="34" charset="-120"/>
+              </a:rPr>
+              <a:t>5</a:t>
+            </a:r>
+            <a:endParaRPr lang="en-US" sz="1500" dirty="0"/>
+          </a:p>
+        </p:txBody>
+      </p:sp>
+      <p:sp>
+        <p:nvSpPr>
+          <p:cNvPr id="27" name="Text 25"/>
+          <p:cNvSpPr/>
+          <p:nvPr/>
+        </p:nvSpPr>
+        <p:spPr>
+          <a:xfrm>
+            <a:off x="5084064" y="3529584"/>
+            <a:ext cx="2606040" cy="310896"/>
+          </a:xfrm>
+          <a:prstGeom prst="rect">
+            <a:avLst/>
+          </a:prstGeom>
+          <a:noFill/>
+          <a:ln/>
+        </p:spPr>
+        <p:txBody>
+          <a:bodyPr wrap="square" lIns="0" tIns="0" rIns="0" bIns="0" rtlCol="0" anchor="ctr"/>
+          <a:lstStyle/>
+          <a:p>
+            <a:pPr indent="0" marL="0">
+              <a:buNone/>
+            </a:pPr>
+            <a:r>
+              <a:rPr lang="en-US" sz="1400" b="1" dirty="0">
+                <a:solidFill>
+                  <a:srgbClr val="1D2621"/>
+                </a:solidFill>
+                <a:latin typeface="Calibri" pitchFamily="34" charset="0"/>
+                <a:ea typeface="Calibri" pitchFamily="34" charset="-122"/>
+                <a:cs typeface="Calibri" pitchFamily="34" charset="-120"/>
+              </a:rPr>
+              <a:t>Petition drives</a:t>
+            </a:r>
+            <a:endParaRPr lang="en-US" sz="1400" dirty="0"/>
+          </a:p>
+        </p:txBody>
+      </p:sp>
+      <p:sp>
+        <p:nvSpPr>
+          <p:cNvPr id="28" name="Text 26"/>
+          <p:cNvSpPr/>
+          <p:nvPr/>
+        </p:nvSpPr>
+        <p:spPr>
+          <a:xfrm>
+            <a:off x="5084064" y="3840480"/>
+            <a:ext cx="2606040" cy="1051560"/>
+          </a:xfrm>
+          <a:prstGeom prst="rect">
+            <a:avLst/>
+          </a:prstGeom>
+          <a:noFill/>
+          <a:ln/>
+        </p:spPr>
+        <p:txBody>
+          <a:bodyPr wrap="square" lIns="0" tIns="0" rIns="0" bIns="0" rtlCol="0" anchor="t"/>
+          <a:lstStyle/>
+          <a:p>
+            <a:pPr indent="0" marL="0">
+              <a:buNone/>
+            </a:pPr>
+            <a:r>
+              <a:rPr lang="en-US" sz="1150" dirty="0">
+                <a:solidFill>
+                  <a:srgbClr val="5D6B63"/>
+                </a:solidFill>
+                <a:latin typeface="Calibri" pitchFamily="34" charset="0"/>
+                <a:ea typeface="Calibri" pitchFamily="34" charset="-122"/>
+                <a:cs typeface="Calibri" pitchFamily="34" charset="-120"/>
+              </a:rPr>
+              <a:t>Launch demands that give partners a reason to log in and act</a:t>
+            </a:r>
+            <a:endParaRPr lang="en-US" sz="1150" dirty="0"/>
+          </a:p>
+        </p:txBody>
+      </p:sp>
+      <p:sp>
+        <p:nvSpPr>
+          <p:cNvPr id="29" name="Shape 27"/>
+          <p:cNvSpPr/>
+          <p:nvPr/>
+        </p:nvSpPr>
+        <p:spPr>
+          <a:xfrm>
+            <a:off x="7973568" y="3383280"/>
+            <a:ext cx="3566160" cy="1600200"/>
+          </a:xfrm>
+          <a:prstGeom prst="roundRect">
+            <a:avLst>
+              <a:gd name="adj" fmla="val 4571"/>
+            </a:avLst>
+          </a:prstGeom>
+          <a:solidFill>
+            <a:srgbClr val="F1F5F3"/>
+          </a:solidFill>
+          <a:ln w="9525">
+            <a:solidFill>
+              <a:srgbClr val="D9E2DC"/>
+            </a:solidFill>
+            <a:prstDash val="solid"/>
+          </a:ln>
+          <a:effectLst>
+            <a:outerShdw sx="100000" sy="100000" kx="0" ky="0" algn="bl" rotWithShape="0" blurRad="76200" dist="25400" dir="5400000">
+              <a:srgbClr val="9AA8A0">
+                <a:alpha val="35000"/>
+              </a:srgbClr>
+            </a:outerShdw>
+          </a:effectLst>
+        </p:spPr>
+      </p:sp>
+      <p:sp>
+        <p:nvSpPr>
+          <p:cNvPr id="30" name="Shape 28"/>
+          <p:cNvSpPr/>
+          <p:nvPr/>
+        </p:nvSpPr>
+        <p:spPr>
+          <a:xfrm>
+            <a:off x="8174736" y="3602736"/>
+            <a:ext cx="457200" cy="457200"/>
+          </a:xfrm>
+          <a:prstGeom prst="ellipse">
+            <a:avLst/>
+          </a:prstGeom>
+          <a:solidFill>
+            <a:srgbClr val="1B6B4A"/>
+          </a:solidFill>
+          <a:ln/>
+        </p:spPr>
+      </p:sp>
+      <p:sp>
+        <p:nvSpPr>
+          <p:cNvPr id="31" name="Text 29"/>
+          <p:cNvSpPr/>
+          <p:nvPr/>
+        </p:nvSpPr>
+        <p:spPr>
+          <a:xfrm>
+            <a:off x="8174736" y="3602736"/>
+            <a:ext cx="457200" cy="457200"/>
+          </a:xfrm>
+          <a:prstGeom prst="rect">
+            <a:avLst/>
+          </a:prstGeom>
+          <a:noFill/>
+          <a:ln/>
+        </p:spPr>
+        <p:txBody>
+          <a:bodyPr wrap="square" lIns="0" tIns="0" rIns="0" bIns="0" rtlCol="0" anchor="ctr"/>
+          <a:lstStyle/>
+          <a:p>
+            <a:pPr algn="ctr" indent="0" marL="0">
+              <a:buNone/>
+            </a:pPr>
+            <a:r>
+              <a:rPr lang="en-US" sz="1500" b="1" dirty="0">
+                <a:solidFill>
+                  <a:srgbClr val="FFFFFF"/>
+                </a:solidFill>
+                <a:latin typeface="Calibri" pitchFamily="34" charset="0"/>
+                <a:ea typeface="Calibri" pitchFamily="34" charset="-122"/>
+                <a:cs typeface="Calibri" pitchFamily="34" charset="-120"/>
+              </a:rPr>
+              <a:t>6</a:t>
+            </a:r>
+            <a:endParaRPr lang="en-US" sz="1500" dirty="0"/>
+          </a:p>
+        </p:txBody>
+      </p:sp>
+      <p:sp>
+        <p:nvSpPr>
+          <p:cNvPr id="32" name="Text 30"/>
+          <p:cNvSpPr/>
+          <p:nvPr/>
+        </p:nvSpPr>
+        <p:spPr>
+          <a:xfrm>
+            <a:off x="8796528" y="3529584"/>
+            <a:ext cx="2606040" cy="310896"/>
+          </a:xfrm>
+          <a:prstGeom prst="rect">
+            <a:avLst/>
+          </a:prstGeom>
+          <a:noFill/>
+          <a:ln/>
+        </p:spPr>
+        <p:txBody>
+          <a:bodyPr wrap="square" lIns="0" tIns="0" rIns="0" bIns="0" rtlCol="0" anchor="ctr"/>
+          <a:lstStyle/>
+          <a:p>
+            <a:pPr indent="0" marL="0">
+              <a:buNone/>
+            </a:pPr>
+            <a:r>
+              <a:rPr lang="en-US" sz="1400" b="1" dirty="0">
+                <a:solidFill>
+                  <a:srgbClr val="1D2621"/>
+                </a:solidFill>
+                <a:latin typeface="Calibri" pitchFamily="34" charset="0"/>
+                <a:ea typeface="Calibri" pitchFamily="34" charset="-122"/>
+                <a:cs typeface="Calibri" pitchFamily="34" charset="-120"/>
+              </a:rPr>
+              <a:t>Nudges</a:t>
+            </a:r>
+            <a:endParaRPr lang="en-US" sz="1400" dirty="0"/>
+          </a:p>
+        </p:txBody>
+      </p:sp>
+      <p:sp>
+        <p:nvSpPr>
+          <p:cNvPr id="33" name="Text 31"/>
+          <p:cNvSpPr/>
+          <p:nvPr/>
+        </p:nvSpPr>
+        <p:spPr>
+          <a:xfrm>
+            <a:off x="8796528" y="3840480"/>
+            <a:ext cx="2606040" cy="1051560"/>
+          </a:xfrm>
+          <a:prstGeom prst="rect">
+            <a:avLst/>
+          </a:prstGeom>
+          <a:noFill/>
+          <a:ln/>
+        </p:spPr>
+        <p:txBody>
+          <a:bodyPr wrap="square" lIns="0" tIns="0" rIns="0" bIns="0" rtlCol="0" anchor="t"/>
+          <a:lstStyle/>
+          <a:p>
+            <a:pPr indent="0" marL="0">
+              <a:buNone/>
+            </a:pPr>
+            <a:r>
+              <a:rPr lang="en-US" sz="1150" dirty="0">
+                <a:solidFill>
+                  <a:srgbClr val="5D6B63"/>
+                </a:solidFill>
+                <a:latin typeface="Calibri" pitchFamily="34" charset="0"/>
+                <a:ea typeface="Calibri" pitchFamily="34" charset="-122"/>
+                <a:cs typeface="Calibri" pitchFamily="34" charset="-120"/>
+              </a:rPr>
+              <a:t>WhatsApp broadcast + email digest to re-activate quiet members</a:t>
+            </a:r>
+            <a:endParaRPr lang="en-US" sz="1150" dirty="0"/>
+          </a:p>
+        </p:txBody>
+      </p:sp>
+      <p:sp>
+        <p:nvSpPr>
+          <p:cNvPr id="34" name="Text 32"/>
           <p:cNvSpPr/>
           <p:nvPr/>
         </p:nvSpPr>
@@ -5206,7 +5899,7 @@
                 <a:ea typeface="Calibri" pitchFamily="34" charset="-122"/>
                 <a:cs typeface="Calibri" pitchFamily="34" charset="-120"/>
               </a:rPr>
-              <a:t>THE ROLLOUT</a:t>
+              <a:t>MAKE IT STICKY</a:t>
             </a:r>
             <a:endParaRPr lang="en-US" sz="1200" dirty="0"/>
           </a:p>
@@ -5245,7 +5938,7 @@
                 <a:ea typeface="Cambria" pitchFamily="34" charset="-122"/>
                 <a:cs typeface="Cambria" pitchFamily="34" charset="-120"/>
               </a:rPr>
-              <a:t>Four phases, twelve weeks</a:t>
+              <a:t>Design for repeat use</a:t>
             </a:r>
             <a:endParaRPr lang="en-US" sz="3000" dirty="0"/>
           </a:p>
@@ -5259,16 +5952,16 @@
         </p:nvSpPr>
         <p:spPr>
           <a:xfrm>
-            <a:off x="548640" y="1737360"/>
-            <a:ext cx="2651760" cy="3383280"/>
+            <a:off x="548640" y="1554480"/>
+            <a:ext cx="11064240" cy="1051560"/>
           </a:xfrm>
           <a:prstGeom prst="roundRect">
             <a:avLst>
-              <a:gd name="adj" fmla="val 2759"/>
+              <a:gd name="adj" fmla="val 6957"/>
             </a:avLst>
           </a:prstGeom>
           <a:solidFill>
-            <a:srgbClr val="FFFFFF"/>
+            <a:srgbClr val="F1F5F3"/>
           </a:solidFill>
           <a:ln w="9525">
             <a:solidFill>
@@ -5293,111 +5986,11 @@
         </p:nvSpPr>
         <p:spPr>
           <a:xfrm>
-            <a:off x="1554480" y="1965960"/>
-            <a:ext cx="640080" cy="640080"/>
+            <a:off x="749808" y="1773936"/>
+            <a:ext cx="457200" cy="457200"/>
           </a:xfrm>
           <a:prstGeom prst="ellipse">
             <a:avLst/>
-          </a:prstGeom>
-          <a:solidFill>
-            <a:srgbClr val="1B6B4A"/>
-          </a:solidFill>
-          <a:ln/>
-        </p:spPr>
-      </p:sp>
-      <p:sp>
-        <p:nvSpPr>
-          <p:cNvPr id="6" name="Text 4"/>
-          <p:cNvSpPr/>
-          <p:nvPr/>
-        </p:nvSpPr>
-        <p:spPr>
-          <a:xfrm>
-            <a:off x="1554480" y="1965960"/>
-            <a:ext cx="640080" cy="640080"/>
-          </a:xfrm>
-          <a:prstGeom prst="rect">
-            <a:avLst/>
-          </a:prstGeom>
-          <a:noFill/>
-          <a:ln/>
-        </p:spPr>
-        <p:txBody>
-          <a:bodyPr wrap="square" lIns="0" tIns="0" rIns="0" bIns="0" rtlCol="0" anchor="ctr"/>
-          <a:lstStyle/>
-          <a:p>
-            <a:pPr algn="ctr" indent="0" marL="0">
-              <a:buNone/>
-            </a:pPr>
-            <a:r>
-              <a:rPr lang="en-US" sz="2000" b="1" dirty="0">
-                <a:solidFill>
-                  <a:srgbClr val="FFFFFF"/>
-                </a:solidFill>
-                <a:latin typeface="Calibri" pitchFamily="34" charset="0"/>
-                <a:ea typeface="Calibri" pitchFamily="34" charset="-122"/>
-                <a:cs typeface="Calibri" pitchFamily="34" charset="-120"/>
-              </a:rPr>
-              <a:t>1</a:t>
-            </a:r>
-            <a:endParaRPr lang="en-US" sz="2000" dirty="0"/>
-          </a:p>
-        </p:txBody>
-      </p:sp>
-      <p:sp>
-        <p:nvSpPr>
-          <p:cNvPr id="7" name="Text 5"/>
-          <p:cNvSpPr/>
-          <p:nvPr/>
-        </p:nvSpPr>
-        <p:spPr>
-          <a:xfrm>
-            <a:off x="685800" y="2697480"/>
-            <a:ext cx="2377440" cy="365760"/>
-          </a:xfrm>
-          <a:prstGeom prst="rect">
-            <a:avLst/>
-          </a:prstGeom>
-          <a:noFill/>
-          <a:ln/>
-        </p:spPr>
-        <p:txBody>
-          <a:bodyPr wrap="square" lIns="0" tIns="0" rIns="0" bIns="0" rtlCol="0" anchor="ctr"/>
-          <a:lstStyle/>
-          <a:p>
-            <a:pPr algn="ctr" indent="0" marL="0">
-              <a:buNone/>
-            </a:pPr>
-            <a:r>
-              <a:rPr lang="en-US" sz="1600" b="1" dirty="0">
-                <a:solidFill>
-                  <a:srgbClr val="1D2621"/>
-                </a:solidFill>
-                <a:latin typeface="Calibri" pitchFamily="34" charset="0"/>
-                <a:ea typeface="Calibri" pitchFamily="34" charset="-122"/>
-                <a:cs typeface="Calibri" pitchFamily="34" charset="-120"/>
-              </a:rPr>
-              <a:t>Awareness</a:t>
-            </a:r>
-            <a:endParaRPr lang="en-US" sz="1600" dirty="0"/>
-          </a:p>
-        </p:txBody>
-      </p:sp>
-      <p:sp>
-        <p:nvSpPr>
-          <p:cNvPr id="8" name="Shape 6"/>
-          <p:cNvSpPr/>
-          <p:nvPr/>
-        </p:nvSpPr>
-        <p:spPr>
-          <a:xfrm>
-            <a:off x="1234440" y="3108960"/>
-            <a:ext cx="1280160" cy="310896"/>
-          </a:xfrm>
-          <a:prstGeom prst="roundRect">
-            <a:avLst>
-              <a:gd name="adj" fmla="val 50000"/>
-            </a:avLst>
           </a:prstGeom>
           <a:solidFill>
             <a:srgbClr val="EE9455"/>
@@ -5407,14 +6000,14 @@
       </p:sp>
       <p:sp>
         <p:nvSpPr>
-          <p:cNvPr id="9" name="Text 7"/>
-          <p:cNvSpPr/>
-          <p:nvPr/>
-        </p:nvSpPr>
-        <p:spPr>
-          <a:xfrm>
-            <a:off x="1234440" y="3108960"/>
-            <a:ext cx="1280160" cy="310896"/>
+          <p:cNvPr id="6" name="Text 4"/>
+          <p:cNvSpPr/>
+          <p:nvPr/>
+        </p:nvSpPr>
+        <p:spPr>
+          <a:xfrm>
+            <a:off x="749808" y="1773936"/>
+            <a:ext cx="457200" cy="457200"/>
           </a:xfrm>
           <a:prstGeom prst="rect">
             <a:avLst/>
@@ -5430,7 +6023,7 @@
               <a:buNone/>
             </a:pPr>
             <a:r>
-              <a:rPr lang="en-US" sz="1000" b="1" dirty="0">
+              <a:rPr lang="en-US" sz="1500" b="1" dirty="0">
                 <a:solidFill>
                   <a:srgbClr val="FFFFFF"/>
                 </a:solidFill>
@@ -5438,22 +6031,61 @@
                 <a:ea typeface="Calibri" pitchFamily="34" charset="-122"/>
                 <a:cs typeface="Calibri" pitchFamily="34" charset="-120"/>
               </a:rPr>
-              <a:t>Wk 1–2</a:t>
-            </a:r>
-            <a:endParaRPr lang="en-US" sz="1000" dirty="0"/>
-          </a:p>
-        </p:txBody>
-      </p:sp>
-      <p:sp>
-        <p:nvSpPr>
-          <p:cNvPr id="10" name="Text 8"/>
-          <p:cNvSpPr/>
-          <p:nvPr/>
-        </p:nvSpPr>
-        <p:spPr>
-          <a:xfrm>
-            <a:off x="749808" y="3611880"/>
-            <a:ext cx="2249424" cy="1371600"/>
+              <a:t>✓</a:t>
+            </a:r>
+            <a:endParaRPr lang="en-US" sz="1500" dirty="0"/>
+          </a:p>
+        </p:txBody>
+      </p:sp>
+      <p:sp>
+        <p:nvSpPr>
+          <p:cNvPr id="7" name="Text 5"/>
+          <p:cNvSpPr/>
+          <p:nvPr/>
+        </p:nvSpPr>
+        <p:spPr>
+          <a:xfrm>
+            <a:off x="1371600" y="1700784"/>
+            <a:ext cx="10104120" cy="310896"/>
+          </a:xfrm>
+          <a:prstGeom prst="rect">
+            <a:avLst/>
+          </a:prstGeom>
+          <a:noFill/>
+          <a:ln/>
+        </p:spPr>
+        <p:txBody>
+          <a:bodyPr wrap="square" lIns="0" tIns="0" rIns="0" bIns="0" rtlCol="0" anchor="ctr"/>
+          <a:lstStyle/>
+          <a:p>
+            <a:pPr indent="0" marL="0">
+              <a:buNone/>
+            </a:pPr>
+            <a:r>
+              <a:rPr lang="en-US" sz="1400" b="1" dirty="0">
+                <a:solidFill>
+                  <a:srgbClr val="1D2621"/>
+                </a:solidFill>
+                <a:latin typeface="Calibri" pitchFamily="34" charset="0"/>
+                <a:ea typeface="Calibri" pitchFamily="34" charset="-122"/>
+                <a:cs typeface="Calibri" pitchFamily="34" charset="-120"/>
+              </a:rPr>
+              <a:t>Org champions</a:t>
+            </a:r>
+            <a:endParaRPr lang="en-US" sz="1400" dirty="0"/>
+          </a:p>
+        </p:txBody>
+      </p:sp>
+      <p:sp>
+        <p:nvSpPr>
+          <p:cNvPr id="8" name="Text 6"/>
+          <p:cNvSpPr/>
+          <p:nvPr/>
+        </p:nvSpPr>
+        <p:spPr>
+          <a:xfrm>
+            <a:off x="1371600" y="2011680"/>
+            <a:ext cx="10104120" cy="502920"/>
           </a:xfrm>
           <a:prstGeom prst="rect">
             <a:avLst/>
@@ -5465,7 +6097,7 @@
           <a:bodyPr wrap="square" lIns="0" tIns="0" rIns="0" bIns="0" rtlCol="0" anchor="t"/>
           <a:lstStyle/>
           <a:p>
-            <a:pPr algn="ctr" indent="0" marL="0">
+            <a:pPr indent="0" marL="0">
               <a:buNone/>
             </a:pPr>
             <a:r>
@@ -5477,7 +6109,7 @@
                 <a:ea typeface="Calibri" pitchFamily="34" charset="-122"/>
                 <a:cs typeface="Calibri" pitchFamily="34" charset="-120"/>
               </a:rPr>
-              <a:t>Teasers on raia &amp; socials; press pre-brief</a:t>
+              <a:t>Name one person per partner org responsible for the hub</a:t>
             </a:r>
             <a:endParaRPr lang="en-US" sz="1150" dirty="0"/>
           </a:p>
@@ -5485,22 +6117,22 @@
       </p:sp>
       <p:sp>
         <p:nvSpPr>
-          <p:cNvPr id="11" name="Shape 9"/>
-          <p:cNvSpPr/>
-          <p:nvPr/>
-        </p:nvSpPr>
-        <p:spPr>
-          <a:xfrm>
-            <a:off x="3319272" y="1737360"/>
-            <a:ext cx="2651760" cy="3383280"/>
+          <p:cNvPr id="9" name="Shape 7"/>
+          <p:cNvSpPr/>
+          <p:nvPr/>
+        </p:nvSpPr>
+        <p:spPr>
+          <a:xfrm>
+            <a:off x="548640" y="2724912"/>
+            <a:ext cx="11064240" cy="1051560"/>
           </a:xfrm>
           <a:prstGeom prst="roundRect">
             <a:avLst>
-              <a:gd name="adj" fmla="val 2759"/>
+              <a:gd name="adj" fmla="val 6957"/>
             </a:avLst>
           </a:prstGeom>
           <a:solidFill>
-            <a:srgbClr val="FFFFFF"/>
+            <a:srgbClr val="F1F5F3"/>
           </a:solidFill>
           <a:ln w="9525">
             <a:solidFill>
@@ -5519,117 +6151,17 @@
       </p:sp>
       <p:sp>
         <p:nvSpPr>
-          <p:cNvPr id="12" name="Shape 10"/>
-          <p:cNvSpPr/>
-          <p:nvPr/>
-        </p:nvSpPr>
-        <p:spPr>
-          <a:xfrm>
-            <a:off x="4325112" y="1965960"/>
-            <a:ext cx="640080" cy="640080"/>
+          <p:cNvPr id="10" name="Shape 8"/>
+          <p:cNvSpPr/>
+          <p:nvPr/>
+        </p:nvSpPr>
+        <p:spPr>
+          <a:xfrm>
+            <a:off x="749808" y="2944368"/>
+            <a:ext cx="457200" cy="457200"/>
           </a:xfrm>
           <a:prstGeom prst="ellipse">
             <a:avLst/>
-          </a:prstGeom>
-          <a:solidFill>
-            <a:srgbClr val="1B6B4A"/>
-          </a:solidFill>
-          <a:ln/>
-        </p:spPr>
-      </p:sp>
-      <p:sp>
-        <p:nvSpPr>
-          <p:cNvPr id="13" name="Text 11"/>
-          <p:cNvSpPr/>
-          <p:nvPr/>
-        </p:nvSpPr>
-        <p:spPr>
-          <a:xfrm>
-            <a:off x="4325112" y="1965960"/>
-            <a:ext cx="640080" cy="640080"/>
-          </a:xfrm>
-          <a:prstGeom prst="rect">
-            <a:avLst/>
-          </a:prstGeom>
-          <a:noFill/>
-          <a:ln/>
-        </p:spPr>
-        <p:txBody>
-          <a:bodyPr wrap="square" lIns="0" tIns="0" rIns="0" bIns="0" rtlCol="0" anchor="ctr"/>
-          <a:lstStyle/>
-          <a:p>
-            <a:pPr algn="ctr" indent="0" marL="0">
-              <a:buNone/>
-            </a:pPr>
-            <a:r>
-              <a:rPr lang="en-US" sz="2000" b="1" dirty="0">
-                <a:solidFill>
-                  <a:srgbClr val="FFFFFF"/>
-                </a:solidFill>
-                <a:latin typeface="Calibri" pitchFamily="34" charset="0"/>
-                <a:ea typeface="Calibri" pitchFamily="34" charset="-122"/>
-                <a:cs typeface="Calibri" pitchFamily="34" charset="-120"/>
-              </a:rPr>
-              <a:t>2</a:t>
-            </a:r>
-            <a:endParaRPr lang="en-US" sz="2000" dirty="0"/>
-          </a:p>
-        </p:txBody>
-      </p:sp>
-      <p:sp>
-        <p:nvSpPr>
-          <p:cNvPr id="14" name="Text 12"/>
-          <p:cNvSpPr/>
-          <p:nvPr/>
-        </p:nvSpPr>
-        <p:spPr>
-          <a:xfrm>
-            <a:off x="3456432" y="2697480"/>
-            <a:ext cx="2377440" cy="365760"/>
-          </a:xfrm>
-          <a:prstGeom prst="rect">
-            <a:avLst/>
-          </a:prstGeom>
-          <a:noFill/>
-          <a:ln/>
-        </p:spPr>
-        <p:txBody>
-          <a:bodyPr wrap="square" lIns="0" tIns="0" rIns="0" bIns="0" rtlCol="0" anchor="ctr"/>
-          <a:lstStyle/>
-          <a:p>
-            <a:pPr algn="ctr" indent="0" marL="0">
-              <a:buNone/>
-            </a:pPr>
-            <a:r>
-              <a:rPr lang="en-US" sz="1600" b="1" dirty="0">
-                <a:solidFill>
-                  <a:srgbClr val="1D2621"/>
-                </a:solidFill>
-                <a:latin typeface="Calibri" pitchFamily="34" charset="0"/>
-                <a:ea typeface="Calibri" pitchFamily="34" charset="-122"/>
-                <a:cs typeface="Calibri" pitchFamily="34" charset="-120"/>
-              </a:rPr>
-              <a:t>Onboard</a:t>
-            </a:r>
-            <a:endParaRPr lang="en-US" sz="1600" dirty="0"/>
-          </a:p>
-        </p:txBody>
-      </p:sp>
-      <p:sp>
-        <p:nvSpPr>
-          <p:cNvPr id="15" name="Shape 13"/>
-          <p:cNvSpPr/>
-          <p:nvPr/>
-        </p:nvSpPr>
-        <p:spPr>
-          <a:xfrm>
-            <a:off x="4005072" y="3108960"/>
-            <a:ext cx="1280160" cy="310896"/>
-          </a:xfrm>
-          <a:prstGeom prst="roundRect">
-            <a:avLst>
-              <a:gd name="adj" fmla="val 50000"/>
-            </a:avLst>
           </a:prstGeom>
           <a:solidFill>
             <a:srgbClr val="EE9455"/>
@@ -5639,14 +6171,14 @@
       </p:sp>
       <p:sp>
         <p:nvSpPr>
-          <p:cNvPr id="16" name="Text 14"/>
-          <p:cNvSpPr/>
-          <p:nvPr/>
-        </p:nvSpPr>
-        <p:spPr>
-          <a:xfrm>
-            <a:off x="4005072" y="3108960"/>
-            <a:ext cx="1280160" cy="310896"/>
+          <p:cNvPr id="11" name="Text 9"/>
+          <p:cNvSpPr/>
+          <p:nvPr/>
+        </p:nvSpPr>
+        <p:spPr>
+          <a:xfrm>
+            <a:off x="749808" y="2944368"/>
+            <a:ext cx="457200" cy="457200"/>
           </a:xfrm>
           <a:prstGeom prst="rect">
             <a:avLst/>
@@ -5662,7 +6194,7 @@
               <a:buNone/>
             </a:pPr>
             <a:r>
-              <a:rPr lang="en-US" sz="1000" b="1" dirty="0">
+              <a:rPr lang="en-US" sz="1500" b="1" dirty="0">
                 <a:solidFill>
                   <a:srgbClr val="FFFFFF"/>
                 </a:solidFill>
@@ -5670,22 +6202,61 @@
                 <a:ea typeface="Calibri" pitchFamily="34" charset="-122"/>
                 <a:cs typeface="Calibri" pitchFamily="34" charset="-120"/>
               </a:rPr>
-              <a:t>Wk 2–5</a:t>
-            </a:r>
-            <a:endParaRPr lang="en-US" sz="1000" dirty="0"/>
-          </a:p>
-        </p:txBody>
-      </p:sp>
-      <p:sp>
-        <p:nvSpPr>
-          <p:cNvPr id="17" name="Text 15"/>
-          <p:cNvSpPr/>
-          <p:nvPr/>
-        </p:nvSpPr>
-        <p:spPr>
-          <a:xfrm>
-            <a:off x="3520440" y="3611880"/>
-            <a:ext cx="2249424" cy="1371600"/>
+              <a:t>✓</a:t>
+            </a:r>
+            <a:endParaRPr lang="en-US" sz="1500" dirty="0"/>
+          </a:p>
+        </p:txBody>
+      </p:sp>
+      <p:sp>
+        <p:nvSpPr>
+          <p:cNvPr id="12" name="Text 10"/>
+          <p:cNvSpPr/>
+          <p:nvPr/>
+        </p:nvSpPr>
+        <p:spPr>
+          <a:xfrm>
+            <a:off x="1371600" y="2871216"/>
+            <a:ext cx="10104120" cy="310896"/>
+          </a:xfrm>
+          <a:prstGeom prst="rect">
+            <a:avLst/>
+          </a:prstGeom>
+          <a:noFill/>
+          <a:ln/>
+        </p:spPr>
+        <p:txBody>
+          <a:bodyPr wrap="square" lIns="0" tIns="0" rIns="0" bIns="0" rtlCol="0" anchor="ctr"/>
+          <a:lstStyle/>
+          <a:p>
+            <a:pPr indent="0" marL="0">
+              <a:buNone/>
+            </a:pPr>
+            <a:r>
+              <a:rPr lang="en-US" sz="1400" b="1" dirty="0">
+                <a:solidFill>
+                  <a:srgbClr val="1D2621"/>
+                </a:solidFill>
+                <a:latin typeface="Calibri" pitchFamily="34" charset="0"/>
+                <a:ea typeface="Calibri" pitchFamily="34" charset="-122"/>
+                <a:cs typeface="Calibri" pitchFamily="34" charset="-120"/>
+              </a:rPr>
+              <a:t>Directory profiles</a:t>
+            </a:r>
+            <a:endParaRPr lang="en-US" sz="1400" dirty="0"/>
+          </a:p>
+        </p:txBody>
+      </p:sp>
+      <p:sp>
+        <p:nvSpPr>
+          <p:cNvPr id="13" name="Text 11"/>
+          <p:cNvSpPr/>
+          <p:nvPr/>
+        </p:nvSpPr>
+        <p:spPr>
+          <a:xfrm>
+            <a:off x="1371600" y="3182112"/>
+            <a:ext cx="10104120" cy="502920"/>
           </a:xfrm>
           <a:prstGeom prst="rect">
             <a:avLst/>
@@ -5697,7 +6268,7 @@
           <a:bodyPr wrap="square" lIns="0" tIns="0" rIns="0" bIns="0" rtlCol="0" anchor="t"/>
           <a:lstStyle/>
           <a:p>
-            <a:pPr algn="ctr" indent="0" marL="0">
+            <a:pPr indent="0" marL="0">
               <a:buNone/>
             </a:pPr>
             <a:r>
@@ -5709,7 +6280,7 @@
                 <a:ea typeface="Calibri" pitchFamily="34" charset="-122"/>
                 <a:cs typeface="Calibri" pitchFamily="34" charset="-120"/>
               </a:rPr>
-              <a:t>Invites, walkthroughs, directory + resources filled</a:t>
+              <a:t>Every org completes and owns its listing</a:t>
             </a:r>
             <a:endParaRPr lang="en-US" sz="1150" dirty="0"/>
           </a:p>
@@ -5717,22 +6288,22 @@
       </p:sp>
       <p:sp>
         <p:nvSpPr>
-          <p:cNvPr id="18" name="Shape 16"/>
-          <p:cNvSpPr/>
-          <p:nvPr/>
-        </p:nvSpPr>
-        <p:spPr>
-          <a:xfrm>
-            <a:off x="6089904" y="1737360"/>
-            <a:ext cx="2651760" cy="3383280"/>
+          <p:cNvPr id="14" name="Shape 12"/>
+          <p:cNvSpPr/>
+          <p:nvPr/>
+        </p:nvSpPr>
+        <p:spPr>
+          <a:xfrm>
+            <a:off x="548640" y="3895344"/>
+            <a:ext cx="11064240" cy="1051560"/>
           </a:xfrm>
           <a:prstGeom prst="roundRect">
             <a:avLst>
-              <a:gd name="adj" fmla="val 2759"/>
+              <a:gd name="adj" fmla="val 6957"/>
             </a:avLst>
           </a:prstGeom>
           <a:solidFill>
-            <a:srgbClr val="FFFFFF"/>
+            <a:srgbClr val="F1F5F3"/>
           </a:solidFill>
           <a:ln w="9525">
             <a:solidFill>
@@ -5751,117 +6322,17 @@
       </p:sp>
       <p:sp>
         <p:nvSpPr>
-          <p:cNvPr id="19" name="Shape 17"/>
-          <p:cNvSpPr/>
-          <p:nvPr/>
-        </p:nvSpPr>
-        <p:spPr>
-          <a:xfrm>
-            <a:off x="7095744" y="1965960"/>
-            <a:ext cx="640080" cy="640080"/>
+          <p:cNvPr id="15" name="Shape 13"/>
+          <p:cNvSpPr/>
+          <p:nvPr/>
+        </p:nvSpPr>
+        <p:spPr>
+          <a:xfrm>
+            <a:off x="749808" y="4114800"/>
+            <a:ext cx="457200" cy="457200"/>
           </a:xfrm>
           <a:prstGeom prst="ellipse">
             <a:avLst/>
-          </a:prstGeom>
-          <a:solidFill>
-            <a:srgbClr val="1B6B4A"/>
-          </a:solidFill>
-          <a:ln/>
-        </p:spPr>
-      </p:sp>
-      <p:sp>
-        <p:nvSpPr>
-          <p:cNvPr id="20" name="Text 18"/>
-          <p:cNvSpPr/>
-          <p:nvPr/>
-        </p:nvSpPr>
-        <p:spPr>
-          <a:xfrm>
-            <a:off x="7095744" y="1965960"/>
-            <a:ext cx="640080" cy="640080"/>
-          </a:xfrm>
-          <a:prstGeom prst="rect">
-            <a:avLst/>
-          </a:prstGeom>
-          <a:noFill/>
-          <a:ln/>
-        </p:spPr>
-        <p:txBody>
-          <a:bodyPr wrap="square" lIns="0" tIns="0" rIns="0" bIns="0" rtlCol="0" anchor="ctr"/>
-          <a:lstStyle/>
-          <a:p>
-            <a:pPr algn="ctr" indent="0" marL="0">
-              <a:buNone/>
-            </a:pPr>
-            <a:r>
-              <a:rPr lang="en-US" sz="2000" b="1" dirty="0">
-                <a:solidFill>
-                  <a:srgbClr val="FFFFFF"/>
-                </a:solidFill>
-                <a:latin typeface="Calibri" pitchFamily="34" charset="0"/>
-                <a:ea typeface="Calibri" pitchFamily="34" charset="-122"/>
-                <a:cs typeface="Calibri" pitchFamily="34" charset="-120"/>
-              </a:rPr>
-              <a:t>3</a:t>
-            </a:r>
-            <a:endParaRPr lang="en-US" sz="2000" dirty="0"/>
-          </a:p>
-        </p:txBody>
-      </p:sp>
-      <p:sp>
-        <p:nvSpPr>
-          <p:cNvPr id="21" name="Text 19"/>
-          <p:cNvSpPr/>
-          <p:nvPr/>
-        </p:nvSpPr>
-        <p:spPr>
-          <a:xfrm>
-            <a:off x="6227064" y="2697480"/>
-            <a:ext cx="2377440" cy="365760"/>
-          </a:xfrm>
-          <a:prstGeom prst="rect">
-            <a:avLst/>
-          </a:prstGeom>
-          <a:noFill/>
-          <a:ln/>
-        </p:spPr>
-        <p:txBody>
-          <a:bodyPr wrap="square" lIns="0" tIns="0" rIns="0" bIns="0" rtlCol="0" anchor="ctr"/>
-          <a:lstStyle/>
-          <a:p>
-            <a:pPr algn="ctr" indent="0" marL="0">
-              <a:buNone/>
-            </a:pPr>
-            <a:r>
-              <a:rPr lang="en-US" sz="1600" b="1" dirty="0">
-                <a:solidFill>
-                  <a:srgbClr val="1D2621"/>
-                </a:solidFill>
-                <a:latin typeface="Calibri" pitchFamily="34" charset="0"/>
-                <a:ea typeface="Calibri" pitchFamily="34" charset="-122"/>
-                <a:cs typeface="Calibri" pitchFamily="34" charset="-120"/>
-              </a:rPr>
-              <a:t>Activate</a:t>
-            </a:r>
-            <a:endParaRPr lang="en-US" sz="1600" dirty="0"/>
-          </a:p>
-        </p:txBody>
-      </p:sp>
-      <p:sp>
-        <p:nvSpPr>
-          <p:cNvPr id="22" name="Shape 20"/>
-          <p:cNvSpPr/>
-          <p:nvPr/>
-        </p:nvSpPr>
-        <p:spPr>
-          <a:xfrm>
-            <a:off x="6775704" y="3108960"/>
-            <a:ext cx="1280160" cy="310896"/>
-          </a:xfrm>
-          <a:prstGeom prst="roundRect">
-            <a:avLst>
-              <a:gd name="adj" fmla="val 50000"/>
-            </a:avLst>
           </a:prstGeom>
           <a:solidFill>
             <a:srgbClr val="EE9455"/>
@@ -5871,14 +6342,14 @@
       </p:sp>
       <p:sp>
         <p:nvSpPr>
-          <p:cNvPr id="23" name="Text 21"/>
-          <p:cNvSpPr/>
-          <p:nvPr/>
-        </p:nvSpPr>
-        <p:spPr>
-          <a:xfrm>
-            <a:off x="6775704" y="3108960"/>
-            <a:ext cx="1280160" cy="310896"/>
+          <p:cNvPr id="16" name="Text 14"/>
+          <p:cNvSpPr/>
+          <p:nvPr/>
+        </p:nvSpPr>
+        <p:spPr>
+          <a:xfrm>
+            <a:off x="749808" y="4114800"/>
+            <a:ext cx="457200" cy="457200"/>
           </a:xfrm>
           <a:prstGeom prst="rect">
             <a:avLst/>
@@ -5894,7 +6365,7 @@
               <a:buNone/>
             </a:pPr>
             <a:r>
-              <a:rPr lang="en-US" sz="1000" b="1" dirty="0">
+              <a:rPr lang="en-US" sz="1500" b="1" dirty="0">
                 <a:solidFill>
                   <a:srgbClr val="FFFFFF"/>
                 </a:solidFill>
@@ -5902,22 +6373,61 @@
                 <a:ea typeface="Calibri" pitchFamily="34" charset="-122"/>
                 <a:cs typeface="Calibri" pitchFamily="34" charset="-120"/>
               </a:rPr>
-              <a:t>Wk 4–8</a:t>
-            </a:r>
-            <a:endParaRPr lang="en-US" sz="1000" dirty="0"/>
-          </a:p>
-        </p:txBody>
-      </p:sp>
-      <p:sp>
-        <p:nvSpPr>
-          <p:cNvPr id="24" name="Text 22"/>
-          <p:cNvSpPr/>
-          <p:nvPr/>
-        </p:nvSpPr>
-        <p:spPr>
-          <a:xfrm>
-            <a:off x="6291072" y="3611880"/>
-            <a:ext cx="2249424" cy="1371600"/>
+              <a:t>✓</a:t>
+            </a:r>
+            <a:endParaRPr lang="en-US" sz="1500" dirty="0"/>
+          </a:p>
+        </p:txBody>
+      </p:sp>
+      <p:sp>
+        <p:nvSpPr>
+          <p:cNvPr id="17" name="Text 15"/>
+          <p:cNvSpPr/>
+          <p:nvPr/>
+        </p:nvSpPr>
+        <p:spPr>
+          <a:xfrm>
+            <a:off x="1371600" y="4041648"/>
+            <a:ext cx="10104120" cy="310896"/>
+          </a:xfrm>
+          <a:prstGeom prst="rect">
+            <a:avLst/>
+          </a:prstGeom>
+          <a:noFill/>
+          <a:ln/>
+        </p:spPr>
+        <p:txBody>
+          <a:bodyPr wrap="square" lIns="0" tIns="0" rIns="0" bIns="0" rtlCol="0" anchor="ctr"/>
+          <a:lstStyle/>
+          <a:p>
+            <a:pPr indent="0" marL="0">
+              <a:buNone/>
+            </a:pPr>
+            <a:r>
+              <a:rPr lang="en-US" sz="1400" b="1" dirty="0">
+                <a:solidFill>
+                  <a:srgbClr val="1D2621"/>
+                </a:solidFill>
+                <a:latin typeface="Calibri" pitchFamily="34" charset="0"/>
+                <a:ea typeface="Calibri" pitchFamily="34" charset="-122"/>
+                <a:cs typeface="Calibri" pitchFamily="34" charset="-120"/>
+              </a:rPr>
+              <a:t>Resource uploads</a:t>
+            </a:r>
+            <a:endParaRPr lang="en-US" sz="1400" dirty="0"/>
+          </a:p>
+        </p:txBody>
+      </p:sp>
+      <p:sp>
+        <p:nvSpPr>
+          <p:cNvPr id="18" name="Text 16"/>
+          <p:cNvSpPr/>
+          <p:nvPr/>
+        </p:nvSpPr>
+        <p:spPr>
+          <a:xfrm>
+            <a:off x="1371600" y="4352544"/>
+            <a:ext cx="10104120" cy="502920"/>
           </a:xfrm>
           <a:prstGeom prst="rect">
             <a:avLst/>
@@ -5929,7 +6439,7 @@
           <a:bodyPr wrap="square" lIns="0" tIns="0" rIns="0" bIns="0" rtlCol="0" anchor="t"/>
           <a:lstStyle/>
           <a:p>
-            <a:pPr algn="ctr" indent="0" marL="0">
+            <a:pPr indent="0" marL="0">
               <a:buNone/>
             </a:pPr>
             <a:r>
@@ -5941,7 +6451,7 @@
                 <a:ea typeface="Calibri" pitchFamily="34" charset="-122"/>
                 <a:cs typeface="Calibri" pitchFamily="34" charset="-120"/>
               </a:rPr>
-              <a:t>Launch event, petition drives, first convenings</a:t>
+              <a:t>Ask each partner for one real resource in the first fortnight</a:t>
             </a:r>
             <a:endParaRPr lang="en-US" sz="1150" dirty="0"/>
           </a:p>
@@ -5949,22 +6459,22 @@
       </p:sp>
       <p:sp>
         <p:nvSpPr>
-          <p:cNvPr id="25" name="Shape 23"/>
-          <p:cNvSpPr/>
-          <p:nvPr/>
-        </p:nvSpPr>
-        <p:spPr>
-          <a:xfrm>
-            <a:off x="8860536" y="1737360"/>
-            <a:ext cx="2651760" cy="3383280"/>
+          <p:cNvPr id="19" name="Shape 17"/>
+          <p:cNvSpPr/>
+          <p:nvPr/>
+        </p:nvSpPr>
+        <p:spPr>
+          <a:xfrm>
+            <a:off x="548640" y="5065776"/>
+            <a:ext cx="11064240" cy="1051560"/>
           </a:xfrm>
           <a:prstGeom prst="roundRect">
             <a:avLst>
-              <a:gd name="adj" fmla="val 2759"/>
+              <a:gd name="adj" fmla="val 6957"/>
             </a:avLst>
           </a:prstGeom>
           <a:solidFill>
-            <a:srgbClr val="FFFFFF"/>
+            <a:srgbClr val="F1F5F3"/>
           </a:solidFill>
           <a:ln w="9525">
             <a:solidFill>
@@ -5983,117 +6493,17 @@
       </p:sp>
       <p:sp>
         <p:nvSpPr>
-          <p:cNvPr id="26" name="Shape 24"/>
-          <p:cNvSpPr/>
-          <p:nvPr/>
-        </p:nvSpPr>
-        <p:spPr>
-          <a:xfrm>
-            <a:off x="9866376" y="1965960"/>
-            <a:ext cx="640080" cy="640080"/>
+          <p:cNvPr id="20" name="Shape 18"/>
+          <p:cNvSpPr/>
+          <p:nvPr/>
+        </p:nvSpPr>
+        <p:spPr>
+          <a:xfrm>
+            <a:off x="749808" y="5285232"/>
+            <a:ext cx="457200" cy="457200"/>
           </a:xfrm>
           <a:prstGeom prst="ellipse">
             <a:avLst/>
-          </a:prstGeom>
-          <a:solidFill>
-            <a:srgbClr val="1B6B4A"/>
-          </a:solidFill>
-          <a:ln/>
-        </p:spPr>
-      </p:sp>
-      <p:sp>
-        <p:nvSpPr>
-          <p:cNvPr id="27" name="Text 25"/>
-          <p:cNvSpPr/>
-          <p:nvPr/>
-        </p:nvSpPr>
-        <p:spPr>
-          <a:xfrm>
-            <a:off x="9866376" y="1965960"/>
-            <a:ext cx="640080" cy="640080"/>
-          </a:xfrm>
-          <a:prstGeom prst="rect">
-            <a:avLst/>
-          </a:prstGeom>
-          <a:noFill/>
-          <a:ln/>
-        </p:spPr>
-        <p:txBody>
-          <a:bodyPr wrap="square" lIns="0" tIns="0" rIns="0" bIns="0" rtlCol="0" anchor="ctr"/>
-          <a:lstStyle/>
-          <a:p>
-            <a:pPr algn="ctr" indent="0" marL="0">
-              <a:buNone/>
-            </a:pPr>
-            <a:r>
-              <a:rPr lang="en-US" sz="2000" b="1" dirty="0">
-                <a:solidFill>
-                  <a:srgbClr val="FFFFFF"/>
-                </a:solidFill>
-                <a:latin typeface="Calibri" pitchFamily="34" charset="0"/>
-                <a:ea typeface="Calibri" pitchFamily="34" charset="-122"/>
-                <a:cs typeface="Calibri" pitchFamily="34" charset="-120"/>
-              </a:rPr>
-              <a:t>4</a:t>
-            </a:r>
-            <a:endParaRPr lang="en-US" sz="2000" dirty="0"/>
-          </a:p>
-        </p:txBody>
-      </p:sp>
-      <p:sp>
-        <p:nvSpPr>
-          <p:cNvPr id="28" name="Text 26"/>
-          <p:cNvSpPr/>
-          <p:nvPr/>
-        </p:nvSpPr>
-        <p:spPr>
-          <a:xfrm>
-            <a:off x="8997696" y="2697480"/>
-            <a:ext cx="2377440" cy="365760"/>
-          </a:xfrm>
-          <a:prstGeom prst="rect">
-            <a:avLst/>
-          </a:prstGeom>
-          <a:noFill/>
-          <a:ln/>
-        </p:spPr>
-        <p:txBody>
-          <a:bodyPr wrap="square" lIns="0" tIns="0" rIns="0" bIns="0" rtlCol="0" anchor="ctr"/>
-          <a:lstStyle/>
-          <a:p>
-            <a:pPr algn="ctr" indent="0" marL="0">
-              <a:buNone/>
-            </a:pPr>
-            <a:r>
-              <a:rPr lang="en-US" sz="1600" b="1" dirty="0">
-                <a:solidFill>
-                  <a:srgbClr val="1D2621"/>
-                </a:solidFill>
-                <a:latin typeface="Calibri" pitchFamily="34" charset="0"/>
-                <a:ea typeface="Calibri" pitchFamily="34" charset="-122"/>
-                <a:cs typeface="Calibri" pitchFamily="34" charset="-120"/>
-              </a:rPr>
-              <a:t>Sustain</a:t>
-            </a:r>
-            <a:endParaRPr lang="en-US" sz="1600" dirty="0"/>
-          </a:p>
-        </p:txBody>
-      </p:sp>
-      <p:sp>
-        <p:nvSpPr>
-          <p:cNvPr id="29" name="Shape 27"/>
-          <p:cNvSpPr/>
-          <p:nvPr/>
-        </p:nvSpPr>
-        <p:spPr>
-          <a:xfrm>
-            <a:off x="9546336" y="3108960"/>
-            <a:ext cx="1280160" cy="310896"/>
-          </a:xfrm>
-          <a:prstGeom prst="roundRect">
-            <a:avLst>
-              <a:gd name="adj" fmla="val 50000"/>
-            </a:avLst>
           </a:prstGeom>
           <a:solidFill>
             <a:srgbClr val="EE9455"/>
@@ -6103,14 +6513,14 @@
       </p:sp>
       <p:sp>
         <p:nvSpPr>
-          <p:cNvPr id="30" name="Text 28"/>
-          <p:cNvSpPr/>
-          <p:nvPr/>
-        </p:nvSpPr>
-        <p:spPr>
-          <a:xfrm>
-            <a:off x="9546336" y="3108960"/>
-            <a:ext cx="1280160" cy="310896"/>
+          <p:cNvPr id="21" name="Text 19"/>
+          <p:cNvSpPr/>
+          <p:nvPr/>
+        </p:nvSpPr>
+        <p:spPr>
+          <a:xfrm>
+            <a:off x="749808" y="5285232"/>
+            <a:ext cx="457200" cy="457200"/>
           </a:xfrm>
           <a:prstGeom prst="rect">
             <a:avLst/>
@@ -6126,7 +6536,7 @@
               <a:buNone/>
             </a:pPr>
             <a:r>
-              <a:rPr lang="en-US" sz="1000" b="1" dirty="0">
+              <a:rPr lang="en-US" sz="1500" b="1" dirty="0">
                 <a:solidFill>
                   <a:srgbClr val="FFFFFF"/>
                 </a:solidFill>
@@ -6134,22 +6544,61 @@
                 <a:ea typeface="Calibri" pitchFamily="34" charset="-122"/>
                 <a:cs typeface="Calibri" pitchFamily="34" charset="-120"/>
               </a:rPr>
-              <a:t>Wk 8+</a:t>
-            </a:r>
-            <a:endParaRPr lang="en-US" sz="1000" dirty="0"/>
-          </a:p>
-        </p:txBody>
-      </p:sp>
-      <p:sp>
-        <p:nvSpPr>
-          <p:cNvPr id="31" name="Text 29"/>
-          <p:cNvSpPr/>
-          <p:nvPr/>
-        </p:nvSpPr>
-        <p:spPr>
-          <a:xfrm>
-            <a:off x="9061704" y="3611880"/>
-            <a:ext cx="2249424" cy="1371600"/>
+              <a:t>✓</a:t>
+            </a:r>
+            <a:endParaRPr lang="en-US" sz="1500" dirty="0"/>
+          </a:p>
+        </p:txBody>
+      </p:sp>
+      <p:sp>
+        <p:nvSpPr>
+          <p:cNvPr id="22" name="Text 20"/>
+          <p:cNvSpPr/>
+          <p:nvPr/>
+        </p:nvSpPr>
+        <p:spPr>
+          <a:xfrm>
+            <a:off x="1371600" y="5212080"/>
+            <a:ext cx="10104120" cy="310896"/>
+          </a:xfrm>
+          <a:prstGeom prst="rect">
+            <a:avLst/>
+          </a:prstGeom>
+          <a:noFill/>
+          <a:ln/>
+        </p:spPr>
+        <p:txBody>
+          <a:bodyPr wrap="square" lIns="0" tIns="0" rIns="0" bIns="0" rtlCol="0" anchor="ctr"/>
+          <a:lstStyle/>
+          <a:p>
+            <a:pPr indent="0" marL="0">
+              <a:buNone/>
+            </a:pPr>
+            <a:r>
+              <a:rPr lang="en-US" sz="1400" b="1" dirty="0">
+                <a:solidFill>
+                  <a:srgbClr val="1D2621"/>
+                </a:solidFill>
+                <a:latin typeface="Calibri" pitchFamily="34" charset="0"/>
+                <a:ea typeface="Calibri" pitchFamily="34" charset="-122"/>
+                <a:cs typeface="Calibri" pitchFamily="34" charset="-120"/>
+              </a:rPr>
+              <a:t>County documentation</a:t>
+            </a:r>
+            <a:endParaRPr lang="en-US" sz="1400" dirty="0"/>
+          </a:p>
+        </p:txBody>
+      </p:sp>
+      <p:sp>
+        <p:nvSpPr>
+          <p:cNvPr id="23" name="Text 21"/>
+          <p:cNvSpPr/>
+          <p:nvPr/>
+        </p:nvSpPr>
+        <p:spPr>
+          <a:xfrm>
+            <a:off x="1371600" y="5522976"/>
+            <a:ext cx="10104120" cy="502920"/>
           </a:xfrm>
           <a:prstGeom prst="rect">
             <a:avLst/>
@@ -6161,7 +6610,7 @@
           <a:bodyPr wrap="square" lIns="0" tIns="0" rIns="0" bIns="0" rtlCol="0" anchor="t"/>
           <a:lstStyle/>
           <a:p>
-            <a:pPr algn="ctr" indent="0" marL="0">
+            <a:pPr indent="0" marL="0">
               <a:buNone/>
             </a:pPr>
             <a:r>
@@ -6173,7 +6622,7 @@
                 <a:ea typeface="Calibri" pitchFamily="34" charset="-122"/>
                 <a:cs typeface="Calibri" pitchFamily="34" charset="-120"/>
               </a:rPr>
-              <a:t>Content cadence, spotlights, quarterly gap review</a:t>
+              <a:t>Turn field activity into map entries and voices</a:t>
             </a:r>
             <a:endParaRPr lang="en-US" sz="1150" dirty="0"/>
           </a:p>
@@ -6181,7 +6630,7 @@
       </p:sp>
       <p:sp>
         <p:nvSpPr>
-          <p:cNvPr id="32" name="Text 30"/>
+          <p:cNvPr id="24" name="Text 22"/>
           <p:cNvSpPr/>
           <p:nvPr/>
         </p:nvSpPr>
@@ -6283,7 +6732,7 @@
                 <a:ea typeface="Calibri" pitchFamily="34" charset="-122"/>
                 <a:cs typeface="Calibri" pitchFamily="34" charset="-120"/>
               </a:rPr>
-              <a:t>THE LAUNCH EVENT</a:t>
+              <a:t>THE ROLLOUT</a:t>
             </a:r>
             <a:endParaRPr lang="en-US" sz="1200" dirty="0"/>
           </a:p>
@@ -6322,7 +6771,7 @@
                 <a:ea typeface="Cambria" pitchFamily="34" charset="-122"/>
                 <a:cs typeface="Cambria" pitchFamily="34" charset="-120"/>
               </a:rPr>
-              <a:t>A breakfast roundtable, ~30 seats</a:t>
+              <a:t>Four phases, twelve weeks</a:t>
             </a:r>
             <a:endParaRPr lang="en-US" sz="3000" dirty="0"/>
           </a:p>
@@ -6336,16 +6785,16 @@
         </p:nvSpPr>
         <p:spPr>
           <a:xfrm>
-            <a:off x="548640" y="1600200"/>
-            <a:ext cx="5440680" cy="4114800"/>
+            <a:off x="548640" y="1737360"/>
+            <a:ext cx="2651760" cy="3383280"/>
           </a:xfrm>
           <a:prstGeom prst="roundRect">
             <a:avLst>
-              <a:gd name="adj" fmla="val 1778"/>
+              <a:gd name="adj" fmla="val 2759"/>
             </a:avLst>
           </a:prstGeom>
           <a:solidFill>
-            <a:srgbClr val="F1F5F3"/>
+            <a:srgbClr val="FFFFFF"/>
           </a:solidFill>
           <a:ln w="9525">
             <a:solidFill>
@@ -6364,14 +6813,34 @@
       </p:sp>
       <p:sp>
         <p:nvSpPr>
-          <p:cNvPr id="5" name="Text 3"/>
-          <p:cNvSpPr/>
-          <p:nvPr/>
-        </p:nvSpPr>
-        <p:spPr>
-          <a:xfrm>
-            <a:off x="822960" y="1828800"/>
-            <a:ext cx="4846320" cy="365760"/>
+          <p:cNvPr id="5" name="Shape 3"/>
+          <p:cNvSpPr/>
+          <p:nvPr/>
+        </p:nvSpPr>
+        <p:spPr>
+          <a:xfrm>
+            <a:off x="1554480" y="1965960"/>
+            <a:ext cx="640080" cy="640080"/>
+          </a:xfrm>
+          <a:prstGeom prst="ellipse">
+            <a:avLst/>
+          </a:prstGeom>
+          <a:solidFill>
+            <a:srgbClr val="1B6B4A"/>
+          </a:solidFill>
+          <a:ln/>
+        </p:spPr>
+      </p:sp>
+      <p:sp>
+        <p:nvSpPr>
+          <p:cNvPr id="6" name="Text 4"/>
+          <p:cNvSpPr/>
+          <p:nvPr/>
+        </p:nvSpPr>
+        <p:spPr>
+          <a:xfrm>
+            <a:off x="1554480" y="1965960"/>
+            <a:ext cx="640080" cy="640080"/>
           </a:xfrm>
           <a:prstGeom prst="rect">
             <a:avLst/>
@@ -6383,34 +6852,34 @@
           <a:bodyPr wrap="square" lIns="0" tIns="0" rIns="0" bIns="0" rtlCol="0" anchor="ctr"/>
           <a:lstStyle/>
           <a:p>
-            <a:pPr indent="0" marL="0">
-              <a:buNone/>
-            </a:pPr>
-            <a:r>
-              <a:rPr lang="en-US" sz="1500" b="1" dirty="0">
-                <a:solidFill>
-                  <a:srgbClr val="1B6B4A"/>
-                </a:solidFill>
-                <a:latin typeface="Calibri" pitchFamily="34" charset="0"/>
-                <a:ea typeface="Calibri" pitchFamily="34" charset="-122"/>
-                <a:cs typeface="Calibri" pitchFamily="34" charset="-120"/>
-              </a:rPr>
-              <a:t>Who's in the room</a:t>
-            </a:r>
-            <a:endParaRPr lang="en-US" sz="1500" dirty="0"/>
-          </a:p>
-        </p:txBody>
-      </p:sp>
-      <p:sp>
-        <p:nvSpPr>
-          <p:cNvPr id="6" name="Text 4"/>
-          <p:cNvSpPr/>
-          <p:nvPr/>
-        </p:nvSpPr>
-        <p:spPr>
-          <a:xfrm>
-            <a:off x="914400" y="2240280"/>
-            <a:ext cx="4754880" cy="1828800"/>
+            <a:pPr algn="ctr" indent="0" marL="0">
+              <a:buNone/>
+            </a:pPr>
+            <a:r>
+              <a:rPr lang="en-US" sz="2000" b="1" dirty="0">
+                <a:solidFill>
+                  <a:srgbClr val="FFFFFF"/>
+                </a:solidFill>
+                <a:latin typeface="Calibri" pitchFamily="34" charset="0"/>
+                <a:ea typeface="Calibri" pitchFamily="34" charset="-122"/>
+                <a:cs typeface="Calibri" pitchFamily="34" charset="-120"/>
+              </a:rPr>
+              <a:t>1</a:t>
+            </a:r>
+            <a:endParaRPr lang="en-US" sz="2000" dirty="0"/>
+          </a:p>
+        </p:txBody>
+      </p:sp>
+      <p:sp>
+        <p:nvSpPr>
+          <p:cNvPr id="7" name="Text 5"/>
+          <p:cNvSpPr/>
+          <p:nvPr/>
+        </p:nvSpPr>
+        <p:spPr>
+          <a:xfrm>
+            <a:off x="685800" y="2697480"/>
+            <a:ext cx="2377440" cy="365760"/>
           </a:xfrm>
           <a:prstGeom prst="rect">
             <a:avLst/>
@@ -6422,15 +6891,11 @@
           <a:bodyPr wrap="square" lIns="0" tIns="0" rIns="0" bIns="0" rtlCol="0" anchor="ctr"/>
           <a:lstStyle/>
           <a:p>
-            <a:pPr marL="203200" indent="-203200">
-              <a:spcAft>
-                <a:spcPts val="800"/>
-              </a:spcAft>
-              <a:buSzPct val="100000"/>
-              <a:buChar char="•"/>
-            </a:pPr>
-            <a:r>
-              <a:rPr lang="en-US" sz="1300" dirty="0">
+            <a:pPr algn="ctr" indent="0" marL="0">
+              <a:buNone/>
+            </a:pPr>
+            <a:r>
+              <a:rPr lang="en-US" sz="1600" b="1" dirty="0">
                 <a:solidFill>
                   <a:srgbClr val="1D2621"/>
                 </a:solidFill>
@@ -6438,168 +6903,130 @@
                 <a:ea typeface="Calibri" pitchFamily="34" charset="-122"/>
                 <a:cs typeface="Calibri" pitchFamily="34" charset="-120"/>
               </a:rPr>
-              <a:t>~12 partner organisations (coalition + prospective)</a:t>
-            </a:r>
-            <a:endParaRPr lang="en-US" sz="1300" dirty="0"/>
-          </a:p>
-          <a:p>
-            <a:pPr marL="203200" indent="-203200">
-              <a:spcAft>
-                <a:spcPts val="800"/>
-              </a:spcAft>
-              <a:buSzPct val="100000"/>
-              <a:buChar char="•"/>
-            </a:pPr>
-            <a:r>
-              <a:rPr lang="en-US" sz="1300" dirty="0">
-                <a:solidFill>
-                  <a:srgbClr val="1D2621"/>
-                </a:solidFill>
-                <a:latin typeface="Calibri" pitchFamily="34" charset="0"/>
-                <a:ea typeface="Calibri" pitchFamily="34" charset="-122"/>
-                <a:cs typeface="Calibri" pitchFamily="34" charset="-120"/>
-              </a:rPr>
-              <a:t>~8 funders &amp; policymakers</a:t>
-            </a:r>
-            <a:endParaRPr lang="en-US" sz="1300" dirty="0"/>
-          </a:p>
-          <a:p>
-            <a:pPr marL="203200" indent="-203200">
-              <a:spcAft>
-                <a:spcPts val="800"/>
-              </a:spcAft>
-              <a:buSzPct val="100000"/>
-              <a:buChar char="•"/>
-            </a:pPr>
-            <a:r>
-              <a:rPr lang="en-US" sz="1300" dirty="0">
-                <a:solidFill>
-                  <a:srgbClr val="1D2621"/>
-                </a:solidFill>
-                <a:latin typeface="Calibri" pitchFamily="34" charset="0"/>
-                <a:ea typeface="Calibri" pitchFamily="34" charset="-122"/>
-                <a:cs typeface="Calibri" pitchFamily="34" charset="-120"/>
-              </a:rPr>
-              <a:t>~7 journalists / editors</a:t>
-            </a:r>
-            <a:endParaRPr lang="en-US" sz="1300" dirty="0"/>
-          </a:p>
-          <a:p>
-            <a:pPr marL="203200" indent="-203200">
-              <a:buSzPct val="100000"/>
-              <a:buChar char="•"/>
-            </a:pPr>
-            <a:r>
-              <a:rPr lang="en-US" sz="1300" dirty="0">
-                <a:solidFill>
-                  <a:srgbClr val="1D2621"/>
-                </a:solidFill>
-                <a:latin typeface="Calibri" pitchFamily="34" charset="0"/>
-                <a:ea typeface="Calibri" pitchFamily="34" charset="-122"/>
-                <a:cs typeface="Calibri" pitchFamily="34" charset="-120"/>
-              </a:rPr>
-              <a:t>~3 coalition hosts / demo leads</a:t>
-            </a:r>
-            <a:endParaRPr lang="en-US" sz="1300" dirty="0"/>
-          </a:p>
-        </p:txBody>
-      </p:sp>
-      <p:sp>
-        <p:nvSpPr>
-          <p:cNvPr id="7" name="Text 5"/>
-          <p:cNvSpPr/>
-          <p:nvPr/>
-        </p:nvSpPr>
-        <p:spPr>
-          <a:xfrm>
-            <a:off x="822960" y="4160520"/>
-            <a:ext cx="4846320" cy="365760"/>
-          </a:xfrm>
-          <a:prstGeom prst="rect">
-            <a:avLst/>
-          </a:prstGeom>
-          <a:noFill/>
-          <a:ln/>
-        </p:spPr>
-        <p:txBody>
-          <a:bodyPr wrap="square" lIns="0" tIns="0" rIns="0" bIns="0" rtlCol="0" anchor="ctr"/>
-          <a:lstStyle/>
-          <a:p>
-            <a:pPr indent="0" marL="0">
-              <a:buNone/>
-            </a:pPr>
-            <a:r>
-              <a:rPr lang="en-US" sz="1500" b="1" dirty="0">
-                <a:solidFill>
-                  <a:srgbClr val="1B6B4A"/>
-                </a:solidFill>
-                <a:latin typeface="Calibri" pitchFamily="34" charset="0"/>
-                <a:ea typeface="Calibri" pitchFamily="34" charset="-122"/>
-                <a:cs typeface="Calibri" pitchFamily="34" charset="-120"/>
-              </a:rPr>
-              <a:t>Format · 3 hours</a:t>
-            </a:r>
-            <a:endParaRPr lang="en-US" sz="1500" dirty="0"/>
-          </a:p>
-        </p:txBody>
-      </p:sp>
-      <p:sp>
-        <p:nvSpPr>
-          <p:cNvPr id="8" name="Text 6"/>
-          <p:cNvSpPr/>
-          <p:nvPr/>
-        </p:nvSpPr>
-        <p:spPr>
-          <a:xfrm>
-            <a:off x="914400" y="4526280"/>
-            <a:ext cx="4892040" cy="1097280"/>
-          </a:xfrm>
-          <a:prstGeom prst="rect">
-            <a:avLst/>
-          </a:prstGeom>
-          <a:noFill/>
-          <a:ln/>
-        </p:spPr>
-        <p:txBody>
-          <a:bodyPr wrap="square" lIns="0" tIns="0" rIns="0" bIns="0" rtlCol="0" anchor="t"/>
-          <a:lstStyle/>
-          <a:p>
-            <a:pPr indent="0" marL="0">
-              <a:buNone/>
-            </a:pPr>
-            <a:r>
-              <a:rPr lang="en-US" sz="1250" dirty="0">
-                <a:solidFill>
-                  <a:srgbClr val="5D6B63"/>
-                </a:solidFill>
-                <a:latin typeface="Calibri" pitchFamily="34" charset="0"/>
-                <a:ea typeface="Calibri" pitchFamily="34" charset="-122"/>
-                <a:cs typeface="Calibri" pitchFamily="34" charset="-120"/>
-              </a:rPr>
-              <a:t>Breakfast → 15-min live demo → moderated roundtable on a live front (e.g. Siaya nuclear) → partner sign-ups &amp; press Q&amp;A.</a:t>
-            </a:r>
-            <a:endParaRPr lang="en-US" sz="1250" dirty="0"/>
-          </a:p>
-        </p:txBody>
-      </p:sp>
-      <p:sp>
-        <p:nvSpPr>
-          <p:cNvPr id="9" name="Shape 7"/>
-          <p:cNvSpPr/>
-          <p:nvPr/>
-        </p:nvSpPr>
-        <p:spPr>
-          <a:xfrm>
-            <a:off x="6172200" y="1600200"/>
-            <a:ext cx="5440680" cy="4114800"/>
+              <a:t>Awareness</a:t>
+            </a:r>
+            <a:endParaRPr lang="en-US" sz="1600" dirty="0"/>
+          </a:p>
+        </p:txBody>
+      </p:sp>
+      <p:sp>
+        <p:nvSpPr>
+          <p:cNvPr id="8" name="Shape 6"/>
+          <p:cNvSpPr/>
+          <p:nvPr/>
+        </p:nvSpPr>
+        <p:spPr>
+          <a:xfrm>
+            <a:off x="1234440" y="3108960"/>
+            <a:ext cx="1280160" cy="310896"/>
           </a:xfrm>
           <a:prstGeom prst="roundRect">
             <a:avLst>
-              <a:gd name="adj" fmla="val 1778"/>
+              <a:gd name="adj" fmla="val 50000"/>
             </a:avLst>
           </a:prstGeom>
           <a:solidFill>
-            <a:srgbClr val="0F2A20"/>
+            <a:srgbClr val="EE9455"/>
+          </a:solidFill>
+          <a:ln/>
+        </p:spPr>
+      </p:sp>
+      <p:sp>
+        <p:nvSpPr>
+          <p:cNvPr id="9" name="Text 7"/>
+          <p:cNvSpPr/>
+          <p:nvPr/>
+        </p:nvSpPr>
+        <p:spPr>
+          <a:xfrm>
+            <a:off x="1234440" y="3108960"/>
+            <a:ext cx="1280160" cy="310896"/>
+          </a:xfrm>
+          <a:prstGeom prst="rect">
+            <a:avLst/>
+          </a:prstGeom>
+          <a:noFill/>
+          <a:ln/>
+        </p:spPr>
+        <p:txBody>
+          <a:bodyPr wrap="square" lIns="0" tIns="0" rIns="0" bIns="0" rtlCol="0" anchor="ctr"/>
+          <a:lstStyle/>
+          <a:p>
+            <a:pPr algn="ctr" indent="0" marL="0">
+              <a:buNone/>
+            </a:pPr>
+            <a:r>
+              <a:rPr lang="en-US" sz="1000" b="1" dirty="0">
+                <a:solidFill>
+                  <a:srgbClr val="FFFFFF"/>
+                </a:solidFill>
+                <a:latin typeface="Calibri" pitchFamily="34" charset="0"/>
+                <a:ea typeface="Calibri" pitchFamily="34" charset="-122"/>
+                <a:cs typeface="Calibri" pitchFamily="34" charset="-120"/>
+              </a:rPr>
+              <a:t>Wk 1–2</a:t>
+            </a:r>
+            <a:endParaRPr lang="en-US" sz="1000" dirty="0"/>
+          </a:p>
+        </p:txBody>
+      </p:sp>
+      <p:sp>
+        <p:nvSpPr>
+          <p:cNvPr id="10" name="Text 8"/>
+          <p:cNvSpPr/>
+          <p:nvPr/>
+        </p:nvSpPr>
+        <p:spPr>
+          <a:xfrm>
+            <a:off x="749808" y="3611880"/>
+            <a:ext cx="2249424" cy="1371600"/>
+          </a:xfrm>
+          <a:prstGeom prst="rect">
+            <a:avLst/>
+          </a:prstGeom>
+          <a:noFill/>
+          <a:ln/>
+        </p:spPr>
+        <p:txBody>
+          <a:bodyPr wrap="square" lIns="0" tIns="0" rIns="0" bIns="0" rtlCol="0" anchor="t"/>
+          <a:lstStyle/>
+          <a:p>
+            <a:pPr algn="ctr" indent="0" marL="0">
+              <a:buNone/>
+            </a:pPr>
+            <a:r>
+              <a:rPr lang="en-US" sz="1150" dirty="0">
+                <a:solidFill>
+                  <a:srgbClr val="5D6B63"/>
+                </a:solidFill>
+                <a:latin typeface="Calibri" pitchFamily="34" charset="0"/>
+                <a:ea typeface="Calibri" pitchFamily="34" charset="-122"/>
+                <a:cs typeface="Calibri" pitchFamily="34" charset="-120"/>
+              </a:rPr>
+              <a:t>Teasers on raia &amp; socials; press pre-brief</a:t>
+            </a:r>
+            <a:endParaRPr lang="en-US" sz="1150" dirty="0"/>
+          </a:p>
+        </p:txBody>
+      </p:sp>
+      <p:sp>
+        <p:nvSpPr>
+          <p:cNvPr id="11" name="Shape 9"/>
+          <p:cNvSpPr/>
+          <p:nvPr/>
+        </p:nvSpPr>
+        <p:spPr>
+          <a:xfrm>
+            <a:off x="3319272" y="1737360"/>
+            <a:ext cx="2651760" cy="3383280"/>
+          </a:xfrm>
+          <a:prstGeom prst="roundRect">
+            <a:avLst>
+              <a:gd name="adj" fmla="val 2759"/>
+            </a:avLst>
+          </a:prstGeom>
+          <a:solidFill>
+            <a:srgbClr val="FFFFFF"/>
           </a:solidFill>
           <a:ln w="9525">
             <a:solidFill>
@@ -6618,14 +7045,34 @@
       </p:sp>
       <p:sp>
         <p:nvSpPr>
-          <p:cNvPr id="10" name="Text 8"/>
-          <p:cNvSpPr/>
-          <p:nvPr/>
-        </p:nvSpPr>
-        <p:spPr>
-          <a:xfrm>
-            <a:off x="6446520" y="1828800"/>
-            <a:ext cx="4846320" cy="365760"/>
+          <p:cNvPr id="12" name="Shape 10"/>
+          <p:cNvSpPr/>
+          <p:nvPr/>
+        </p:nvSpPr>
+        <p:spPr>
+          <a:xfrm>
+            <a:off x="4325112" y="1965960"/>
+            <a:ext cx="640080" cy="640080"/>
+          </a:xfrm>
+          <a:prstGeom prst="ellipse">
+            <a:avLst/>
+          </a:prstGeom>
+          <a:solidFill>
+            <a:srgbClr val="1B6B4A"/>
+          </a:solidFill>
+          <a:ln/>
+        </p:spPr>
+      </p:sp>
+      <p:sp>
+        <p:nvSpPr>
+          <p:cNvPr id="13" name="Text 11"/>
+          <p:cNvSpPr/>
+          <p:nvPr/>
+        </p:nvSpPr>
+        <p:spPr>
+          <a:xfrm>
+            <a:off x="4325112" y="1965960"/>
+            <a:ext cx="640080" cy="640080"/>
           </a:xfrm>
           <a:prstGeom prst="rect">
             <a:avLst/>
@@ -6637,34 +7084,34 @@
           <a:bodyPr wrap="square" lIns="0" tIns="0" rIns="0" bIns="0" rtlCol="0" anchor="ctr"/>
           <a:lstStyle/>
           <a:p>
-            <a:pPr indent="0" marL="0">
-              <a:buNone/>
-            </a:pPr>
-            <a:r>
-              <a:rPr lang="en-US" sz="1500" b="1" dirty="0">
-                <a:solidFill>
-                  <a:srgbClr val="62C79B"/>
-                </a:solidFill>
-                <a:latin typeface="Calibri" pitchFamily="34" charset="0"/>
-                <a:ea typeface="Calibri" pitchFamily="34" charset="-122"/>
-                <a:cs typeface="Calibri" pitchFamily="34" charset="-120"/>
-              </a:rPr>
-              <a:t>Why in person, once</a:t>
-            </a:r>
-            <a:endParaRPr lang="en-US" sz="1500" dirty="0"/>
-          </a:p>
-        </p:txBody>
-      </p:sp>
-      <p:sp>
-        <p:nvSpPr>
-          <p:cNvPr id="11" name="Text 9"/>
-          <p:cNvSpPr/>
-          <p:nvPr/>
-        </p:nvSpPr>
-        <p:spPr>
-          <a:xfrm>
-            <a:off x="6537960" y="2240280"/>
-            <a:ext cx="4937760" cy="3108960"/>
+            <a:pPr algn="ctr" indent="0" marL="0">
+              <a:buNone/>
+            </a:pPr>
+            <a:r>
+              <a:rPr lang="en-US" sz="2000" b="1" dirty="0">
+                <a:solidFill>
+                  <a:srgbClr val="FFFFFF"/>
+                </a:solidFill>
+                <a:latin typeface="Calibri" pitchFamily="34" charset="0"/>
+                <a:ea typeface="Calibri" pitchFamily="34" charset="-122"/>
+                <a:cs typeface="Calibri" pitchFamily="34" charset="-120"/>
+              </a:rPr>
+              <a:t>2</a:t>
+            </a:r>
+            <a:endParaRPr lang="en-US" sz="2000" dirty="0"/>
+          </a:p>
+        </p:txBody>
+      </p:sp>
+      <p:sp>
+        <p:nvSpPr>
+          <p:cNvPr id="14" name="Text 12"/>
+          <p:cNvSpPr/>
+          <p:nvPr/>
+        </p:nvSpPr>
+        <p:spPr>
+          <a:xfrm>
+            <a:off x="3456432" y="2697480"/>
+            <a:ext cx="2377440" cy="365760"/>
           </a:xfrm>
           <a:prstGeom prst="rect">
             <a:avLst/>
@@ -6676,91 +7123,591 @@
           <a:bodyPr wrap="square" lIns="0" tIns="0" rIns="0" bIns="0" rtlCol="0" anchor="ctr"/>
           <a:lstStyle/>
           <a:p>
-            <a:pPr marL="203200" indent="-203200">
-              <a:spcAft>
-                <a:spcPts val="900"/>
-              </a:spcAft>
-              <a:buSzPct val="100000"/>
-              <a:buChar char="•"/>
-            </a:pPr>
-            <a:r>
-              <a:rPr lang="en-US" sz="1300" dirty="0">
-                <a:solidFill>
-                  <a:srgbClr val="E7F0EA"/>
-                </a:solidFill>
-                <a:latin typeface="Calibri" pitchFamily="34" charset="0"/>
-                <a:ea typeface="Calibri" pitchFamily="34" charset="-122"/>
-                <a:cs typeface="Calibri" pitchFamily="34" charset="-120"/>
-              </a:rPr>
-              <a:t>Press coverage that seeds the digital campaign</a:t>
-            </a:r>
-            <a:endParaRPr lang="en-US" sz="1300" dirty="0"/>
-          </a:p>
-          <a:p>
-            <a:pPr marL="203200" indent="-203200">
-              <a:spcAft>
-                <a:spcPts val="900"/>
-              </a:spcAft>
-              <a:buSzPct val="100000"/>
-              <a:buChar char="•"/>
-            </a:pPr>
-            <a:r>
-              <a:rPr lang="en-US" sz="1300" dirty="0">
-                <a:solidFill>
-                  <a:srgbClr val="E7F0EA"/>
-                </a:solidFill>
-                <a:latin typeface="Calibri" pitchFamily="34" charset="0"/>
-                <a:ea typeface="Calibri" pitchFamily="34" charset="-122"/>
-                <a:cs typeface="Calibri" pitchFamily="34" charset="-120"/>
-              </a:rPr>
-              <a:t>Face-to-face trust with funders &amp; policymakers</a:t>
-            </a:r>
-            <a:endParaRPr lang="en-US" sz="1300" dirty="0"/>
-          </a:p>
-          <a:p>
-            <a:pPr marL="203200" indent="-203200">
-              <a:spcAft>
-                <a:spcPts val="900"/>
-              </a:spcAft>
-              <a:buSzPct val="100000"/>
-              <a:buChar char="•"/>
-            </a:pPr>
-            <a:r>
-              <a:rPr lang="en-US" sz="1300" dirty="0">
-                <a:solidFill>
-                  <a:srgbClr val="E7F0EA"/>
-                </a:solidFill>
-                <a:latin typeface="Calibri" pitchFamily="34" charset="0"/>
-                <a:ea typeface="Calibri" pitchFamily="34" charset="-122"/>
-                <a:cs typeface="Calibri" pitchFamily="34" charset="-120"/>
-              </a:rPr>
-              <a:t>A content bank — photos &amp; clips — for weeks of posts</a:t>
-            </a:r>
-            <a:endParaRPr lang="en-US" sz="1300" dirty="0"/>
-          </a:p>
-          <a:p>
-            <a:pPr marL="203200" indent="-203200">
-              <a:buSzPct val="100000"/>
-              <a:buChar char="•"/>
-            </a:pPr>
-            <a:r>
-              <a:rPr lang="en-US" sz="1300" dirty="0">
-                <a:solidFill>
-                  <a:srgbClr val="E7F0EA"/>
-                </a:solidFill>
-                <a:latin typeface="Calibri" pitchFamily="34" charset="0"/>
-                <a:ea typeface="Calibri" pitchFamily="34" charset="-122"/>
-                <a:cs typeface="Calibri" pitchFamily="34" charset="-120"/>
-              </a:rPr>
-              <a:t>Live sign-ups: leave onboarded, not just interested</a:t>
-            </a:r>
-            <a:endParaRPr lang="en-US" sz="1300" dirty="0"/>
-          </a:p>
-        </p:txBody>
-      </p:sp>
-      <p:sp>
-        <p:nvSpPr>
-          <p:cNvPr id="12" name="Text 10"/>
+            <a:pPr algn="ctr" indent="0" marL="0">
+              <a:buNone/>
+            </a:pPr>
+            <a:r>
+              <a:rPr lang="en-US" sz="1600" b="1" dirty="0">
+                <a:solidFill>
+                  <a:srgbClr val="1D2621"/>
+                </a:solidFill>
+                <a:latin typeface="Calibri" pitchFamily="34" charset="0"/>
+                <a:ea typeface="Calibri" pitchFamily="34" charset="-122"/>
+                <a:cs typeface="Calibri" pitchFamily="34" charset="-120"/>
+              </a:rPr>
+              <a:t>Onboard</a:t>
+            </a:r>
+            <a:endParaRPr lang="en-US" sz="1600" dirty="0"/>
+          </a:p>
+        </p:txBody>
+      </p:sp>
+      <p:sp>
+        <p:nvSpPr>
+          <p:cNvPr id="15" name="Shape 13"/>
+          <p:cNvSpPr/>
+          <p:nvPr/>
+        </p:nvSpPr>
+        <p:spPr>
+          <a:xfrm>
+            <a:off x="4005072" y="3108960"/>
+            <a:ext cx="1280160" cy="310896"/>
+          </a:xfrm>
+          <a:prstGeom prst="roundRect">
+            <a:avLst>
+              <a:gd name="adj" fmla="val 50000"/>
+            </a:avLst>
+          </a:prstGeom>
+          <a:solidFill>
+            <a:srgbClr val="EE9455"/>
+          </a:solidFill>
+          <a:ln/>
+        </p:spPr>
+      </p:sp>
+      <p:sp>
+        <p:nvSpPr>
+          <p:cNvPr id="16" name="Text 14"/>
+          <p:cNvSpPr/>
+          <p:nvPr/>
+        </p:nvSpPr>
+        <p:spPr>
+          <a:xfrm>
+            <a:off x="4005072" y="3108960"/>
+            <a:ext cx="1280160" cy="310896"/>
+          </a:xfrm>
+          <a:prstGeom prst="rect">
+            <a:avLst/>
+          </a:prstGeom>
+          <a:noFill/>
+          <a:ln/>
+        </p:spPr>
+        <p:txBody>
+          <a:bodyPr wrap="square" lIns="0" tIns="0" rIns="0" bIns="0" rtlCol="0" anchor="ctr"/>
+          <a:lstStyle/>
+          <a:p>
+            <a:pPr algn="ctr" indent="0" marL="0">
+              <a:buNone/>
+            </a:pPr>
+            <a:r>
+              <a:rPr lang="en-US" sz="1000" b="1" dirty="0">
+                <a:solidFill>
+                  <a:srgbClr val="FFFFFF"/>
+                </a:solidFill>
+                <a:latin typeface="Calibri" pitchFamily="34" charset="0"/>
+                <a:ea typeface="Calibri" pitchFamily="34" charset="-122"/>
+                <a:cs typeface="Calibri" pitchFamily="34" charset="-120"/>
+              </a:rPr>
+              <a:t>Wk 2–5</a:t>
+            </a:r>
+            <a:endParaRPr lang="en-US" sz="1000" dirty="0"/>
+          </a:p>
+        </p:txBody>
+      </p:sp>
+      <p:sp>
+        <p:nvSpPr>
+          <p:cNvPr id="17" name="Text 15"/>
+          <p:cNvSpPr/>
+          <p:nvPr/>
+        </p:nvSpPr>
+        <p:spPr>
+          <a:xfrm>
+            <a:off x="3520440" y="3611880"/>
+            <a:ext cx="2249424" cy="1371600"/>
+          </a:xfrm>
+          <a:prstGeom prst="rect">
+            <a:avLst/>
+          </a:prstGeom>
+          <a:noFill/>
+          <a:ln/>
+        </p:spPr>
+        <p:txBody>
+          <a:bodyPr wrap="square" lIns="0" tIns="0" rIns="0" bIns="0" rtlCol="0" anchor="t"/>
+          <a:lstStyle/>
+          <a:p>
+            <a:pPr algn="ctr" indent="0" marL="0">
+              <a:buNone/>
+            </a:pPr>
+            <a:r>
+              <a:rPr lang="en-US" sz="1150" dirty="0">
+                <a:solidFill>
+                  <a:srgbClr val="5D6B63"/>
+                </a:solidFill>
+                <a:latin typeface="Calibri" pitchFamily="34" charset="0"/>
+                <a:ea typeface="Calibri" pitchFamily="34" charset="-122"/>
+                <a:cs typeface="Calibri" pitchFamily="34" charset="-120"/>
+              </a:rPr>
+              <a:t>Invites, walkthroughs, directory + resources filled</a:t>
+            </a:r>
+            <a:endParaRPr lang="en-US" sz="1150" dirty="0"/>
+          </a:p>
+        </p:txBody>
+      </p:sp>
+      <p:sp>
+        <p:nvSpPr>
+          <p:cNvPr id="18" name="Shape 16"/>
+          <p:cNvSpPr/>
+          <p:nvPr/>
+        </p:nvSpPr>
+        <p:spPr>
+          <a:xfrm>
+            <a:off x="6089904" y="1737360"/>
+            <a:ext cx="2651760" cy="3383280"/>
+          </a:xfrm>
+          <a:prstGeom prst="roundRect">
+            <a:avLst>
+              <a:gd name="adj" fmla="val 2759"/>
+            </a:avLst>
+          </a:prstGeom>
+          <a:solidFill>
+            <a:srgbClr val="FFFFFF"/>
+          </a:solidFill>
+          <a:ln w="9525">
+            <a:solidFill>
+              <a:srgbClr val="D9E2DC"/>
+            </a:solidFill>
+            <a:prstDash val="solid"/>
+          </a:ln>
+          <a:effectLst>
+            <a:outerShdw sx="100000" sy="100000" kx="0" ky="0" algn="bl" rotWithShape="0" blurRad="76200" dist="25400" dir="5400000">
+              <a:srgbClr val="9AA8A0">
+                <a:alpha val="35000"/>
+              </a:srgbClr>
+            </a:outerShdw>
+          </a:effectLst>
+        </p:spPr>
+      </p:sp>
+      <p:sp>
+        <p:nvSpPr>
+          <p:cNvPr id="19" name="Shape 17"/>
+          <p:cNvSpPr/>
+          <p:nvPr/>
+        </p:nvSpPr>
+        <p:spPr>
+          <a:xfrm>
+            <a:off x="7095744" y="1965960"/>
+            <a:ext cx="640080" cy="640080"/>
+          </a:xfrm>
+          <a:prstGeom prst="ellipse">
+            <a:avLst/>
+          </a:prstGeom>
+          <a:solidFill>
+            <a:srgbClr val="1B6B4A"/>
+          </a:solidFill>
+          <a:ln/>
+        </p:spPr>
+      </p:sp>
+      <p:sp>
+        <p:nvSpPr>
+          <p:cNvPr id="20" name="Text 18"/>
+          <p:cNvSpPr/>
+          <p:nvPr/>
+        </p:nvSpPr>
+        <p:spPr>
+          <a:xfrm>
+            <a:off x="7095744" y="1965960"/>
+            <a:ext cx="640080" cy="640080"/>
+          </a:xfrm>
+          <a:prstGeom prst="rect">
+            <a:avLst/>
+          </a:prstGeom>
+          <a:noFill/>
+          <a:ln/>
+        </p:spPr>
+        <p:txBody>
+          <a:bodyPr wrap="square" lIns="0" tIns="0" rIns="0" bIns="0" rtlCol="0" anchor="ctr"/>
+          <a:lstStyle/>
+          <a:p>
+            <a:pPr algn="ctr" indent="0" marL="0">
+              <a:buNone/>
+            </a:pPr>
+            <a:r>
+              <a:rPr lang="en-US" sz="2000" b="1" dirty="0">
+                <a:solidFill>
+                  <a:srgbClr val="FFFFFF"/>
+                </a:solidFill>
+                <a:latin typeface="Calibri" pitchFamily="34" charset="0"/>
+                <a:ea typeface="Calibri" pitchFamily="34" charset="-122"/>
+                <a:cs typeface="Calibri" pitchFamily="34" charset="-120"/>
+              </a:rPr>
+              <a:t>3</a:t>
+            </a:r>
+            <a:endParaRPr lang="en-US" sz="2000" dirty="0"/>
+          </a:p>
+        </p:txBody>
+      </p:sp>
+      <p:sp>
+        <p:nvSpPr>
+          <p:cNvPr id="21" name="Text 19"/>
+          <p:cNvSpPr/>
+          <p:nvPr/>
+        </p:nvSpPr>
+        <p:spPr>
+          <a:xfrm>
+            <a:off x="6227064" y="2697480"/>
+            <a:ext cx="2377440" cy="365760"/>
+          </a:xfrm>
+          <a:prstGeom prst="rect">
+            <a:avLst/>
+          </a:prstGeom>
+          <a:noFill/>
+          <a:ln/>
+        </p:spPr>
+        <p:txBody>
+          <a:bodyPr wrap="square" lIns="0" tIns="0" rIns="0" bIns="0" rtlCol="0" anchor="ctr"/>
+          <a:lstStyle/>
+          <a:p>
+            <a:pPr algn="ctr" indent="0" marL="0">
+              <a:buNone/>
+            </a:pPr>
+            <a:r>
+              <a:rPr lang="en-US" sz="1600" b="1" dirty="0">
+                <a:solidFill>
+                  <a:srgbClr val="1D2621"/>
+                </a:solidFill>
+                <a:latin typeface="Calibri" pitchFamily="34" charset="0"/>
+                <a:ea typeface="Calibri" pitchFamily="34" charset="-122"/>
+                <a:cs typeface="Calibri" pitchFamily="34" charset="-120"/>
+              </a:rPr>
+              <a:t>Activate</a:t>
+            </a:r>
+            <a:endParaRPr lang="en-US" sz="1600" dirty="0"/>
+          </a:p>
+        </p:txBody>
+      </p:sp>
+      <p:sp>
+        <p:nvSpPr>
+          <p:cNvPr id="22" name="Shape 20"/>
+          <p:cNvSpPr/>
+          <p:nvPr/>
+        </p:nvSpPr>
+        <p:spPr>
+          <a:xfrm>
+            <a:off x="6775704" y="3108960"/>
+            <a:ext cx="1280160" cy="310896"/>
+          </a:xfrm>
+          <a:prstGeom prst="roundRect">
+            <a:avLst>
+              <a:gd name="adj" fmla="val 50000"/>
+            </a:avLst>
+          </a:prstGeom>
+          <a:solidFill>
+            <a:srgbClr val="EE9455"/>
+          </a:solidFill>
+          <a:ln/>
+        </p:spPr>
+      </p:sp>
+      <p:sp>
+        <p:nvSpPr>
+          <p:cNvPr id="23" name="Text 21"/>
+          <p:cNvSpPr/>
+          <p:nvPr/>
+        </p:nvSpPr>
+        <p:spPr>
+          <a:xfrm>
+            <a:off x="6775704" y="3108960"/>
+            <a:ext cx="1280160" cy="310896"/>
+          </a:xfrm>
+          <a:prstGeom prst="rect">
+            <a:avLst/>
+          </a:prstGeom>
+          <a:noFill/>
+          <a:ln/>
+        </p:spPr>
+        <p:txBody>
+          <a:bodyPr wrap="square" lIns="0" tIns="0" rIns="0" bIns="0" rtlCol="0" anchor="ctr"/>
+          <a:lstStyle/>
+          <a:p>
+            <a:pPr algn="ctr" indent="0" marL="0">
+              <a:buNone/>
+            </a:pPr>
+            <a:r>
+              <a:rPr lang="en-US" sz="1000" b="1" dirty="0">
+                <a:solidFill>
+                  <a:srgbClr val="FFFFFF"/>
+                </a:solidFill>
+                <a:latin typeface="Calibri" pitchFamily="34" charset="0"/>
+                <a:ea typeface="Calibri" pitchFamily="34" charset="-122"/>
+                <a:cs typeface="Calibri" pitchFamily="34" charset="-120"/>
+              </a:rPr>
+              <a:t>Wk 4–8</a:t>
+            </a:r>
+            <a:endParaRPr lang="en-US" sz="1000" dirty="0"/>
+          </a:p>
+        </p:txBody>
+      </p:sp>
+      <p:sp>
+        <p:nvSpPr>
+          <p:cNvPr id="24" name="Text 22"/>
+          <p:cNvSpPr/>
+          <p:nvPr/>
+        </p:nvSpPr>
+        <p:spPr>
+          <a:xfrm>
+            <a:off x="6291072" y="3611880"/>
+            <a:ext cx="2249424" cy="1371600"/>
+          </a:xfrm>
+          <a:prstGeom prst="rect">
+            <a:avLst/>
+          </a:prstGeom>
+          <a:noFill/>
+          <a:ln/>
+        </p:spPr>
+        <p:txBody>
+          <a:bodyPr wrap="square" lIns="0" tIns="0" rIns="0" bIns="0" rtlCol="0" anchor="t"/>
+          <a:lstStyle/>
+          <a:p>
+            <a:pPr algn="ctr" indent="0" marL="0">
+              <a:buNone/>
+            </a:pPr>
+            <a:r>
+              <a:rPr lang="en-US" sz="1150" dirty="0">
+                <a:solidFill>
+                  <a:srgbClr val="5D6B63"/>
+                </a:solidFill>
+                <a:latin typeface="Calibri" pitchFamily="34" charset="0"/>
+                <a:ea typeface="Calibri" pitchFamily="34" charset="-122"/>
+                <a:cs typeface="Calibri" pitchFamily="34" charset="-120"/>
+              </a:rPr>
+              <a:t>Launch event, petition drives, first convenings</a:t>
+            </a:r>
+            <a:endParaRPr lang="en-US" sz="1150" dirty="0"/>
+          </a:p>
+        </p:txBody>
+      </p:sp>
+      <p:sp>
+        <p:nvSpPr>
+          <p:cNvPr id="25" name="Shape 23"/>
+          <p:cNvSpPr/>
+          <p:nvPr/>
+        </p:nvSpPr>
+        <p:spPr>
+          <a:xfrm>
+            <a:off x="8860536" y="1737360"/>
+            <a:ext cx="2651760" cy="3383280"/>
+          </a:xfrm>
+          <a:prstGeom prst="roundRect">
+            <a:avLst>
+              <a:gd name="adj" fmla="val 2759"/>
+            </a:avLst>
+          </a:prstGeom>
+          <a:solidFill>
+            <a:srgbClr val="FFFFFF"/>
+          </a:solidFill>
+          <a:ln w="9525">
+            <a:solidFill>
+              <a:srgbClr val="D9E2DC"/>
+            </a:solidFill>
+            <a:prstDash val="solid"/>
+          </a:ln>
+          <a:effectLst>
+            <a:outerShdw sx="100000" sy="100000" kx="0" ky="0" algn="bl" rotWithShape="0" blurRad="76200" dist="25400" dir="5400000">
+              <a:srgbClr val="9AA8A0">
+                <a:alpha val="35000"/>
+              </a:srgbClr>
+            </a:outerShdw>
+          </a:effectLst>
+        </p:spPr>
+      </p:sp>
+      <p:sp>
+        <p:nvSpPr>
+          <p:cNvPr id="26" name="Shape 24"/>
+          <p:cNvSpPr/>
+          <p:nvPr/>
+        </p:nvSpPr>
+        <p:spPr>
+          <a:xfrm>
+            <a:off x="9866376" y="1965960"/>
+            <a:ext cx="640080" cy="640080"/>
+          </a:xfrm>
+          <a:prstGeom prst="ellipse">
+            <a:avLst/>
+          </a:prstGeom>
+          <a:solidFill>
+            <a:srgbClr val="1B6B4A"/>
+          </a:solidFill>
+          <a:ln/>
+        </p:spPr>
+      </p:sp>
+      <p:sp>
+        <p:nvSpPr>
+          <p:cNvPr id="27" name="Text 25"/>
+          <p:cNvSpPr/>
+          <p:nvPr/>
+        </p:nvSpPr>
+        <p:spPr>
+          <a:xfrm>
+            <a:off x="9866376" y="1965960"/>
+            <a:ext cx="640080" cy="640080"/>
+          </a:xfrm>
+          <a:prstGeom prst="rect">
+            <a:avLst/>
+          </a:prstGeom>
+          <a:noFill/>
+          <a:ln/>
+        </p:spPr>
+        <p:txBody>
+          <a:bodyPr wrap="square" lIns="0" tIns="0" rIns="0" bIns="0" rtlCol="0" anchor="ctr"/>
+          <a:lstStyle/>
+          <a:p>
+            <a:pPr algn="ctr" indent="0" marL="0">
+              <a:buNone/>
+            </a:pPr>
+            <a:r>
+              <a:rPr lang="en-US" sz="2000" b="1" dirty="0">
+                <a:solidFill>
+                  <a:srgbClr val="FFFFFF"/>
+                </a:solidFill>
+                <a:latin typeface="Calibri" pitchFamily="34" charset="0"/>
+                <a:ea typeface="Calibri" pitchFamily="34" charset="-122"/>
+                <a:cs typeface="Calibri" pitchFamily="34" charset="-120"/>
+              </a:rPr>
+              <a:t>4</a:t>
+            </a:r>
+            <a:endParaRPr lang="en-US" sz="2000" dirty="0"/>
+          </a:p>
+        </p:txBody>
+      </p:sp>
+      <p:sp>
+        <p:nvSpPr>
+          <p:cNvPr id="28" name="Text 26"/>
+          <p:cNvSpPr/>
+          <p:nvPr/>
+        </p:nvSpPr>
+        <p:spPr>
+          <a:xfrm>
+            <a:off x="8997696" y="2697480"/>
+            <a:ext cx="2377440" cy="365760"/>
+          </a:xfrm>
+          <a:prstGeom prst="rect">
+            <a:avLst/>
+          </a:prstGeom>
+          <a:noFill/>
+          <a:ln/>
+        </p:spPr>
+        <p:txBody>
+          <a:bodyPr wrap="square" lIns="0" tIns="0" rIns="0" bIns="0" rtlCol="0" anchor="ctr"/>
+          <a:lstStyle/>
+          <a:p>
+            <a:pPr algn="ctr" indent="0" marL="0">
+              <a:buNone/>
+            </a:pPr>
+            <a:r>
+              <a:rPr lang="en-US" sz="1600" b="1" dirty="0">
+                <a:solidFill>
+                  <a:srgbClr val="1D2621"/>
+                </a:solidFill>
+                <a:latin typeface="Calibri" pitchFamily="34" charset="0"/>
+                <a:ea typeface="Calibri" pitchFamily="34" charset="-122"/>
+                <a:cs typeface="Calibri" pitchFamily="34" charset="-120"/>
+              </a:rPr>
+              <a:t>Sustain</a:t>
+            </a:r>
+            <a:endParaRPr lang="en-US" sz="1600" dirty="0"/>
+          </a:p>
+        </p:txBody>
+      </p:sp>
+      <p:sp>
+        <p:nvSpPr>
+          <p:cNvPr id="29" name="Shape 27"/>
+          <p:cNvSpPr/>
+          <p:nvPr/>
+        </p:nvSpPr>
+        <p:spPr>
+          <a:xfrm>
+            <a:off x="9546336" y="3108960"/>
+            <a:ext cx="1280160" cy="310896"/>
+          </a:xfrm>
+          <a:prstGeom prst="roundRect">
+            <a:avLst>
+              <a:gd name="adj" fmla="val 50000"/>
+            </a:avLst>
+          </a:prstGeom>
+          <a:solidFill>
+            <a:srgbClr val="EE9455"/>
+          </a:solidFill>
+          <a:ln/>
+        </p:spPr>
+      </p:sp>
+      <p:sp>
+        <p:nvSpPr>
+          <p:cNvPr id="30" name="Text 28"/>
+          <p:cNvSpPr/>
+          <p:nvPr/>
+        </p:nvSpPr>
+        <p:spPr>
+          <a:xfrm>
+            <a:off x="9546336" y="3108960"/>
+            <a:ext cx="1280160" cy="310896"/>
+          </a:xfrm>
+          <a:prstGeom prst="rect">
+            <a:avLst/>
+          </a:prstGeom>
+          <a:noFill/>
+          <a:ln/>
+        </p:spPr>
+        <p:txBody>
+          <a:bodyPr wrap="square" lIns="0" tIns="0" rIns="0" bIns="0" rtlCol="0" anchor="ctr"/>
+          <a:lstStyle/>
+          <a:p>
+            <a:pPr algn="ctr" indent="0" marL="0">
+              <a:buNone/>
+            </a:pPr>
+            <a:r>
+              <a:rPr lang="en-US" sz="1000" b="1" dirty="0">
+                <a:solidFill>
+                  <a:srgbClr val="FFFFFF"/>
+                </a:solidFill>
+                <a:latin typeface="Calibri" pitchFamily="34" charset="0"/>
+                <a:ea typeface="Calibri" pitchFamily="34" charset="-122"/>
+                <a:cs typeface="Calibri" pitchFamily="34" charset="-120"/>
+              </a:rPr>
+              <a:t>Wk 8+</a:t>
+            </a:r>
+            <a:endParaRPr lang="en-US" sz="1000" dirty="0"/>
+          </a:p>
+        </p:txBody>
+      </p:sp>
+      <p:sp>
+        <p:nvSpPr>
+          <p:cNvPr id="31" name="Text 29"/>
+          <p:cNvSpPr/>
+          <p:nvPr/>
+        </p:nvSpPr>
+        <p:spPr>
+          <a:xfrm>
+            <a:off x="9061704" y="3611880"/>
+            <a:ext cx="2249424" cy="1371600"/>
+          </a:xfrm>
+          <a:prstGeom prst="rect">
+            <a:avLst/>
+          </a:prstGeom>
+          <a:noFill/>
+          <a:ln/>
+        </p:spPr>
+        <p:txBody>
+          <a:bodyPr wrap="square" lIns="0" tIns="0" rIns="0" bIns="0" rtlCol="0" anchor="t"/>
+          <a:lstStyle/>
+          <a:p>
+            <a:pPr algn="ctr" indent="0" marL="0">
+              <a:buNone/>
+            </a:pPr>
+            <a:r>
+              <a:rPr lang="en-US" sz="1150" dirty="0">
+                <a:solidFill>
+                  <a:srgbClr val="5D6B63"/>
+                </a:solidFill>
+                <a:latin typeface="Calibri" pitchFamily="34" charset="0"/>
+                <a:ea typeface="Calibri" pitchFamily="34" charset="-122"/>
+                <a:cs typeface="Calibri" pitchFamily="34" charset="-120"/>
+              </a:rPr>
+              <a:t>Content cadence, spotlights, quarterly gap review</a:t>
+            </a:r>
+            <a:endParaRPr lang="en-US" sz="1150" dirty="0"/>
+          </a:p>
+        </p:txBody>
+      </p:sp>
+      <p:sp>
+        <p:nvSpPr>
+          <p:cNvPr id="32" name="Text 30"/>
           <p:cNvSpPr/>
           <p:nvPr/>
         </p:nvSpPr>
@@ -6862,7 +7809,7 @@
                 <a:ea typeface="Calibri" pitchFamily="34" charset="-122"/>
                 <a:cs typeface="Calibri" pitchFamily="34" charset="-120"/>
               </a:rPr>
-              <a:t>EVENT BUDGET</a:t>
+              <a:t>THE LAUNCH EVENT</a:t>
             </a:r>
             <a:endParaRPr lang="en-US" sz="1200" dirty="0"/>
           </a:p>
@@ -6901,6 +7848,585 @@
                 <a:ea typeface="Cambria" pitchFamily="34" charset="-122"/>
                 <a:cs typeface="Cambria" pitchFamily="34" charset="-120"/>
               </a:rPr>
+              <a:t>A breakfast roundtable, ~30 seats</a:t>
+            </a:r>
+            <a:endParaRPr lang="en-US" sz="3000" dirty="0"/>
+          </a:p>
+        </p:txBody>
+      </p:sp>
+      <p:sp>
+        <p:nvSpPr>
+          <p:cNvPr id="4" name="Shape 2"/>
+          <p:cNvSpPr/>
+          <p:nvPr/>
+        </p:nvSpPr>
+        <p:spPr>
+          <a:xfrm>
+            <a:off x="548640" y="1600200"/>
+            <a:ext cx="5440680" cy="4114800"/>
+          </a:xfrm>
+          <a:prstGeom prst="roundRect">
+            <a:avLst>
+              <a:gd name="adj" fmla="val 1778"/>
+            </a:avLst>
+          </a:prstGeom>
+          <a:solidFill>
+            <a:srgbClr val="F1F5F3"/>
+          </a:solidFill>
+          <a:ln w="9525">
+            <a:solidFill>
+              <a:srgbClr val="D9E2DC"/>
+            </a:solidFill>
+            <a:prstDash val="solid"/>
+          </a:ln>
+          <a:effectLst>
+            <a:outerShdw sx="100000" sy="100000" kx="0" ky="0" algn="bl" rotWithShape="0" blurRad="76200" dist="25400" dir="5400000">
+              <a:srgbClr val="9AA8A0">
+                <a:alpha val="35000"/>
+              </a:srgbClr>
+            </a:outerShdw>
+          </a:effectLst>
+        </p:spPr>
+      </p:sp>
+      <p:sp>
+        <p:nvSpPr>
+          <p:cNvPr id="5" name="Text 3"/>
+          <p:cNvSpPr/>
+          <p:nvPr/>
+        </p:nvSpPr>
+        <p:spPr>
+          <a:xfrm>
+            <a:off x="822960" y="1828800"/>
+            <a:ext cx="4846320" cy="365760"/>
+          </a:xfrm>
+          <a:prstGeom prst="rect">
+            <a:avLst/>
+          </a:prstGeom>
+          <a:noFill/>
+          <a:ln/>
+        </p:spPr>
+        <p:txBody>
+          <a:bodyPr wrap="square" lIns="0" tIns="0" rIns="0" bIns="0" rtlCol="0" anchor="ctr"/>
+          <a:lstStyle/>
+          <a:p>
+            <a:pPr indent="0" marL="0">
+              <a:buNone/>
+            </a:pPr>
+            <a:r>
+              <a:rPr lang="en-US" sz="1500" b="1" dirty="0">
+                <a:solidFill>
+                  <a:srgbClr val="1B6B4A"/>
+                </a:solidFill>
+                <a:latin typeface="Calibri" pitchFamily="34" charset="0"/>
+                <a:ea typeface="Calibri" pitchFamily="34" charset="-122"/>
+                <a:cs typeface="Calibri" pitchFamily="34" charset="-120"/>
+              </a:rPr>
+              <a:t>Who's in the room</a:t>
+            </a:r>
+            <a:endParaRPr lang="en-US" sz="1500" dirty="0"/>
+          </a:p>
+        </p:txBody>
+      </p:sp>
+      <p:sp>
+        <p:nvSpPr>
+          <p:cNvPr id="6" name="Text 4"/>
+          <p:cNvSpPr/>
+          <p:nvPr/>
+        </p:nvSpPr>
+        <p:spPr>
+          <a:xfrm>
+            <a:off x="914400" y="2240280"/>
+            <a:ext cx="4754880" cy="1828800"/>
+          </a:xfrm>
+          <a:prstGeom prst="rect">
+            <a:avLst/>
+          </a:prstGeom>
+          <a:noFill/>
+          <a:ln/>
+        </p:spPr>
+        <p:txBody>
+          <a:bodyPr wrap="square" lIns="0" tIns="0" rIns="0" bIns="0" rtlCol="0" anchor="ctr"/>
+          <a:lstStyle/>
+          <a:p>
+            <a:pPr marL="203200" indent="-203200">
+              <a:spcAft>
+                <a:spcPts val="800"/>
+              </a:spcAft>
+              <a:buSzPct val="100000"/>
+              <a:buChar char="•"/>
+            </a:pPr>
+            <a:r>
+              <a:rPr lang="en-US" sz="1300" dirty="0">
+                <a:solidFill>
+                  <a:srgbClr val="1D2621"/>
+                </a:solidFill>
+                <a:latin typeface="Calibri" pitchFamily="34" charset="0"/>
+                <a:ea typeface="Calibri" pitchFamily="34" charset="-122"/>
+                <a:cs typeface="Calibri" pitchFamily="34" charset="-120"/>
+              </a:rPr>
+              <a:t>~12 partner organisations (coalition + prospective)</a:t>
+            </a:r>
+            <a:endParaRPr lang="en-US" sz="1300" dirty="0"/>
+          </a:p>
+          <a:p>
+            <a:pPr marL="203200" indent="-203200">
+              <a:spcAft>
+                <a:spcPts val="800"/>
+              </a:spcAft>
+              <a:buSzPct val="100000"/>
+              <a:buChar char="•"/>
+            </a:pPr>
+            <a:r>
+              <a:rPr lang="en-US" sz="1300" dirty="0">
+                <a:solidFill>
+                  <a:srgbClr val="1D2621"/>
+                </a:solidFill>
+                <a:latin typeface="Calibri" pitchFamily="34" charset="0"/>
+                <a:ea typeface="Calibri" pitchFamily="34" charset="-122"/>
+                <a:cs typeface="Calibri" pitchFamily="34" charset="-120"/>
+              </a:rPr>
+              <a:t>~8 funders &amp; policymakers</a:t>
+            </a:r>
+            <a:endParaRPr lang="en-US" sz="1300" dirty="0"/>
+          </a:p>
+          <a:p>
+            <a:pPr marL="203200" indent="-203200">
+              <a:spcAft>
+                <a:spcPts val="800"/>
+              </a:spcAft>
+              <a:buSzPct val="100000"/>
+              <a:buChar char="•"/>
+            </a:pPr>
+            <a:r>
+              <a:rPr lang="en-US" sz="1300" dirty="0">
+                <a:solidFill>
+                  <a:srgbClr val="1D2621"/>
+                </a:solidFill>
+                <a:latin typeface="Calibri" pitchFamily="34" charset="0"/>
+                <a:ea typeface="Calibri" pitchFamily="34" charset="-122"/>
+                <a:cs typeface="Calibri" pitchFamily="34" charset="-120"/>
+              </a:rPr>
+              <a:t>~7 journalists / editors</a:t>
+            </a:r>
+            <a:endParaRPr lang="en-US" sz="1300" dirty="0"/>
+          </a:p>
+          <a:p>
+            <a:pPr marL="203200" indent="-203200">
+              <a:buSzPct val="100000"/>
+              <a:buChar char="•"/>
+            </a:pPr>
+            <a:r>
+              <a:rPr lang="en-US" sz="1300" dirty="0">
+                <a:solidFill>
+                  <a:srgbClr val="1D2621"/>
+                </a:solidFill>
+                <a:latin typeface="Calibri" pitchFamily="34" charset="0"/>
+                <a:ea typeface="Calibri" pitchFamily="34" charset="-122"/>
+                <a:cs typeface="Calibri" pitchFamily="34" charset="-120"/>
+              </a:rPr>
+              <a:t>~3 coalition hosts / demo leads</a:t>
+            </a:r>
+            <a:endParaRPr lang="en-US" sz="1300" dirty="0"/>
+          </a:p>
+        </p:txBody>
+      </p:sp>
+      <p:sp>
+        <p:nvSpPr>
+          <p:cNvPr id="7" name="Text 5"/>
+          <p:cNvSpPr/>
+          <p:nvPr/>
+        </p:nvSpPr>
+        <p:spPr>
+          <a:xfrm>
+            <a:off x="822960" y="4160520"/>
+            <a:ext cx="4846320" cy="365760"/>
+          </a:xfrm>
+          <a:prstGeom prst="rect">
+            <a:avLst/>
+          </a:prstGeom>
+          <a:noFill/>
+          <a:ln/>
+        </p:spPr>
+        <p:txBody>
+          <a:bodyPr wrap="square" lIns="0" tIns="0" rIns="0" bIns="0" rtlCol="0" anchor="ctr"/>
+          <a:lstStyle/>
+          <a:p>
+            <a:pPr indent="0" marL="0">
+              <a:buNone/>
+            </a:pPr>
+            <a:r>
+              <a:rPr lang="en-US" sz="1500" b="1" dirty="0">
+                <a:solidFill>
+                  <a:srgbClr val="1B6B4A"/>
+                </a:solidFill>
+                <a:latin typeface="Calibri" pitchFamily="34" charset="0"/>
+                <a:ea typeface="Calibri" pitchFamily="34" charset="-122"/>
+                <a:cs typeface="Calibri" pitchFamily="34" charset="-120"/>
+              </a:rPr>
+              <a:t>Format · 3 hours</a:t>
+            </a:r>
+            <a:endParaRPr lang="en-US" sz="1500" dirty="0"/>
+          </a:p>
+        </p:txBody>
+      </p:sp>
+      <p:sp>
+        <p:nvSpPr>
+          <p:cNvPr id="8" name="Text 6"/>
+          <p:cNvSpPr/>
+          <p:nvPr/>
+        </p:nvSpPr>
+        <p:spPr>
+          <a:xfrm>
+            <a:off x="914400" y="4526280"/>
+            <a:ext cx="4892040" cy="1097280"/>
+          </a:xfrm>
+          <a:prstGeom prst="rect">
+            <a:avLst/>
+          </a:prstGeom>
+          <a:noFill/>
+          <a:ln/>
+        </p:spPr>
+        <p:txBody>
+          <a:bodyPr wrap="square" lIns="0" tIns="0" rIns="0" bIns="0" rtlCol="0" anchor="t"/>
+          <a:lstStyle/>
+          <a:p>
+            <a:pPr indent="0" marL="0">
+              <a:buNone/>
+            </a:pPr>
+            <a:r>
+              <a:rPr lang="en-US" sz="1250" dirty="0">
+                <a:solidFill>
+                  <a:srgbClr val="5D6B63"/>
+                </a:solidFill>
+                <a:latin typeface="Calibri" pitchFamily="34" charset="0"/>
+                <a:ea typeface="Calibri" pitchFamily="34" charset="-122"/>
+                <a:cs typeface="Calibri" pitchFamily="34" charset="-120"/>
+              </a:rPr>
+              <a:t>Breakfast → 15-min live demo → moderated roundtable on a live front (e.g. Siaya nuclear) → partner sign-ups &amp; press Q&amp;A.</a:t>
+            </a:r>
+            <a:endParaRPr lang="en-US" sz="1250" dirty="0"/>
+          </a:p>
+        </p:txBody>
+      </p:sp>
+      <p:sp>
+        <p:nvSpPr>
+          <p:cNvPr id="9" name="Shape 7"/>
+          <p:cNvSpPr/>
+          <p:nvPr/>
+        </p:nvSpPr>
+        <p:spPr>
+          <a:xfrm>
+            <a:off x="6172200" y="1600200"/>
+            <a:ext cx="5440680" cy="4114800"/>
+          </a:xfrm>
+          <a:prstGeom prst="roundRect">
+            <a:avLst>
+              <a:gd name="adj" fmla="val 1778"/>
+            </a:avLst>
+          </a:prstGeom>
+          <a:solidFill>
+            <a:srgbClr val="0F2A20"/>
+          </a:solidFill>
+          <a:ln w="9525">
+            <a:solidFill>
+              <a:srgbClr val="D9E2DC"/>
+            </a:solidFill>
+            <a:prstDash val="solid"/>
+          </a:ln>
+          <a:effectLst>
+            <a:outerShdw sx="100000" sy="100000" kx="0" ky="0" algn="bl" rotWithShape="0" blurRad="76200" dist="25400" dir="5400000">
+              <a:srgbClr val="9AA8A0">
+                <a:alpha val="35000"/>
+              </a:srgbClr>
+            </a:outerShdw>
+          </a:effectLst>
+        </p:spPr>
+      </p:sp>
+      <p:sp>
+        <p:nvSpPr>
+          <p:cNvPr id="10" name="Text 8"/>
+          <p:cNvSpPr/>
+          <p:nvPr/>
+        </p:nvSpPr>
+        <p:spPr>
+          <a:xfrm>
+            <a:off x="6446520" y="1828800"/>
+            <a:ext cx="4846320" cy="365760"/>
+          </a:xfrm>
+          <a:prstGeom prst="rect">
+            <a:avLst/>
+          </a:prstGeom>
+          <a:noFill/>
+          <a:ln/>
+        </p:spPr>
+        <p:txBody>
+          <a:bodyPr wrap="square" lIns="0" tIns="0" rIns="0" bIns="0" rtlCol="0" anchor="ctr"/>
+          <a:lstStyle/>
+          <a:p>
+            <a:pPr indent="0" marL="0">
+              <a:buNone/>
+            </a:pPr>
+            <a:r>
+              <a:rPr lang="en-US" sz="1500" b="1" dirty="0">
+                <a:solidFill>
+                  <a:srgbClr val="62C79B"/>
+                </a:solidFill>
+                <a:latin typeface="Calibri" pitchFamily="34" charset="0"/>
+                <a:ea typeface="Calibri" pitchFamily="34" charset="-122"/>
+                <a:cs typeface="Calibri" pitchFamily="34" charset="-120"/>
+              </a:rPr>
+              <a:t>Why in person, once</a:t>
+            </a:r>
+            <a:endParaRPr lang="en-US" sz="1500" dirty="0"/>
+          </a:p>
+        </p:txBody>
+      </p:sp>
+      <p:sp>
+        <p:nvSpPr>
+          <p:cNvPr id="11" name="Text 9"/>
+          <p:cNvSpPr/>
+          <p:nvPr/>
+        </p:nvSpPr>
+        <p:spPr>
+          <a:xfrm>
+            <a:off x="6537960" y="2240280"/>
+            <a:ext cx="4937760" cy="3108960"/>
+          </a:xfrm>
+          <a:prstGeom prst="rect">
+            <a:avLst/>
+          </a:prstGeom>
+          <a:noFill/>
+          <a:ln/>
+        </p:spPr>
+        <p:txBody>
+          <a:bodyPr wrap="square" lIns="0" tIns="0" rIns="0" bIns="0" rtlCol="0" anchor="ctr"/>
+          <a:lstStyle/>
+          <a:p>
+            <a:pPr marL="203200" indent="-203200">
+              <a:spcAft>
+                <a:spcPts val="900"/>
+              </a:spcAft>
+              <a:buSzPct val="100000"/>
+              <a:buChar char="•"/>
+            </a:pPr>
+            <a:r>
+              <a:rPr lang="en-US" sz="1300" dirty="0">
+                <a:solidFill>
+                  <a:srgbClr val="E7F0EA"/>
+                </a:solidFill>
+                <a:latin typeface="Calibri" pitchFamily="34" charset="0"/>
+                <a:ea typeface="Calibri" pitchFamily="34" charset="-122"/>
+                <a:cs typeface="Calibri" pitchFamily="34" charset="-120"/>
+              </a:rPr>
+              <a:t>Press coverage that seeds the digital campaign</a:t>
+            </a:r>
+            <a:endParaRPr lang="en-US" sz="1300" dirty="0"/>
+          </a:p>
+          <a:p>
+            <a:pPr marL="203200" indent="-203200">
+              <a:spcAft>
+                <a:spcPts val="900"/>
+              </a:spcAft>
+              <a:buSzPct val="100000"/>
+              <a:buChar char="•"/>
+            </a:pPr>
+            <a:r>
+              <a:rPr lang="en-US" sz="1300" dirty="0">
+                <a:solidFill>
+                  <a:srgbClr val="E7F0EA"/>
+                </a:solidFill>
+                <a:latin typeface="Calibri" pitchFamily="34" charset="0"/>
+                <a:ea typeface="Calibri" pitchFamily="34" charset="-122"/>
+                <a:cs typeface="Calibri" pitchFamily="34" charset="-120"/>
+              </a:rPr>
+              <a:t>Face-to-face trust with funders &amp; policymakers</a:t>
+            </a:r>
+            <a:endParaRPr lang="en-US" sz="1300" dirty="0"/>
+          </a:p>
+          <a:p>
+            <a:pPr marL="203200" indent="-203200">
+              <a:spcAft>
+                <a:spcPts val="900"/>
+              </a:spcAft>
+              <a:buSzPct val="100000"/>
+              <a:buChar char="•"/>
+            </a:pPr>
+            <a:r>
+              <a:rPr lang="en-US" sz="1300" dirty="0">
+                <a:solidFill>
+                  <a:srgbClr val="E7F0EA"/>
+                </a:solidFill>
+                <a:latin typeface="Calibri" pitchFamily="34" charset="0"/>
+                <a:ea typeface="Calibri" pitchFamily="34" charset="-122"/>
+                <a:cs typeface="Calibri" pitchFamily="34" charset="-120"/>
+              </a:rPr>
+              <a:t>A content bank — photos &amp; clips — for weeks of posts</a:t>
+            </a:r>
+            <a:endParaRPr lang="en-US" sz="1300" dirty="0"/>
+          </a:p>
+          <a:p>
+            <a:pPr marL="203200" indent="-203200">
+              <a:buSzPct val="100000"/>
+              <a:buChar char="•"/>
+            </a:pPr>
+            <a:r>
+              <a:rPr lang="en-US" sz="1300" dirty="0">
+                <a:solidFill>
+                  <a:srgbClr val="E7F0EA"/>
+                </a:solidFill>
+                <a:latin typeface="Calibri" pitchFamily="34" charset="0"/>
+                <a:ea typeface="Calibri" pitchFamily="34" charset="-122"/>
+                <a:cs typeface="Calibri" pitchFamily="34" charset="-120"/>
+              </a:rPr>
+              <a:t>Live sign-ups: leave onboarded, not just interested</a:t>
+            </a:r>
+            <a:endParaRPr lang="en-US" sz="1300" dirty="0"/>
+          </a:p>
+        </p:txBody>
+      </p:sp>
+      <p:sp>
+        <p:nvSpPr>
+          <p:cNvPr id="12" name="Text 10"/>
+          <p:cNvSpPr/>
+          <p:nvPr/>
+        </p:nvSpPr>
+        <p:spPr>
+          <a:xfrm>
+            <a:off x="548640" y="6446520"/>
+            <a:ext cx="11064240" cy="274320"/>
+          </a:xfrm>
+          <a:prstGeom prst="rect">
+            <a:avLst/>
+          </a:prstGeom>
+          <a:noFill/>
+          <a:ln/>
+        </p:spPr>
+        <p:txBody>
+          <a:bodyPr wrap="square" lIns="0" tIns="0" rIns="0" bIns="0" rtlCol="0" anchor="ctr"/>
+          <a:lstStyle/>
+          <a:p>
+            <a:pPr indent="0" marL="0">
+              <a:buNone/>
+            </a:pPr>
+            <a:r>
+              <a:rPr lang="en-US" sz="900" i="1" dirty="0">
+                <a:solidFill>
+                  <a:srgbClr val="5D6B63"/>
+                </a:solidFill>
+                <a:latin typeface="Calibri" pitchFamily="34" charset="0"/>
+                <a:ea typeface="Calibri" pitchFamily="34" charset="-122"/>
+                <a:cs typeface="Calibri" pitchFamily="34" charset="-120"/>
+              </a:rPr>
+              <a:t>MazingiraKenya · Activation &amp; launch plan</a:t>
+            </a:r>
+            <a:endParaRPr lang="en-US" sz="900" dirty="0"/>
+          </a:p>
+        </p:txBody>
+      </p:sp>
+    </p:spTree>
+  </p:cSld>
+  <p:clrMapOvr>
+    <a:masterClrMapping/>
+  </p:clrMapOvr>
+</p:sld>
+</file>
+
+<file path=ppt/slides/slide9.xml><?xml version="1.0" encoding="utf-8"?>
+<p:sld xmlns:a="http://schemas.openxmlformats.org/drawingml/2006/main" xmlns:r="http://schemas.openxmlformats.org/officeDocument/2006/relationships" xmlns:p="http://schemas.openxmlformats.org/presentationml/2006/main">
+  <p:cSld name="Slide 9">
+    <p:bg>
+      <p:bgPr>
+        <a:solidFill>
+          <a:srgbClr val="FFFFFF"/>
+        </a:solidFill>
+      </p:bgPr>
+    </p:bg>
+    <p:spTree>
+      <p:nvGrpSpPr>
+        <p:cNvPr id="1" name=""/>
+        <p:cNvGrpSpPr/>
+        <p:nvPr/>
+      </p:nvGrpSpPr>
+      <p:grpSpPr>
+        <a:xfrm>
+          <a:off x="0" y="0"/>
+          <a:ext cx="0" cy="0"/>
+          <a:chOff x="0" y="0"/>
+          <a:chExt cx="0" cy="0"/>
+        </a:xfrm>
+      </p:grpSpPr>
+      <p:sp>
+        <p:nvSpPr>
+          <p:cNvPr id="2" name="Text 0"/>
+          <p:cNvSpPr/>
+          <p:nvPr/>
+        </p:nvSpPr>
+        <p:spPr>
+          <a:xfrm>
+            <a:off x="548640" y="384048"/>
+            <a:ext cx="10972800" cy="274320"/>
+          </a:xfrm>
+          <a:prstGeom prst="rect">
+            <a:avLst/>
+          </a:prstGeom>
+          <a:noFill/>
+          <a:ln/>
+        </p:spPr>
+        <p:txBody>
+          <a:bodyPr wrap="square" lIns="0" tIns="0" rIns="0" bIns="0" rtlCol="0" anchor="ctr"/>
+          <a:lstStyle/>
+          <a:p>
+            <a:pPr indent="0" marL="0">
+              <a:buNone/>
+            </a:pPr>
+            <a:r>
+              <a:rPr lang="en-US" sz="1200" b="1" spc="200" kern="0" dirty="0">
+                <a:solidFill>
+                  <a:srgbClr val="EE9455"/>
+                </a:solidFill>
+                <a:latin typeface="Calibri" pitchFamily="34" charset="0"/>
+                <a:ea typeface="Calibri" pitchFamily="34" charset="-122"/>
+                <a:cs typeface="Calibri" pitchFamily="34" charset="-120"/>
+              </a:rPr>
+              <a:t>EVENT BUDGET</a:t>
+            </a:r>
+            <a:endParaRPr lang="en-US" sz="1200" dirty="0"/>
+          </a:p>
+        </p:txBody>
+      </p:sp>
+      <p:sp>
+        <p:nvSpPr>
+          <p:cNvPr id="3" name="Text 1"/>
+          <p:cNvSpPr/>
+          <p:nvPr/>
+        </p:nvSpPr>
+        <p:spPr>
+          <a:xfrm>
+            <a:off x="548640" y="658368"/>
+            <a:ext cx="11064240" cy="640080"/>
+          </a:xfrm>
+          <a:prstGeom prst="rect">
+            <a:avLst/>
+          </a:prstGeom>
+          <a:noFill/>
+          <a:ln/>
+        </p:spPr>
+        <p:txBody>
+          <a:bodyPr wrap="square" lIns="0" tIns="0" rIns="0" bIns="0" rtlCol="0" anchor="ctr"/>
+          <a:lstStyle/>
+          <a:p>
+            <a:pPr indent="0" marL="0">
+              <a:buNone/>
+            </a:pPr>
+            <a:r>
+              <a:rPr lang="en-US" sz="3000" b="1" dirty="0">
+                <a:solidFill>
+                  <a:srgbClr val="1B6B4A"/>
+                </a:solidFill>
+                <a:latin typeface="Cambria" pitchFamily="34" charset="0"/>
+                <a:ea typeface="Cambria" pitchFamily="34" charset="-122"/>
+                <a:cs typeface="Cambria" pitchFamily="34" charset="-120"/>
+              </a:rPr>
               <a:t>~30 guests · Nairobi · half-day</a:t>
             </a:r>
             <a:endParaRPr lang="en-US" sz="3000" dirty="0"/>
@@ -6909,7 +8435,7 @@
       </p:sp>
       <p:graphicFrame>
         <p:nvGraphicFramePr>
-          <p:cNvPr id="9" name="Table 0"/>
+          <p:cNvPr id="10" name="Table 0"/>
           <p:cNvGraphicFramePr>
             <a:graphicFrameLocks noGrp="1"/>
           </p:cNvGraphicFramePr>
@@ -9018,827 +10544,6 @@
 </p:sld>
 </file>
 
-<file path=ppt/slides/slide9.xml><?xml version="1.0" encoding="utf-8"?>
-<p:sld xmlns:a="http://schemas.openxmlformats.org/drawingml/2006/main" xmlns:r="http://schemas.openxmlformats.org/officeDocument/2006/relationships" xmlns:p="http://schemas.openxmlformats.org/presentationml/2006/main">
-  <p:cSld name="Slide 9">
-    <p:bg>
-      <p:bgPr>
-        <a:solidFill>
-          <a:srgbClr val="FFFFFF"/>
-        </a:solidFill>
-      </p:bgPr>
-    </p:bg>
-    <p:spTree>
-      <p:nvGrpSpPr>
-        <p:cNvPr id="1" name=""/>
-        <p:cNvGrpSpPr/>
-        <p:nvPr/>
-      </p:nvGrpSpPr>
-      <p:grpSpPr>
-        <a:xfrm>
-          <a:off x="0" y="0"/>
-          <a:ext cx="0" cy="0"/>
-          <a:chOff x="0" y="0"/>
-          <a:chExt cx="0" cy="0"/>
-        </a:xfrm>
-      </p:grpSpPr>
-      <p:sp>
-        <p:nvSpPr>
-          <p:cNvPr id="2" name="Text 0"/>
-          <p:cNvSpPr/>
-          <p:nvPr/>
-        </p:nvSpPr>
-        <p:spPr>
-          <a:xfrm>
-            <a:off x="548640" y="384048"/>
-            <a:ext cx="10972800" cy="274320"/>
-          </a:xfrm>
-          <a:prstGeom prst="rect">
-            <a:avLst/>
-          </a:prstGeom>
-          <a:noFill/>
-          <a:ln/>
-        </p:spPr>
-        <p:txBody>
-          <a:bodyPr wrap="square" lIns="0" tIns="0" rIns="0" bIns="0" rtlCol="0" anchor="ctr"/>
-          <a:lstStyle/>
-          <a:p>
-            <a:pPr indent="0" marL="0">
-              <a:buNone/>
-            </a:pPr>
-            <a:r>
-              <a:rPr lang="en-US" sz="1200" b="1" spc="200" kern="0" dirty="0">
-                <a:solidFill>
-                  <a:srgbClr val="EE9455"/>
-                </a:solidFill>
-                <a:latin typeface="Calibri" pitchFamily="34" charset="0"/>
-                <a:ea typeface="Calibri" pitchFamily="34" charset="-122"/>
-                <a:cs typeface="Calibri" pitchFamily="34" charset="-120"/>
-              </a:rPr>
-              <a:t>MEASURING SUCCESS</a:t>
-            </a:r>
-            <a:endParaRPr lang="en-US" sz="1200" dirty="0"/>
-          </a:p>
-        </p:txBody>
-      </p:sp>
-      <p:sp>
-        <p:nvSpPr>
-          <p:cNvPr id="3" name="Text 1"/>
-          <p:cNvSpPr/>
-          <p:nvPr/>
-        </p:nvSpPr>
-        <p:spPr>
-          <a:xfrm>
-            <a:off x="548640" y="658368"/>
-            <a:ext cx="11064240" cy="640080"/>
-          </a:xfrm>
-          <a:prstGeom prst="rect">
-            <a:avLst/>
-          </a:prstGeom>
-          <a:noFill/>
-          <a:ln/>
-        </p:spPr>
-        <p:txBody>
-          <a:bodyPr wrap="square" lIns="0" tIns="0" rIns="0" bIns="0" rtlCol="0" anchor="ctr"/>
-          <a:lstStyle/>
-          <a:p>
-            <a:pPr indent="0" marL="0">
-              <a:buNone/>
-            </a:pPr>
-            <a:r>
-              <a:rPr lang="en-US" sz="3000" b="1" dirty="0">
-                <a:solidFill>
-                  <a:srgbClr val="1B6B4A"/>
-                </a:solidFill>
-                <a:latin typeface="Cambria" pitchFamily="34" charset="0"/>
-                <a:ea typeface="Cambria" pitchFamily="34" charset="-122"/>
-                <a:cs typeface="Cambria" pitchFamily="34" charset="-120"/>
-              </a:rPr>
-              <a:t>What we watch after launch</a:t>
-            </a:r>
-            <a:endParaRPr lang="en-US" sz="3000" dirty="0"/>
-          </a:p>
-        </p:txBody>
-      </p:sp>
-      <p:sp>
-        <p:nvSpPr>
-          <p:cNvPr id="4" name="Shape 2"/>
-          <p:cNvSpPr/>
-          <p:nvPr/>
-        </p:nvSpPr>
-        <p:spPr>
-          <a:xfrm>
-            <a:off x="548640" y="1691640"/>
-            <a:ext cx="3566160" cy="1783080"/>
-          </a:xfrm>
-          <a:prstGeom prst="roundRect">
-            <a:avLst>
-              <a:gd name="adj" fmla="val 4103"/>
-            </a:avLst>
-          </a:prstGeom>
-          <a:solidFill>
-            <a:srgbClr val="FFFFFF"/>
-          </a:solidFill>
-          <a:ln w="9525">
-            <a:solidFill>
-              <a:srgbClr val="D9E2DC"/>
-            </a:solidFill>
-            <a:prstDash val="solid"/>
-          </a:ln>
-          <a:effectLst>
-            <a:outerShdw sx="100000" sy="100000" kx="0" ky="0" algn="bl" rotWithShape="0" blurRad="76200" dist="25400" dir="5400000">
-              <a:srgbClr val="9AA8A0">
-                <a:alpha val="35000"/>
-              </a:srgbClr>
-            </a:outerShdw>
-          </a:effectLst>
-        </p:spPr>
-      </p:sp>
-      <p:sp>
-        <p:nvSpPr>
-          <p:cNvPr id="5" name="Text 3"/>
-          <p:cNvSpPr/>
-          <p:nvPr/>
-        </p:nvSpPr>
-        <p:spPr>
-          <a:xfrm>
-            <a:off x="640080" y="1856232"/>
-            <a:ext cx="3383280" cy="822960"/>
-          </a:xfrm>
-          <a:prstGeom prst="rect">
-            <a:avLst/>
-          </a:prstGeom>
-          <a:noFill/>
-          <a:ln/>
-        </p:spPr>
-        <p:txBody>
-          <a:bodyPr wrap="square" lIns="0" tIns="0" rIns="0" bIns="0" rtlCol="0" anchor="ctr"/>
-          <a:lstStyle/>
-          <a:p>
-            <a:pPr algn="ctr" indent="0" marL="0">
-              <a:buNone/>
-            </a:pPr>
-            <a:r>
-              <a:rPr lang="en-US" sz="3400" b="1" dirty="0">
-                <a:solidFill>
-                  <a:srgbClr val="1B6B4A"/>
-                </a:solidFill>
-                <a:latin typeface="Cambria" pitchFamily="34" charset="0"/>
-                <a:ea typeface="Cambria" pitchFamily="34" charset="-122"/>
-                <a:cs typeface="Cambria" pitchFamily="34" charset="-120"/>
-              </a:rPr>
-              <a:t>30</a:t>
-            </a:r>
-            <a:endParaRPr lang="en-US" sz="3400" dirty="0"/>
-          </a:p>
-        </p:txBody>
-      </p:sp>
-      <p:sp>
-        <p:nvSpPr>
-          <p:cNvPr id="6" name="Text 4"/>
-          <p:cNvSpPr/>
-          <p:nvPr/>
-        </p:nvSpPr>
-        <p:spPr>
-          <a:xfrm>
-            <a:off x="658368" y="2651760"/>
-            <a:ext cx="3346704" cy="777240"/>
-          </a:xfrm>
-          <a:prstGeom prst="rect">
-            <a:avLst/>
-          </a:prstGeom>
-          <a:noFill/>
-          <a:ln/>
-        </p:spPr>
-        <p:txBody>
-          <a:bodyPr wrap="square" lIns="0" tIns="0" rIns="0" bIns="0" rtlCol="0" anchor="t"/>
-          <a:lstStyle/>
-          <a:p>
-            <a:pPr algn="ctr" indent="0" marL="0">
-              <a:buNone/>
-            </a:pPr>
-            <a:r>
-              <a:rPr lang="en-US" sz="1100" dirty="0">
-                <a:solidFill>
-                  <a:srgbClr val="5D6B63"/>
-                </a:solidFill>
-                <a:latin typeface="Calibri" pitchFamily="34" charset="0"/>
-                <a:ea typeface="Calibri" pitchFamily="34" charset="-122"/>
-                <a:cs typeface="Calibri" pitchFamily="34" charset="-120"/>
-              </a:rPr>
-              <a:t>guests, ≥70% partners onboarded on the day</a:t>
-            </a:r>
-            <a:endParaRPr lang="en-US" sz="1100" dirty="0"/>
-          </a:p>
-        </p:txBody>
-      </p:sp>
-      <p:sp>
-        <p:nvSpPr>
-          <p:cNvPr id="7" name="Shape 5"/>
-          <p:cNvSpPr/>
-          <p:nvPr/>
-        </p:nvSpPr>
-        <p:spPr>
-          <a:xfrm>
-            <a:off x="4261104" y="1691640"/>
-            <a:ext cx="3566160" cy="1783080"/>
-          </a:xfrm>
-          <a:prstGeom prst="roundRect">
-            <a:avLst>
-              <a:gd name="adj" fmla="val 4103"/>
-            </a:avLst>
-          </a:prstGeom>
-          <a:solidFill>
-            <a:srgbClr val="FFFFFF"/>
-          </a:solidFill>
-          <a:ln w="9525">
-            <a:solidFill>
-              <a:srgbClr val="D9E2DC"/>
-            </a:solidFill>
-            <a:prstDash val="solid"/>
-          </a:ln>
-          <a:effectLst>
-            <a:outerShdw sx="100000" sy="100000" kx="0" ky="0" algn="bl" rotWithShape="0" blurRad="76200" dist="25400" dir="5400000">
-              <a:srgbClr val="9AA8A0">
-                <a:alpha val="35000"/>
-              </a:srgbClr>
-            </a:outerShdw>
-          </a:effectLst>
-        </p:spPr>
-      </p:sp>
-      <p:sp>
-        <p:nvSpPr>
-          <p:cNvPr id="8" name="Text 6"/>
-          <p:cNvSpPr/>
-          <p:nvPr/>
-        </p:nvSpPr>
-        <p:spPr>
-          <a:xfrm>
-            <a:off x="4352544" y="1856232"/>
-            <a:ext cx="3383280" cy="822960"/>
-          </a:xfrm>
-          <a:prstGeom prst="rect">
-            <a:avLst/>
-          </a:prstGeom>
-          <a:noFill/>
-          <a:ln/>
-        </p:spPr>
-        <p:txBody>
-          <a:bodyPr wrap="square" lIns="0" tIns="0" rIns="0" bIns="0" rtlCol="0" anchor="ctr"/>
-          <a:lstStyle/>
-          <a:p>
-            <a:pPr algn="ctr" indent="0" marL="0">
-              <a:buNone/>
-            </a:pPr>
-            <a:r>
-              <a:rPr lang="en-US" sz="3400" b="1" dirty="0">
-                <a:solidFill>
-                  <a:srgbClr val="EE9455"/>
-                </a:solidFill>
-                <a:latin typeface="Cambria" pitchFamily="34" charset="0"/>
-                <a:ea typeface="Cambria" pitchFamily="34" charset="-122"/>
-                <a:cs typeface="Cambria" pitchFamily="34" charset="-120"/>
-              </a:rPr>
-              <a:t>25+</a:t>
-            </a:r>
-            <a:endParaRPr lang="en-US" sz="3400" dirty="0"/>
-          </a:p>
-        </p:txBody>
-      </p:sp>
-      <p:sp>
-        <p:nvSpPr>
-          <p:cNvPr id="9" name="Text 7"/>
-          <p:cNvSpPr/>
-          <p:nvPr/>
-        </p:nvSpPr>
-        <p:spPr>
-          <a:xfrm>
-            <a:off x="4370832" y="2651760"/>
-            <a:ext cx="3346704" cy="777240"/>
-          </a:xfrm>
-          <a:prstGeom prst="rect">
-            <a:avLst/>
-          </a:prstGeom>
-          <a:noFill/>
-          <a:ln/>
-        </p:spPr>
-        <p:txBody>
-          <a:bodyPr wrap="square" lIns="0" tIns="0" rIns="0" bIns="0" rtlCol="0" anchor="t"/>
-          <a:lstStyle/>
-          <a:p>
-            <a:pPr algn="ctr" indent="0" marL="0">
-              <a:buNone/>
-            </a:pPr>
-            <a:r>
-              <a:rPr lang="en-US" sz="1100" dirty="0">
-                <a:solidFill>
-                  <a:srgbClr val="5D6B63"/>
-                </a:solidFill>
-                <a:latin typeface="Calibri" pitchFamily="34" charset="0"/>
-                <a:ea typeface="Calibri" pitchFamily="34" charset="-122"/>
-                <a:cs typeface="Calibri" pitchFamily="34" charset="-120"/>
-              </a:rPr>
-              <a:t>active member orgs within 6 weeks</a:t>
-            </a:r>
-            <a:endParaRPr lang="en-US" sz="1100" dirty="0"/>
-          </a:p>
-        </p:txBody>
-      </p:sp>
-      <p:sp>
-        <p:nvSpPr>
-          <p:cNvPr id="10" name="Shape 8"/>
-          <p:cNvSpPr/>
-          <p:nvPr/>
-        </p:nvSpPr>
-        <p:spPr>
-          <a:xfrm>
-            <a:off x="7973568" y="1691640"/>
-            <a:ext cx="3566160" cy="1783080"/>
-          </a:xfrm>
-          <a:prstGeom prst="roundRect">
-            <a:avLst>
-              <a:gd name="adj" fmla="val 4103"/>
-            </a:avLst>
-          </a:prstGeom>
-          <a:solidFill>
-            <a:srgbClr val="FFFFFF"/>
-          </a:solidFill>
-          <a:ln w="9525">
-            <a:solidFill>
-              <a:srgbClr val="D9E2DC"/>
-            </a:solidFill>
-            <a:prstDash val="solid"/>
-          </a:ln>
-          <a:effectLst>
-            <a:outerShdw sx="100000" sy="100000" kx="0" ky="0" algn="bl" rotWithShape="0" blurRad="76200" dist="25400" dir="5400000">
-              <a:srgbClr val="9AA8A0">
-                <a:alpha val="35000"/>
-              </a:srgbClr>
-            </a:outerShdw>
-          </a:effectLst>
-        </p:spPr>
-      </p:sp>
-      <p:sp>
-        <p:nvSpPr>
-          <p:cNvPr id="11" name="Text 9"/>
-          <p:cNvSpPr/>
-          <p:nvPr/>
-        </p:nvSpPr>
-        <p:spPr>
-          <a:xfrm>
-            <a:off x="8065008" y="1856232"/>
-            <a:ext cx="3383280" cy="822960"/>
-          </a:xfrm>
-          <a:prstGeom prst="rect">
-            <a:avLst/>
-          </a:prstGeom>
-          <a:noFill/>
-          <a:ln/>
-        </p:spPr>
-        <p:txBody>
-          <a:bodyPr wrap="square" lIns="0" tIns="0" rIns="0" bIns="0" rtlCol="0" anchor="ctr"/>
-          <a:lstStyle/>
-          <a:p>
-            <a:pPr algn="ctr" indent="0" marL="0">
-              <a:buNone/>
-            </a:pPr>
-            <a:r>
-              <a:rPr lang="en-US" sz="3400" b="1" dirty="0">
-                <a:solidFill>
-                  <a:srgbClr val="2C7A55"/>
-                </a:solidFill>
-                <a:latin typeface="Cambria" pitchFamily="34" charset="0"/>
-                <a:ea typeface="Cambria" pitchFamily="34" charset="-122"/>
-                <a:cs typeface="Cambria" pitchFamily="34" charset="-120"/>
-              </a:rPr>
-              <a:t>40+</a:t>
-            </a:r>
-            <a:endParaRPr lang="en-US" sz="3400" dirty="0"/>
-          </a:p>
-        </p:txBody>
-      </p:sp>
-      <p:sp>
-        <p:nvSpPr>
-          <p:cNvPr id="12" name="Text 10"/>
-          <p:cNvSpPr/>
-          <p:nvPr/>
-        </p:nvSpPr>
-        <p:spPr>
-          <a:xfrm>
-            <a:off x="8083296" y="2651760"/>
-            <a:ext cx="3346704" cy="777240"/>
-          </a:xfrm>
-          <a:prstGeom prst="rect">
-            <a:avLst/>
-          </a:prstGeom>
-          <a:noFill/>
-          <a:ln/>
-        </p:spPr>
-        <p:txBody>
-          <a:bodyPr wrap="square" lIns="0" tIns="0" rIns="0" bIns="0" rtlCol="0" anchor="t"/>
-          <a:lstStyle/>
-          <a:p>
-            <a:pPr algn="ctr" indent="0" marL="0">
-              <a:buNone/>
-            </a:pPr>
-            <a:r>
-              <a:rPr lang="en-US" sz="1100" dirty="0">
-                <a:solidFill>
-                  <a:srgbClr val="5D6B63"/>
-                </a:solidFill>
-                <a:latin typeface="Calibri" pitchFamily="34" charset="0"/>
-                <a:ea typeface="Calibri" pitchFamily="34" charset="-122"/>
-                <a:cs typeface="Calibri" pitchFamily="34" charset="-120"/>
-              </a:rPr>
-              <a:t>resources uploaded in the first month</a:t>
-            </a:r>
-            <a:endParaRPr lang="en-US" sz="1100" dirty="0"/>
-          </a:p>
-        </p:txBody>
-      </p:sp>
-      <p:sp>
-        <p:nvSpPr>
-          <p:cNvPr id="13" name="Shape 11"/>
-          <p:cNvSpPr/>
-          <p:nvPr/>
-        </p:nvSpPr>
-        <p:spPr>
-          <a:xfrm>
-            <a:off x="548640" y="3657600"/>
-            <a:ext cx="3566160" cy="1783080"/>
-          </a:xfrm>
-          <a:prstGeom prst="roundRect">
-            <a:avLst>
-              <a:gd name="adj" fmla="val 4103"/>
-            </a:avLst>
-          </a:prstGeom>
-          <a:solidFill>
-            <a:srgbClr val="FFFFFF"/>
-          </a:solidFill>
-          <a:ln w="9525">
-            <a:solidFill>
-              <a:srgbClr val="D9E2DC"/>
-            </a:solidFill>
-            <a:prstDash val="solid"/>
-          </a:ln>
-          <a:effectLst>
-            <a:outerShdw sx="100000" sy="100000" kx="0" ky="0" algn="bl" rotWithShape="0" blurRad="76200" dist="25400" dir="5400000">
-              <a:srgbClr val="9AA8A0">
-                <a:alpha val="35000"/>
-              </a:srgbClr>
-            </a:outerShdw>
-          </a:effectLst>
-        </p:spPr>
-      </p:sp>
-      <p:sp>
-        <p:nvSpPr>
-          <p:cNvPr id="14" name="Text 12"/>
-          <p:cNvSpPr/>
-          <p:nvPr/>
-        </p:nvSpPr>
-        <p:spPr>
-          <a:xfrm>
-            <a:off x="640080" y="3822192"/>
-            <a:ext cx="3383280" cy="822960"/>
-          </a:xfrm>
-          <a:prstGeom prst="rect">
-            <a:avLst/>
-          </a:prstGeom>
-          <a:noFill/>
-          <a:ln/>
-        </p:spPr>
-        <p:txBody>
-          <a:bodyPr wrap="square" lIns="0" tIns="0" rIns="0" bIns="0" rtlCol="0" anchor="ctr"/>
-          <a:lstStyle/>
-          <a:p>
-            <a:pPr algn="ctr" indent="0" marL="0">
-              <a:buNone/>
-            </a:pPr>
-            <a:r>
-              <a:rPr lang="en-US" sz="3400" b="1" dirty="0">
-                <a:solidFill>
-                  <a:srgbClr val="1B6B4A"/>
-                </a:solidFill>
-                <a:latin typeface="Cambria" pitchFamily="34" charset="0"/>
-                <a:ea typeface="Cambria" pitchFamily="34" charset="-122"/>
-                <a:cs typeface="Cambria" pitchFamily="34" charset="-120"/>
-              </a:rPr>
-              <a:t>3</a:t>
-            </a:r>
-            <a:endParaRPr lang="en-US" sz="3400" dirty="0"/>
-          </a:p>
-        </p:txBody>
-      </p:sp>
-      <p:sp>
-        <p:nvSpPr>
-          <p:cNvPr id="15" name="Text 13"/>
-          <p:cNvSpPr/>
-          <p:nvPr/>
-        </p:nvSpPr>
-        <p:spPr>
-          <a:xfrm>
-            <a:off x="658368" y="4617720"/>
-            <a:ext cx="3346704" cy="777240"/>
-          </a:xfrm>
-          <a:prstGeom prst="rect">
-            <a:avLst/>
-          </a:prstGeom>
-          <a:noFill/>
-          <a:ln/>
-        </p:spPr>
-        <p:txBody>
-          <a:bodyPr wrap="square" lIns="0" tIns="0" rIns="0" bIns="0" rtlCol="0" anchor="t"/>
-          <a:lstStyle/>
-          <a:p>
-            <a:pPr algn="ctr" indent="0" marL="0">
-              <a:buNone/>
-            </a:pPr>
-            <a:r>
-              <a:rPr lang="en-US" sz="1100" dirty="0">
-                <a:solidFill>
-                  <a:srgbClr val="5D6B63"/>
-                </a:solidFill>
-                <a:latin typeface="Calibri" pitchFamily="34" charset="0"/>
-                <a:ea typeface="Calibri" pitchFamily="34" charset="-122"/>
-                <a:cs typeface="Calibri" pitchFamily="34" charset="-120"/>
-              </a:rPr>
-              <a:t>petitions live in quarter one</a:t>
-            </a:r>
-            <a:endParaRPr lang="en-US" sz="1100" dirty="0"/>
-          </a:p>
-        </p:txBody>
-      </p:sp>
-      <p:sp>
-        <p:nvSpPr>
-          <p:cNvPr id="16" name="Shape 14"/>
-          <p:cNvSpPr/>
-          <p:nvPr/>
-        </p:nvSpPr>
-        <p:spPr>
-          <a:xfrm>
-            <a:off x="4261104" y="3657600"/>
-            <a:ext cx="3566160" cy="1783080"/>
-          </a:xfrm>
-          <a:prstGeom prst="roundRect">
-            <a:avLst>
-              <a:gd name="adj" fmla="val 4103"/>
-            </a:avLst>
-          </a:prstGeom>
-          <a:solidFill>
-            <a:srgbClr val="FFFFFF"/>
-          </a:solidFill>
-          <a:ln w="9525">
-            <a:solidFill>
-              <a:srgbClr val="D9E2DC"/>
-            </a:solidFill>
-            <a:prstDash val="solid"/>
-          </a:ln>
-          <a:effectLst>
-            <a:outerShdw sx="100000" sy="100000" kx="0" ky="0" algn="bl" rotWithShape="0" blurRad="76200" dist="25400" dir="5400000">
-              <a:srgbClr val="9AA8A0">
-                <a:alpha val="35000"/>
-              </a:srgbClr>
-            </a:outerShdw>
-          </a:effectLst>
-        </p:spPr>
-      </p:sp>
-      <p:sp>
-        <p:nvSpPr>
-          <p:cNvPr id="17" name="Text 15"/>
-          <p:cNvSpPr/>
-          <p:nvPr/>
-        </p:nvSpPr>
-        <p:spPr>
-          <a:xfrm>
-            <a:off x="4352544" y="3822192"/>
-            <a:ext cx="3383280" cy="822960"/>
-          </a:xfrm>
-          <a:prstGeom prst="rect">
-            <a:avLst/>
-          </a:prstGeom>
-          <a:noFill/>
-          <a:ln/>
-        </p:spPr>
-        <p:txBody>
-          <a:bodyPr wrap="square" lIns="0" tIns="0" rIns="0" bIns="0" rtlCol="0" anchor="ctr"/>
-          <a:lstStyle/>
-          <a:p>
-            <a:pPr algn="ctr" indent="0" marL="0">
-              <a:buNone/>
-            </a:pPr>
-            <a:r>
-              <a:rPr lang="en-US" sz="3400" b="1" dirty="0">
-                <a:solidFill>
-                  <a:srgbClr val="EE9455"/>
-                </a:solidFill>
-                <a:latin typeface="Cambria" pitchFamily="34" charset="0"/>
-                <a:ea typeface="Cambria" pitchFamily="34" charset="-122"/>
-                <a:cs typeface="Cambria" pitchFamily="34" charset="-120"/>
-              </a:rPr>
-              <a:t>8+</a:t>
-            </a:r>
-            <a:endParaRPr lang="en-US" sz="3400" dirty="0"/>
-          </a:p>
-        </p:txBody>
-      </p:sp>
-      <p:sp>
-        <p:nvSpPr>
-          <p:cNvPr id="18" name="Text 16"/>
-          <p:cNvSpPr/>
-          <p:nvPr/>
-        </p:nvSpPr>
-        <p:spPr>
-          <a:xfrm>
-            <a:off x="4370832" y="4617720"/>
-            <a:ext cx="3346704" cy="777240"/>
-          </a:xfrm>
-          <a:prstGeom prst="rect">
-            <a:avLst/>
-          </a:prstGeom>
-          <a:noFill/>
-          <a:ln/>
-        </p:spPr>
-        <p:txBody>
-          <a:bodyPr wrap="square" lIns="0" tIns="0" rIns="0" bIns="0" rtlCol="0" anchor="t"/>
-          <a:lstStyle/>
-          <a:p>
-            <a:pPr algn="ctr" indent="0" marL="0">
-              <a:buNone/>
-            </a:pPr>
-            <a:r>
-              <a:rPr lang="en-US" sz="1100" dirty="0">
-                <a:solidFill>
-                  <a:srgbClr val="5D6B63"/>
-                </a:solidFill>
-                <a:latin typeface="Calibri" pitchFamily="34" charset="0"/>
-                <a:ea typeface="Calibri" pitchFamily="34" charset="-122"/>
-                <a:cs typeface="Calibri" pitchFamily="34" charset="-120"/>
-              </a:rPr>
-              <a:t>media pickups from the launch</a:t>
-            </a:r>
-            <a:endParaRPr lang="en-US" sz="1100" dirty="0"/>
-          </a:p>
-        </p:txBody>
-      </p:sp>
-      <p:sp>
-        <p:nvSpPr>
-          <p:cNvPr id="19" name="Shape 17"/>
-          <p:cNvSpPr/>
-          <p:nvPr/>
-        </p:nvSpPr>
-        <p:spPr>
-          <a:xfrm>
-            <a:off x="7973568" y="3657600"/>
-            <a:ext cx="3566160" cy="1783080"/>
-          </a:xfrm>
-          <a:prstGeom prst="roundRect">
-            <a:avLst>
-              <a:gd name="adj" fmla="val 4103"/>
-            </a:avLst>
-          </a:prstGeom>
-          <a:solidFill>
-            <a:srgbClr val="FFFFFF"/>
-          </a:solidFill>
-          <a:ln w="9525">
-            <a:solidFill>
-              <a:srgbClr val="D9E2DC"/>
-            </a:solidFill>
-            <a:prstDash val="solid"/>
-          </a:ln>
-          <a:effectLst>
-            <a:outerShdw sx="100000" sy="100000" kx="0" ky="0" algn="bl" rotWithShape="0" blurRad="76200" dist="25400" dir="5400000">
-              <a:srgbClr val="9AA8A0">
-                <a:alpha val="35000"/>
-              </a:srgbClr>
-            </a:outerShdw>
-          </a:effectLst>
-        </p:spPr>
-      </p:sp>
-      <p:sp>
-        <p:nvSpPr>
-          <p:cNvPr id="20" name="Text 18"/>
-          <p:cNvSpPr/>
-          <p:nvPr/>
-        </p:nvSpPr>
-        <p:spPr>
-          <a:xfrm>
-            <a:off x="8065008" y="3822192"/>
-            <a:ext cx="3383280" cy="822960"/>
-          </a:xfrm>
-          <a:prstGeom prst="rect">
-            <a:avLst/>
-          </a:prstGeom>
-          <a:noFill/>
-          <a:ln/>
-        </p:spPr>
-        <p:txBody>
-          <a:bodyPr wrap="square" lIns="0" tIns="0" rIns="0" bIns="0" rtlCol="0" anchor="ctr"/>
-          <a:lstStyle/>
-          <a:p>
-            <a:pPr algn="ctr" indent="0" marL="0">
-              <a:buNone/>
-            </a:pPr>
-            <a:r>
-              <a:rPr lang="en-US" sz="3400" b="1" dirty="0">
-                <a:solidFill>
-                  <a:srgbClr val="2C7A55"/>
-                </a:solidFill>
-                <a:latin typeface="Cambria" pitchFamily="34" charset="0"/>
-                <a:ea typeface="Cambria" pitchFamily="34" charset="-122"/>
-                <a:cs typeface="Cambria" pitchFamily="34" charset="-120"/>
-              </a:rPr>
-              <a:t>Weekly</a:t>
-            </a:r>
-            <a:endParaRPr lang="en-US" sz="3400" dirty="0"/>
-          </a:p>
-        </p:txBody>
-      </p:sp>
-      <p:sp>
-        <p:nvSpPr>
-          <p:cNvPr id="21" name="Text 19"/>
-          <p:cNvSpPr/>
-          <p:nvPr/>
-        </p:nvSpPr>
-        <p:spPr>
-          <a:xfrm>
-            <a:off x="8083296" y="4617720"/>
-            <a:ext cx="3346704" cy="777240"/>
-          </a:xfrm>
-          <a:prstGeom prst="rect">
-            <a:avLst/>
-          </a:prstGeom>
-          <a:noFill/>
-          <a:ln/>
-        </p:spPr>
-        <p:txBody>
-          <a:bodyPr wrap="square" lIns="0" tIns="0" rIns="0" bIns="0" rtlCol="0" anchor="t"/>
-          <a:lstStyle/>
-          <a:p>
-            <a:pPr algn="ctr" indent="0" marL="0">
-              <a:buNone/>
-            </a:pPr>
-            <a:r>
-              <a:rPr lang="en-US" sz="1100" dirty="0">
-                <a:solidFill>
-                  <a:srgbClr val="5D6B63"/>
-                </a:solidFill>
-                <a:latin typeface="Calibri" pitchFamily="34" charset="0"/>
-                <a:ea typeface="Calibri" pitchFamily="34" charset="-122"/>
-                <a:cs typeface="Calibri" pitchFamily="34" charset="-120"/>
-              </a:rPr>
-              <a:t>sign-ins tracked per org</a:t>
-            </a:r>
-            <a:endParaRPr lang="en-US" sz="1100" dirty="0"/>
-          </a:p>
-        </p:txBody>
-      </p:sp>
-      <p:sp>
-        <p:nvSpPr>
-          <p:cNvPr id="22" name="Text 20"/>
-          <p:cNvSpPr/>
-          <p:nvPr/>
-        </p:nvSpPr>
-        <p:spPr>
-          <a:xfrm>
-            <a:off x="548640" y="6446520"/>
-            <a:ext cx="11064240" cy="274320"/>
-          </a:xfrm>
-          <a:prstGeom prst="rect">
-            <a:avLst/>
-          </a:prstGeom>
-          <a:noFill/>
-          <a:ln/>
-        </p:spPr>
-        <p:txBody>
-          <a:bodyPr wrap="square" lIns="0" tIns="0" rIns="0" bIns="0" rtlCol="0" anchor="ctr"/>
-          <a:lstStyle/>
-          <a:p>
-            <a:pPr indent="0" marL="0">
-              <a:buNone/>
-            </a:pPr>
-            <a:r>
-              <a:rPr lang="en-US" sz="900" i="1" dirty="0">
-                <a:solidFill>
-                  <a:srgbClr val="5D6B63"/>
-                </a:solidFill>
-                <a:latin typeface="Calibri" pitchFamily="34" charset="0"/>
-                <a:ea typeface="Calibri" pitchFamily="34" charset="-122"/>
-                <a:cs typeface="Calibri" pitchFamily="34" charset="-120"/>
-              </a:rPr>
-              <a:t>MazingiraKenya · Activation &amp; launch plan</a:t>
-            </a:r>
-            <a:endParaRPr lang="en-US" sz="900" dirty="0"/>
-          </a:p>
-        </p:txBody>
-      </p:sp>
-    </p:spTree>
-  </p:cSld>
-  <p:clrMapOvr>
-    <a:masterClrMapping/>
-  </p:clrMapOvr>
-</p:sld>
-</file>
-
 <file path=ppt/theme/theme1.xml><?xml version="1.0" encoding="utf-8"?>
 <a:theme xmlns:a="http://schemas.openxmlformats.org/drawingml/2006/main" name="Office Theme">
   <a:themeElements>
